--- a/en/03_Deliverables/PPTX/M0_EN_Deck_CFG-5_Lesson02_FindAProblemWorthSolving_v1.pptx
+++ b/en/03_Deliverables/PPTX/M0_EN_Deck_CFG-5_Lesson02_FindAProblemWorthSolving_v1.pptx
@@ -4,31 +4,34 @@
   <p:sldMasterIdLst>
     <p:sldMasterId id="2147483648" r:id="rId1"/>
   </p:sldMasterIdLst>
+  <p:notesMasterIdLst>
+    <p:notesMasterId r:id="rId24"/>
+  </p:notesMasterIdLst>
   <p:sldIdLst>
-    <p:sldId id="256" r:id="rId7"/>
-    <p:sldId id="257" r:id="rId9"/>
-    <p:sldId id="258" r:id="rId10"/>
-    <p:sldId id="259" r:id="rId11"/>
-    <p:sldId id="260" r:id="rId12"/>
-    <p:sldId id="261" r:id="rId13"/>
-    <p:sldId id="262" r:id="rId14"/>
-    <p:sldId id="263" r:id="rId15"/>
-    <p:sldId id="264" r:id="rId16"/>
-    <p:sldId id="265" r:id="rId17"/>
-    <p:sldId id="266" r:id="rId18"/>
-    <p:sldId id="267" r:id="rId19"/>
-    <p:sldId id="268" r:id="rId20"/>
-    <p:sldId id="269" r:id="rId21"/>
-    <p:sldId id="270" r:id="rId22"/>
-    <p:sldId id="271" r:id="rId23"/>
-    <p:sldId id="272" r:id="rId24"/>
-    <p:sldId id="273" r:id="rId25"/>
-    <p:sldId id="274" r:id="rId26"/>
-    <p:sldId id="275" r:id="rId27"/>
-    <p:sldId id="276" r:id="rId28"/>
-    <p:sldId id="277" r:id="rId29"/>
+    <p:sldId id="256" r:id="rId2"/>
+    <p:sldId id="257" r:id="rId3"/>
+    <p:sldId id="258" r:id="rId4"/>
+    <p:sldId id="259" r:id="rId5"/>
+    <p:sldId id="260" r:id="rId6"/>
+    <p:sldId id="261" r:id="rId7"/>
+    <p:sldId id="262" r:id="rId8"/>
+    <p:sldId id="263" r:id="rId9"/>
+    <p:sldId id="264" r:id="rId10"/>
+    <p:sldId id="265" r:id="rId11"/>
+    <p:sldId id="266" r:id="rId12"/>
+    <p:sldId id="267" r:id="rId13"/>
+    <p:sldId id="268" r:id="rId14"/>
+    <p:sldId id="269" r:id="rId15"/>
+    <p:sldId id="270" r:id="rId16"/>
+    <p:sldId id="271" r:id="rId17"/>
+    <p:sldId id="272" r:id="rId18"/>
+    <p:sldId id="273" r:id="rId19"/>
+    <p:sldId id="274" r:id="rId20"/>
+    <p:sldId id="275" r:id="rId21"/>
+    <p:sldId id="276" r:id="rId22"/>
+    <p:sldId id="277" r:id="rId23"/>
   </p:sldIdLst>
-  <p:sldSz cx="9144000" cy="5143500" type="screen4x3"/>
+  <p:sldSz cx="9144000" cy="5143500" type="screen16x9"/>
   <p:notesSz cx="6858000" cy="9144000"/>
   <p:defaultTextStyle>
     <a:defPPr>
@@ -125,11 +128,27 @@
       </a:defRPr>
     </a:lvl9pPr>
   </p:defaultTextStyle>
+  <p:extLst>
+    <p:ext uri="{EFAFB233-063F-42B5-8137-9DF3F51BA10A}">
+      <p15:sldGuideLst xmlns:p15="http://schemas.microsoft.com/office/powerpoint/2012/main">
+        <p15:guide id="1" orient="horz" pos="2160">
+          <p15:clr>
+            <a:srgbClr val="A4A3A4"/>
+          </p15:clr>
+        </p15:guide>
+        <p15:guide id="2" pos="2880">
+          <p15:clr>
+            <a:srgbClr val="A4A3A4"/>
+          </p15:clr>
+        </p15:guide>
+      </p15:sldGuideLst>
+    </p:ext>
+  </p:extLst>
 </p:presentation>
 </file>
 
 <file path=ppt/notesMasters/notesMaster1.xml><?xml version="1.0" encoding="utf-8"?>
-<p:notesMaster xmlns:a="http://schemas.openxmlformats.org/drawingml/2006/main" xmlns:p="http://schemas.openxmlformats.org/presentationml/2006/main" xmlns:r="http://schemas.openxmlformats.org/officeDocument/2006/relationships">
+<p:notesMaster xmlns:a="http://schemas.openxmlformats.org/drawingml/2006/main" xmlns:r="http://schemas.openxmlformats.org/officeDocument/2006/relationships" xmlns:p="http://schemas.openxmlformats.org/presentationml/2006/main">
   <p:cSld>
     <p:bg>
       <p:bgRef idx="1001">
@@ -150,241 +169,16 @@
           <a:chExt cx="0" cy="0"/>
         </a:xfrm>
       </p:grpSpPr>
-      <p:sp>
-        <p:nvSpPr>
-          <p:cNvPr id="2" name="Header Placeholder 1"/>
-          <p:cNvSpPr>
-            <a:spLocks noGrp="1"/>
-          </p:cNvSpPr>
-          <p:nvPr>
-            <p:ph type="hdr" sz="quarter"/>
-          </p:nvPr>
-        </p:nvSpPr>
-        <p:spPr>
-          <a:xfrm>
-            <a:off x="0" y="0"/>
-            <a:ext cx="2971800" cy="457200"/>
-          </a:xfrm>
-          <a:prstGeom prst="rect">
-            <a:avLst/>
-          </a:prstGeom>
-        </p:spPr>
-        <p:txBody>
-          <a:bodyPr vert="horz" lIns="91440" tIns="45720" rIns="91440" bIns="45720" rtlCol="0"/>
-          <a:lstStyle>
-            <a:lvl1pPr algn="l">
-              <a:defRPr sz="1200"/>
-            </a:lvl1pPr>
-          </a:lstStyle>
-          <a:p>
-            <a:endParaRPr lang="en-US"/>
-          </a:p>
-        </p:txBody>
-      </p:sp>
-      <p:sp>
-        <p:nvSpPr>
-          <p:cNvPr id="3" name="Date Placeholder 2"/>
-          <p:cNvSpPr>
-            <a:spLocks noGrp="1"/>
-          </p:cNvSpPr>
-          <p:nvPr>
-            <p:ph type="dt" idx="1"/>
-          </p:nvPr>
-        </p:nvSpPr>
-        <p:spPr>
-          <a:xfrm>
-            <a:off x="3884613" y="0"/>
-            <a:ext cx="2971800" cy="457200"/>
-          </a:xfrm>
-          <a:prstGeom prst="rect">
-            <a:avLst/>
-          </a:prstGeom>
-        </p:spPr>
-        <p:txBody>
-          <a:bodyPr vert="horz" lIns="91440" tIns="45720" rIns="91440" bIns="45720" rtlCol="0"/>
-          <a:lstStyle>
-            <a:lvl1pPr algn="r">
-              <a:defRPr sz="1200"/>
-            </a:lvl1pPr>
-          </a:lstStyle>
-          <a:p>
-            <a:fld id="{0F89C1C7-3DCD-1040-A9CF-14679D8B5DDD}" type="datetimeFigureOut">
-              <a:rPr lang="en-US" smtClean="0"/>
-              <a:t>10/17/16</a:t>
-            </a:fld>
-            <a:endParaRPr lang="en-US"/>
-          </a:p>
-        </p:txBody>
-      </p:sp>
-      <p:sp>
-        <p:nvSpPr>
-          <p:cNvPr id="4" name="Slide Image Placeholder 3"/>
-          <p:cNvSpPr>
-            <a:spLocks noGrp="1" noRot="1" noChangeAspect="1"/>
-          </p:cNvSpPr>
-          <p:nvPr>
-            <p:ph type="sldImg" idx="2"/>
-          </p:nvPr>
-        </p:nvSpPr>
-        <p:spPr>
-          <a:xfrm>
-            <a:off x="1143000" y="685800"/>
-            <a:ext cx="4572000" cy="3429000"/>
-          </a:xfrm>
-          <a:prstGeom prst="rect">
-            <a:avLst/>
-          </a:prstGeom>
-          <a:noFill/>
-          <a:ln w="12700">
-            <a:solidFill>
-              <a:prstClr val="black"/>
-            </a:solidFill>
-          </a:ln>
-        </p:spPr>
-        <p:txBody>
-          <a:bodyPr vert="horz" lIns="91440" tIns="45720" rIns="91440" bIns="45720" rtlCol="0" anchor="ctr"/>
-          <a:lstStyle/>
-          <a:p>
-            <a:endParaRPr lang="en-US"/>
-          </a:p>
-        </p:txBody>
-      </p:sp>
-      <p:sp>
-        <p:nvSpPr>
-          <p:cNvPr id="5" name="Notes Placeholder 4"/>
-          <p:cNvSpPr>
-            <a:spLocks noGrp="1"/>
-          </p:cNvSpPr>
-          <p:nvPr>
-            <p:ph type="body" sz="quarter" idx="3"/>
-          </p:nvPr>
-        </p:nvSpPr>
-        <p:spPr>
-          <a:xfrm>
-            <a:off x="685800" y="4343400"/>
-            <a:ext cx="5486400" cy="4114800"/>
-          </a:xfrm>
-          <a:prstGeom prst="rect">
-            <a:avLst/>
-          </a:prstGeom>
-        </p:spPr>
-        <p:txBody>
-          <a:bodyPr vert="horz" lIns="91440" tIns="45720" rIns="91440" bIns="45720" rtlCol="0"/>
-          <a:lstStyle/>
-          <a:p>
-            <a:pPr lvl="0"/>
-            <a:r>
-              <a:rPr lang="en-US" smtClean="0"/>
-              <a:t>Click to edit Master text styles</a:t>
-            </a:r>
-          </a:p>
-          <a:p>
-            <a:pPr lvl="1"/>
-            <a:r>
-              <a:rPr lang="en-US" smtClean="0"/>
-              <a:t>Second level</a:t>
-            </a:r>
-          </a:p>
-          <a:p>
-            <a:pPr lvl="2"/>
-            <a:r>
-              <a:rPr lang="en-US" smtClean="0"/>
-              <a:t>Third level</a:t>
-            </a:r>
-          </a:p>
-          <a:p>
-            <a:pPr lvl="3"/>
-            <a:r>
-              <a:rPr lang="en-US" smtClean="0"/>
-              <a:t>Fourth level</a:t>
-            </a:r>
-          </a:p>
-          <a:p>
-            <a:pPr lvl="4"/>
-            <a:r>
-              <a:rPr lang="en-US" smtClean="0"/>
-              <a:t>Fifth level</a:t>
-            </a:r>
-            <a:endParaRPr lang="en-US"/>
-          </a:p>
-        </p:txBody>
-      </p:sp>
-      <p:sp>
-        <p:nvSpPr>
-          <p:cNvPr id="6" name="Footer Placeholder 5"/>
-          <p:cNvSpPr>
-            <a:spLocks noGrp="1"/>
-          </p:cNvSpPr>
-          <p:nvPr>
-            <p:ph type="ftr" sz="quarter" idx="4"/>
-          </p:nvPr>
-        </p:nvSpPr>
-        <p:spPr>
-          <a:xfrm>
-            <a:off x="0" y="8685213"/>
-            <a:ext cx="2971800" cy="457200"/>
-          </a:xfrm>
-          <a:prstGeom prst="rect">
-            <a:avLst/>
-          </a:prstGeom>
-        </p:spPr>
-        <p:txBody>
-          <a:bodyPr vert="horz" lIns="91440" tIns="45720" rIns="91440" bIns="45720" rtlCol="0" anchor="b"/>
-          <a:lstStyle>
-            <a:lvl1pPr algn="l">
-              <a:defRPr sz="1200"/>
-            </a:lvl1pPr>
-          </a:lstStyle>
-          <a:p>
-            <a:endParaRPr lang="en-US"/>
-          </a:p>
-        </p:txBody>
-      </p:sp>
-      <p:sp>
-        <p:nvSpPr>
-          <p:cNvPr id="7" name="Slide Number Placeholder 6"/>
-          <p:cNvSpPr>
-            <a:spLocks noGrp="1"/>
-          </p:cNvSpPr>
-          <p:nvPr>
-            <p:ph type="sldNum" sz="quarter" idx="5"/>
-          </p:nvPr>
-        </p:nvSpPr>
-        <p:spPr>
-          <a:xfrm>
-            <a:off x="3884613" y="8685213"/>
-            <a:ext cx="2971800" cy="457200"/>
-          </a:xfrm>
-          <a:prstGeom prst="rect">
-            <a:avLst/>
-          </a:prstGeom>
-        </p:spPr>
-        <p:txBody>
-          <a:bodyPr vert="horz" lIns="91440" tIns="45720" rIns="91440" bIns="45720" rtlCol="0" anchor="b"/>
-          <a:lstStyle>
-            <a:lvl1pPr algn="r">
-              <a:defRPr sz="1200"/>
-            </a:lvl1pPr>
-          </a:lstStyle>
-          <a:p>
-            <a:fld id="{BB5E49A5-4136-284D-997B-48E1D791AD67}" type="slidenum">
-              <a:rPr lang="en-US" smtClean="0"/>
-              <a:t>‹#›</a:t>
-            </a:fld>
-            <a:endParaRPr lang="en-US"/>
-          </a:p>
-        </p:txBody>
-      </p:sp>
     </p:spTree>
     <p:extLst>
       <p:ext uri="{BB962C8B-B14F-4D97-AF65-F5344CB8AC3E}">
-        <p14:creationId xmlns:p14="http://schemas.microsoft.com/office/powerpoint/2010/main" val="2623252185"/>
+        <p14:creationId xmlns:p14="http://schemas.microsoft.com/office/powerpoint/2010/main" val="262689413"/>
       </p:ext>
     </p:extLst>
   </p:cSld>
   <p:clrMap bg1="lt1" tx1="dk1" bg2="lt2" tx2="dk2" accent1="accent1" accent2="accent2" accent3="accent3" accent4="accent4" accent5="accent5" accent6="accent6" hlink="hlink" folHlink="folHlink"/>
   <p:notesStyle>
-    <a:lvl1pPr marL="0" algn="l" defTabSz="457200" rtl="0" eaLnBrk="1" latinLnBrk="0" hangingPunct="1">
+    <a:lvl1pPr marL="0" algn="l" defTabSz="914400" rtl="0" eaLnBrk="1" latinLnBrk="0" hangingPunct="1">
       <a:defRPr sz="1200" kern="1200">
         <a:solidFill>
           <a:schemeClr val="tx1"/>
@@ -394,7 +188,7 @@
         <a:cs typeface="+mn-cs"/>
       </a:defRPr>
     </a:lvl1pPr>
-    <a:lvl2pPr marL="457200" algn="l" defTabSz="457200" rtl="0" eaLnBrk="1" latinLnBrk="0" hangingPunct="1">
+    <a:lvl2pPr marL="457200" algn="l" defTabSz="914400" rtl="0" eaLnBrk="1" latinLnBrk="0" hangingPunct="1">
       <a:defRPr sz="1200" kern="1200">
         <a:solidFill>
           <a:schemeClr val="tx1"/>
@@ -404,7 +198,7 @@
         <a:cs typeface="+mn-cs"/>
       </a:defRPr>
     </a:lvl2pPr>
-    <a:lvl3pPr marL="914400" algn="l" defTabSz="457200" rtl="0" eaLnBrk="1" latinLnBrk="0" hangingPunct="1">
+    <a:lvl3pPr marL="914400" algn="l" defTabSz="914400" rtl="0" eaLnBrk="1" latinLnBrk="0" hangingPunct="1">
       <a:defRPr sz="1200" kern="1200">
         <a:solidFill>
           <a:schemeClr val="tx1"/>
@@ -414,7 +208,7 @@
         <a:cs typeface="+mn-cs"/>
       </a:defRPr>
     </a:lvl3pPr>
-    <a:lvl4pPr marL="1371600" algn="l" defTabSz="457200" rtl="0" eaLnBrk="1" latinLnBrk="0" hangingPunct="1">
+    <a:lvl4pPr marL="1371600" algn="l" defTabSz="914400" rtl="0" eaLnBrk="1" latinLnBrk="0" hangingPunct="1">
       <a:defRPr sz="1200" kern="1200">
         <a:solidFill>
           <a:schemeClr val="tx1"/>
@@ -424,7 +218,7 @@
         <a:cs typeface="+mn-cs"/>
       </a:defRPr>
     </a:lvl4pPr>
-    <a:lvl5pPr marL="1828800" algn="l" defTabSz="457200" rtl="0" eaLnBrk="1" latinLnBrk="0" hangingPunct="1">
+    <a:lvl5pPr marL="1828800" algn="l" defTabSz="914400" rtl="0" eaLnBrk="1" latinLnBrk="0" hangingPunct="1">
       <a:defRPr sz="1200" kern="1200">
         <a:solidFill>
           <a:schemeClr val="tx1"/>
@@ -434,7 +228,7 @@
         <a:cs typeface="+mn-cs"/>
       </a:defRPr>
     </a:lvl5pPr>
-    <a:lvl6pPr marL="2286000" algn="l" defTabSz="457200" rtl="0" eaLnBrk="1" latinLnBrk="0" hangingPunct="1">
+    <a:lvl6pPr marL="2286000" algn="l" defTabSz="914400" rtl="0" eaLnBrk="1" latinLnBrk="0" hangingPunct="1">
       <a:defRPr sz="1200" kern="1200">
         <a:solidFill>
           <a:schemeClr val="tx1"/>
@@ -444,7 +238,7 @@
         <a:cs typeface="+mn-cs"/>
       </a:defRPr>
     </a:lvl6pPr>
-    <a:lvl7pPr marL="2743200" algn="l" defTabSz="457200" rtl="0" eaLnBrk="1" latinLnBrk="0" hangingPunct="1">
+    <a:lvl7pPr marL="2743200" algn="l" defTabSz="914400" rtl="0" eaLnBrk="1" latinLnBrk="0" hangingPunct="1">
       <a:defRPr sz="1200" kern="1200">
         <a:solidFill>
           <a:schemeClr val="tx1"/>
@@ -454,7 +248,7 @@
         <a:cs typeface="+mn-cs"/>
       </a:defRPr>
     </a:lvl7pPr>
-    <a:lvl8pPr marL="3200400" algn="l" defTabSz="457200" rtl="0" eaLnBrk="1" latinLnBrk="0" hangingPunct="1">
+    <a:lvl8pPr marL="3200400" algn="l" defTabSz="914400" rtl="0" eaLnBrk="1" latinLnBrk="0" hangingPunct="1">
       <a:defRPr sz="1200" kern="1200">
         <a:solidFill>
           <a:schemeClr val="tx1"/>
@@ -464,7 +258,7 @@
         <a:cs typeface="+mn-cs"/>
       </a:defRPr>
     </a:lvl8pPr>
-    <a:lvl9pPr marL="3657600" algn="l" defTabSz="457200" rtl="0" eaLnBrk="1" latinLnBrk="0" hangingPunct="1">
+    <a:lvl9pPr marL="3657600" algn="l" defTabSz="914400" rtl="0" eaLnBrk="1" latinLnBrk="0" hangingPunct="1">
       <a:defRPr sz="1200" kern="1200">
         <a:solidFill>
           <a:schemeClr val="tx1"/>
@@ -479,7 +273,7 @@
 </file>
 
 <file path=ppt/notesSlides/notesSlide1.xml><?xml version="1.0" encoding="utf-8"?>
-<p:notes xmlns:a="http://schemas.openxmlformats.org/drawingml/2006/main" xmlns:p="http://schemas.openxmlformats.org/presentationml/2006/main" xmlns:r="http://schemas.openxmlformats.org/officeDocument/2006/relationships">
+<p:notes xmlns:a="http://schemas.openxmlformats.org/drawingml/2006/main" xmlns:r="http://schemas.openxmlformats.org/officeDocument/2006/relationships" xmlns:p="http://schemas.openxmlformats.org/presentationml/2006/main">
   <p:cSld>
     <p:spTree>
       <p:nvGrpSpPr>
@@ -499,7 +293,7 @@
         <p:nvSpPr>
           <p:cNvPr id="2" name="Slide Image Placeholder 1"/>
           <p:cNvSpPr>
-            <a:spLocks noGrp="1"/>
+            <a:spLocks noGrp="1" noRot="1" noChangeAspect="1"/>
           </p:cNvSpPr>
           <p:nvPr>
             <p:ph type="sldImg" idx="2"/>
@@ -514,7 +308,7 @@
             <a:spLocks noGrp="1"/>
           </p:cNvSpPr>
           <p:nvPr>
-            <p:ph type="body" idx="3" sz="quarter"/>
+            <p:ph type="body" sz="quarter" idx="3"/>
           </p:nvPr>
         </p:nvSpPr>
         <p:spPr/>
@@ -535,7 +329,7 @@
             <a:spLocks noGrp="1"/>
           </p:cNvSpPr>
           <p:nvPr>
-            <p:ph type="sldNum" idx="5" sz="quarter"/>
+            <p:ph type="sldNum" sz="quarter" idx="5"/>
           </p:nvPr>
         </p:nvSpPr>
         <p:spPr/>
@@ -549,7 +343,7 @@
 </file>
 
 <file path=ppt/notesSlides/notesSlide10.xml><?xml version="1.0" encoding="utf-8"?>
-<p:notes xmlns:a="http://schemas.openxmlformats.org/drawingml/2006/main" xmlns:p="http://schemas.openxmlformats.org/presentationml/2006/main" xmlns:r="http://schemas.openxmlformats.org/officeDocument/2006/relationships">
+<p:notes xmlns:a="http://schemas.openxmlformats.org/drawingml/2006/main" xmlns:r="http://schemas.openxmlformats.org/officeDocument/2006/relationships" xmlns:p="http://schemas.openxmlformats.org/presentationml/2006/main">
   <p:cSld>
     <p:spTree>
       <p:nvGrpSpPr>
@@ -569,7 +363,7 @@
         <p:nvSpPr>
           <p:cNvPr id="2" name="Slide Image Placeholder 1"/>
           <p:cNvSpPr>
-            <a:spLocks noGrp="1"/>
+            <a:spLocks noGrp="1" noRot="1" noChangeAspect="1"/>
           </p:cNvSpPr>
           <p:nvPr>
             <p:ph type="sldImg" idx="2"/>
@@ -584,7 +378,7 @@
             <a:spLocks noGrp="1"/>
           </p:cNvSpPr>
           <p:nvPr>
-            <p:ph type="body" idx="3" sz="quarter"/>
+            <p:ph type="body" sz="quarter" idx="3"/>
           </p:nvPr>
         </p:nvSpPr>
         <p:spPr/>
@@ -605,7 +399,7 @@
             <a:spLocks noGrp="1"/>
           </p:cNvSpPr>
           <p:nvPr>
-            <p:ph type="sldNum" idx="5" sz="quarter"/>
+            <p:ph type="sldNum" sz="quarter" idx="5"/>
           </p:nvPr>
         </p:nvSpPr>
         <p:spPr/>
@@ -619,7 +413,7 @@
 </file>
 
 <file path=ppt/notesSlides/notesSlide11.xml><?xml version="1.0" encoding="utf-8"?>
-<p:notes xmlns:a="http://schemas.openxmlformats.org/drawingml/2006/main" xmlns:p="http://schemas.openxmlformats.org/presentationml/2006/main" xmlns:r="http://schemas.openxmlformats.org/officeDocument/2006/relationships">
+<p:notes xmlns:a="http://schemas.openxmlformats.org/drawingml/2006/main" xmlns:r="http://schemas.openxmlformats.org/officeDocument/2006/relationships" xmlns:p="http://schemas.openxmlformats.org/presentationml/2006/main">
   <p:cSld>
     <p:spTree>
       <p:nvGrpSpPr>
@@ -639,7 +433,7 @@
         <p:nvSpPr>
           <p:cNvPr id="2" name="Slide Image Placeholder 1"/>
           <p:cNvSpPr>
-            <a:spLocks noGrp="1"/>
+            <a:spLocks noGrp="1" noRot="1" noChangeAspect="1"/>
           </p:cNvSpPr>
           <p:nvPr>
             <p:ph type="sldImg" idx="2"/>
@@ -654,7 +448,7 @@
             <a:spLocks noGrp="1"/>
           </p:cNvSpPr>
           <p:nvPr>
-            <p:ph type="body" idx="3" sz="quarter"/>
+            <p:ph type="body" sz="quarter" idx="3"/>
           </p:nvPr>
         </p:nvSpPr>
         <p:spPr/>
@@ -675,7 +469,7 @@
             <a:spLocks noGrp="1"/>
           </p:cNvSpPr>
           <p:nvPr>
-            <p:ph type="sldNum" idx="5" sz="quarter"/>
+            <p:ph type="sldNum" sz="quarter" idx="5"/>
           </p:nvPr>
         </p:nvSpPr>
         <p:spPr/>
@@ -689,7 +483,7 @@
 </file>
 
 <file path=ppt/notesSlides/notesSlide12.xml><?xml version="1.0" encoding="utf-8"?>
-<p:notes xmlns:a="http://schemas.openxmlformats.org/drawingml/2006/main" xmlns:p="http://schemas.openxmlformats.org/presentationml/2006/main" xmlns:r="http://schemas.openxmlformats.org/officeDocument/2006/relationships">
+<p:notes xmlns:a="http://schemas.openxmlformats.org/drawingml/2006/main" xmlns:r="http://schemas.openxmlformats.org/officeDocument/2006/relationships" xmlns:p="http://schemas.openxmlformats.org/presentationml/2006/main">
   <p:cSld>
     <p:spTree>
       <p:nvGrpSpPr>
@@ -709,7 +503,7 @@
         <p:nvSpPr>
           <p:cNvPr id="2" name="Slide Image Placeholder 1"/>
           <p:cNvSpPr>
-            <a:spLocks noGrp="1"/>
+            <a:spLocks noGrp="1" noRot="1" noChangeAspect="1"/>
           </p:cNvSpPr>
           <p:nvPr>
             <p:ph type="sldImg" idx="2"/>
@@ -724,7 +518,7 @@
             <a:spLocks noGrp="1"/>
           </p:cNvSpPr>
           <p:nvPr>
-            <p:ph type="body" idx="3" sz="quarter"/>
+            <p:ph type="body" sz="quarter" idx="3"/>
           </p:nvPr>
         </p:nvSpPr>
         <p:spPr/>
@@ -745,7 +539,7 @@
             <a:spLocks noGrp="1"/>
           </p:cNvSpPr>
           <p:nvPr>
-            <p:ph type="sldNum" idx="5" sz="quarter"/>
+            <p:ph type="sldNum" sz="quarter" idx="5"/>
           </p:nvPr>
         </p:nvSpPr>
         <p:spPr/>
@@ -759,7 +553,7 @@
 </file>
 
 <file path=ppt/notesSlides/notesSlide13.xml><?xml version="1.0" encoding="utf-8"?>
-<p:notes xmlns:a="http://schemas.openxmlformats.org/drawingml/2006/main" xmlns:p="http://schemas.openxmlformats.org/presentationml/2006/main" xmlns:r="http://schemas.openxmlformats.org/officeDocument/2006/relationships">
+<p:notes xmlns:a="http://schemas.openxmlformats.org/drawingml/2006/main" xmlns:r="http://schemas.openxmlformats.org/officeDocument/2006/relationships" xmlns:p="http://schemas.openxmlformats.org/presentationml/2006/main">
   <p:cSld>
     <p:spTree>
       <p:nvGrpSpPr>
@@ -779,7 +573,7 @@
         <p:nvSpPr>
           <p:cNvPr id="2" name="Slide Image Placeholder 1"/>
           <p:cNvSpPr>
-            <a:spLocks noGrp="1"/>
+            <a:spLocks noGrp="1" noRot="1" noChangeAspect="1"/>
           </p:cNvSpPr>
           <p:nvPr>
             <p:ph type="sldImg" idx="2"/>
@@ -794,7 +588,7 @@
             <a:spLocks noGrp="1"/>
           </p:cNvSpPr>
           <p:nvPr>
-            <p:ph type="body" idx="3" sz="quarter"/>
+            <p:ph type="body" sz="quarter" idx="3"/>
           </p:nvPr>
         </p:nvSpPr>
         <p:spPr/>
@@ -815,7 +609,7 @@
             <a:spLocks noGrp="1"/>
           </p:cNvSpPr>
           <p:nvPr>
-            <p:ph type="sldNum" idx="5" sz="quarter"/>
+            <p:ph type="sldNum" sz="quarter" idx="5"/>
           </p:nvPr>
         </p:nvSpPr>
         <p:spPr/>
@@ -829,7 +623,7 @@
 </file>
 
 <file path=ppt/notesSlides/notesSlide14.xml><?xml version="1.0" encoding="utf-8"?>
-<p:notes xmlns:a="http://schemas.openxmlformats.org/drawingml/2006/main" xmlns:p="http://schemas.openxmlformats.org/presentationml/2006/main" xmlns:r="http://schemas.openxmlformats.org/officeDocument/2006/relationships">
+<p:notes xmlns:a="http://schemas.openxmlformats.org/drawingml/2006/main" xmlns:r="http://schemas.openxmlformats.org/officeDocument/2006/relationships" xmlns:p="http://schemas.openxmlformats.org/presentationml/2006/main">
   <p:cSld>
     <p:spTree>
       <p:nvGrpSpPr>
@@ -849,7 +643,7 @@
         <p:nvSpPr>
           <p:cNvPr id="2" name="Slide Image Placeholder 1"/>
           <p:cNvSpPr>
-            <a:spLocks noGrp="1"/>
+            <a:spLocks noGrp="1" noRot="1" noChangeAspect="1"/>
           </p:cNvSpPr>
           <p:nvPr>
             <p:ph type="sldImg" idx="2"/>
@@ -864,7 +658,7 @@
             <a:spLocks noGrp="1"/>
           </p:cNvSpPr>
           <p:nvPr>
-            <p:ph type="body" idx="3" sz="quarter"/>
+            <p:ph type="body" sz="quarter" idx="3"/>
           </p:nvPr>
         </p:nvSpPr>
         <p:spPr/>
@@ -885,7 +679,7 @@
             <a:spLocks noGrp="1"/>
           </p:cNvSpPr>
           <p:nvPr>
-            <p:ph type="sldNum" idx="5" sz="quarter"/>
+            <p:ph type="sldNum" sz="quarter" idx="5"/>
           </p:nvPr>
         </p:nvSpPr>
         <p:spPr/>
@@ -899,7 +693,7 @@
 </file>
 
 <file path=ppt/notesSlides/notesSlide15.xml><?xml version="1.0" encoding="utf-8"?>
-<p:notes xmlns:a="http://schemas.openxmlformats.org/drawingml/2006/main" xmlns:p="http://schemas.openxmlformats.org/presentationml/2006/main" xmlns:r="http://schemas.openxmlformats.org/officeDocument/2006/relationships">
+<p:notes xmlns:a="http://schemas.openxmlformats.org/drawingml/2006/main" xmlns:r="http://schemas.openxmlformats.org/officeDocument/2006/relationships" xmlns:p="http://schemas.openxmlformats.org/presentationml/2006/main">
   <p:cSld>
     <p:spTree>
       <p:nvGrpSpPr>
@@ -919,7 +713,7 @@
         <p:nvSpPr>
           <p:cNvPr id="2" name="Slide Image Placeholder 1"/>
           <p:cNvSpPr>
-            <a:spLocks noGrp="1"/>
+            <a:spLocks noGrp="1" noRot="1" noChangeAspect="1"/>
           </p:cNvSpPr>
           <p:nvPr>
             <p:ph type="sldImg" idx="2"/>
@@ -934,7 +728,7 @@
             <a:spLocks noGrp="1"/>
           </p:cNvSpPr>
           <p:nvPr>
-            <p:ph type="body" idx="3" sz="quarter"/>
+            <p:ph type="body" sz="quarter" idx="3"/>
           </p:nvPr>
         </p:nvSpPr>
         <p:spPr/>
@@ -955,7 +749,7 @@
             <a:spLocks noGrp="1"/>
           </p:cNvSpPr>
           <p:nvPr>
-            <p:ph type="sldNum" idx="5" sz="quarter"/>
+            <p:ph type="sldNum" sz="quarter" idx="5"/>
           </p:nvPr>
         </p:nvSpPr>
         <p:spPr/>
@@ -969,7 +763,7 @@
 </file>
 
 <file path=ppt/notesSlides/notesSlide16.xml><?xml version="1.0" encoding="utf-8"?>
-<p:notes xmlns:a="http://schemas.openxmlformats.org/drawingml/2006/main" xmlns:p="http://schemas.openxmlformats.org/presentationml/2006/main" xmlns:r="http://schemas.openxmlformats.org/officeDocument/2006/relationships">
+<p:notes xmlns:a="http://schemas.openxmlformats.org/drawingml/2006/main" xmlns:r="http://schemas.openxmlformats.org/officeDocument/2006/relationships" xmlns:p="http://schemas.openxmlformats.org/presentationml/2006/main">
   <p:cSld>
     <p:spTree>
       <p:nvGrpSpPr>
@@ -989,7 +783,7 @@
         <p:nvSpPr>
           <p:cNvPr id="2" name="Slide Image Placeholder 1"/>
           <p:cNvSpPr>
-            <a:spLocks noGrp="1"/>
+            <a:spLocks noGrp="1" noRot="1" noChangeAspect="1"/>
           </p:cNvSpPr>
           <p:nvPr>
             <p:ph type="sldImg" idx="2"/>
@@ -1004,7 +798,7 @@
             <a:spLocks noGrp="1"/>
           </p:cNvSpPr>
           <p:nvPr>
-            <p:ph type="body" idx="3" sz="quarter"/>
+            <p:ph type="body" sz="quarter" idx="3"/>
           </p:nvPr>
         </p:nvSpPr>
         <p:spPr/>
@@ -1025,7 +819,7 @@
             <a:spLocks noGrp="1"/>
           </p:cNvSpPr>
           <p:nvPr>
-            <p:ph type="sldNum" idx="5" sz="quarter"/>
+            <p:ph type="sldNum" sz="quarter" idx="5"/>
           </p:nvPr>
         </p:nvSpPr>
         <p:spPr/>
@@ -1039,7 +833,7 @@
 </file>
 
 <file path=ppt/notesSlides/notesSlide17.xml><?xml version="1.0" encoding="utf-8"?>
-<p:notes xmlns:a="http://schemas.openxmlformats.org/drawingml/2006/main" xmlns:p="http://schemas.openxmlformats.org/presentationml/2006/main" xmlns:r="http://schemas.openxmlformats.org/officeDocument/2006/relationships">
+<p:notes xmlns:a="http://schemas.openxmlformats.org/drawingml/2006/main" xmlns:r="http://schemas.openxmlformats.org/officeDocument/2006/relationships" xmlns:p="http://schemas.openxmlformats.org/presentationml/2006/main">
   <p:cSld>
     <p:spTree>
       <p:nvGrpSpPr>
@@ -1059,7 +853,7 @@
         <p:nvSpPr>
           <p:cNvPr id="2" name="Slide Image Placeholder 1"/>
           <p:cNvSpPr>
-            <a:spLocks noGrp="1"/>
+            <a:spLocks noGrp="1" noRot="1" noChangeAspect="1"/>
           </p:cNvSpPr>
           <p:nvPr>
             <p:ph type="sldImg" idx="2"/>
@@ -1074,7 +868,7 @@
             <a:spLocks noGrp="1"/>
           </p:cNvSpPr>
           <p:nvPr>
-            <p:ph type="body" idx="3" sz="quarter"/>
+            <p:ph type="body" sz="quarter" idx="3"/>
           </p:nvPr>
         </p:nvSpPr>
         <p:spPr/>
@@ -1095,7 +889,7 @@
             <a:spLocks noGrp="1"/>
           </p:cNvSpPr>
           <p:nvPr>
-            <p:ph type="sldNum" idx="5" sz="quarter"/>
+            <p:ph type="sldNum" sz="quarter" idx="5"/>
           </p:nvPr>
         </p:nvSpPr>
         <p:spPr/>
@@ -1109,7 +903,7 @@
 </file>
 
 <file path=ppt/notesSlides/notesSlide18.xml><?xml version="1.0" encoding="utf-8"?>
-<p:notes xmlns:a="http://schemas.openxmlformats.org/drawingml/2006/main" xmlns:p="http://schemas.openxmlformats.org/presentationml/2006/main" xmlns:r="http://schemas.openxmlformats.org/officeDocument/2006/relationships">
+<p:notes xmlns:a="http://schemas.openxmlformats.org/drawingml/2006/main" xmlns:r="http://schemas.openxmlformats.org/officeDocument/2006/relationships" xmlns:p="http://schemas.openxmlformats.org/presentationml/2006/main">
   <p:cSld>
     <p:spTree>
       <p:nvGrpSpPr>
@@ -1129,7 +923,7 @@
         <p:nvSpPr>
           <p:cNvPr id="2" name="Slide Image Placeholder 1"/>
           <p:cNvSpPr>
-            <a:spLocks noGrp="1"/>
+            <a:spLocks noGrp="1" noRot="1" noChangeAspect="1"/>
           </p:cNvSpPr>
           <p:nvPr>
             <p:ph type="sldImg" idx="2"/>
@@ -1144,7 +938,7 @@
             <a:spLocks noGrp="1"/>
           </p:cNvSpPr>
           <p:nvPr>
-            <p:ph type="body" idx="3" sz="quarter"/>
+            <p:ph type="body" sz="quarter" idx="3"/>
           </p:nvPr>
         </p:nvSpPr>
         <p:spPr/>
@@ -1165,7 +959,7 @@
             <a:spLocks noGrp="1"/>
           </p:cNvSpPr>
           <p:nvPr>
-            <p:ph type="sldNum" idx="5" sz="quarter"/>
+            <p:ph type="sldNum" sz="quarter" idx="5"/>
           </p:nvPr>
         </p:nvSpPr>
         <p:spPr/>
@@ -1179,7 +973,7 @@
 </file>
 
 <file path=ppt/notesSlides/notesSlide19.xml><?xml version="1.0" encoding="utf-8"?>
-<p:notes xmlns:a="http://schemas.openxmlformats.org/drawingml/2006/main" xmlns:p="http://schemas.openxmlformats.org/presentationml/2006/main" xmlns:r="http://schemas.openxmlformats.org/officeDocument/2006/relationships">
+<p:notes xmlns:a="http://schemas.openxmlformats.org/drawingml/2006/main" xmlns:r="http://schemas.openxmlformats.org/officeDocument/2006/relationships" xmlns:p="http://schemas.openxmlformats.org/presentationml/2006/main">
   <p:cSld>
     <p:spTree>
       <p:nvGrpSpPr>
@@ -1199,7 +993,7 @@
         <p:nvSpPr>
           <p:cNvPr id="2" name="Slide Image Placeholder 1"/>
           <p:cNvSpPr>
-            <a:spLocks noGrp="1"/>
+            <a:spLocks noGrp="1" noRot="1" noChangeAspect="1"/>
           </p:cNvSpPr>
           <p:nvPr>
             <p:ph type="sldImg" idx="2"/>
@@ -1214,7 +1008,7 @@
             <a:spLocks noGrp="1"/>
           </p:cNvSpPr>
           <p:nvPr>
-            <p:ph type="body" idx="3" sz="quarter"/>
+            <p:ph type="body" sz="quarter" idx="3"/>
           </p:nvPr>
         </p:nvSpPr>
         <p:spPr/>
@@ -1235,7 +1029,7 @@
             <a:spLocks noGrp="1"/>
           </p:cNvSpPr>
           <p:nvPr>
-            <p:ph type="sldNum" idx="5" sz="quarter"/>
+            <p:ph type="sldNum" sz="quarter" idx="5"/>
           </p:nvPr>
         </p:nvSpPr>
         <p:spPr/>
@@ -1249,7 +1043,7 @@
 </file>
 
 <file path=ppt/notesSlides/notesSlide2.xml><?xml version="1.0" encoding="utf-8"?>
-<p:notes xmlns:a="http://schemas.openxmlformats.org/drawingml/2006/main" xmlns:p="http://schemas.openxmlformats.org/presentationml/2006/main" xmlns:r="http://schemas.openxmlformats.org/officeDocument/2006/relationships">
+<p:notes xmlns:a="http://schemas.openxmlformats.org/drawingml/2006/main" xmlns:r="http://schemas.openxmlformats.org/officeDocument/2006/relationships" xmlns:p="http://schemas.openxmlformats.org/presentationml/2006/main">
   <p:cSld>
     <p:spTree>
       <p:nvGrpSpPr>
@@ -1269,7 +1063,7 @@
         <p:nvSpPr>
           <p:cNvPr id="2" name="Slide Image Placeholder 1"/>
           <p:cNvSpPr>
-            <a:spLocks noGrp="1"/>
+            <a:spLocks noGrp="1" noRot="1" noChangeAspect="1"/>
           </p:cNvSpPr>
           <p:nvPr>
             <p:ph type="sldImg" idx="2"/>
@@ -1284,7 +1078,7 @@
             <a:spLocks noGrp="1"/>
           </p:cNvSpPr>
           <p:nvPr>
-            <p:ph type="body" idx="3" sz="quarter"/>
+            <p:ph type="body" sz="quarter" idx="3"/>
           </p:nvPr>
         </p:nvSpPr>
         <p:spPr/>
@@ -1305,7 +1099,7 @@
             <a:spLocks noGrp="1"/>
           </p:cNvSpPr>
           <p:nvPr>
-            <p:ph type="sldNum" idx="5" sz="quarter"/>
+            <p:ph type="sldNum" sz="quarter" idx="5"/>
           </p:nvPr>
         </p:nvSpPr>
         <p:spPr/>
@@ -1319,7 +1113,7 @@
 </file>
 
 <file path=ppt/notesSlides/notesSlide20.xml><?xml version="1.0" encoding="utf-8"?>
-<p:notes xmlns:a="http://schemas.openxmlformats.org/drawingml/2006/main" xmlns:p="http://schemas.openxmlformats.org/presentationml/2006/main" xmlns:r="http://schemas.openxmlformats.org/officeDocument/2006/relationships">
+<p:notes xmlns:a="http://schemas.openxmlformats.org/drawingml/2006/main" xmlns:r="http://schemas.openxmlformats.org/officeDocument/2006/relationships" xmlns:p="http://schemas.openxmlformats.org/presentationml/2006/main">
   <p:cSld>
     <p:spTree>
       <p:nvGrpSpPr>
@@ -1339,7 +1133,7 @@
         <p:nvSpPr>
           <p:cNvPr id="2" name="Slide Image Placeholder 1"/>
           <p:cNvSpPr>
-            <a:spLocks noGrp="1"/>
+            <a:spLocks noGrp="1" noRot="1" noChangeAspect="1"/>
           </p:cNvSpPr>
           <p:nvPr>
             <p:ph type="sldImg" idx="2"/>
@@ -1354,7 +1148,7 @@
             <a:spLocks noGrp="1"/>
           </p:cNvSpPr>
           <p:nvPr>
-            <p:ph type="body" idx="3" sz="quarter"/>
+            <p:ph type="body" sz="quarter" idx="3"/>
           </p:nvPr>
         </p:nvSpPr>
         <p:spPr/>
@@ -1375,7 +1169,7 @@
             <a:spLocks noGrp="1"/>
           </p:cNvSpPr>
           <p:nvPr>
-            <p:ph type="sldNum" idx="5" sz="quarter"/>
+            <p:ph type="sldNum" sz="quarter" idx="5"/>
           </p:nvPr>
         </p:nvSpPr>
         <p:spPr/>
@@ -1389,7 +1183,7 @@
 </file>
 
 <file path=ppt/notesSlides/notesSlide21.xml><?xml version="1.0" encoding="utf-8"?>
-<p:notes xmlns:a="http://schemas.openxmlformats.org/drawingml/2006/main" xmlns:p="http://schemas.openxmlformats.org/presentationml/2006/main" xmlns:r="http://schemas.openxmlformats.org/officeDocument/2006/relationships">
+<p:notes xmlns:a="http://schemas.openxmlformats.org/drawingml/2006/main" xmlns:r="http://schemas.openxmlformats.org/officeDocument/2006/relationships" xmlns:p="http://schemas.openxmlformats.org/presentationml/2006/main">
   <p:cSld>
     <p:spTree>
       <p:nvGrpSpPr>
@@ -1409,7 +1203,7 @@
         <p:nvSpPr>
           <p:cNvPr id="2" name="Slide Image Placeholder 1"/>
           <p:cNvSpPr>
-            <a:spLocks noGrp="1"/>
+            <a:spLocks noGrp="1" noRot="1" noChangeAspect="1"/>
           </p:cNvSpPr>
           <p:nvPr>
             <p:ph type="sldImg" idx="2"/>
@@ -1424,7 +1218,7 @@
             <a:spLocks noGrp="1"/>
           </p:cNvSpPr>
           <p:nvPr>
-            <p:ph type="body" idx="3" sz="quarter"/>
+            <p:ph type="body" sz="quarter" idx="3"/>
           </p:nvPr>
         </p:nvSpPr>
         <p:spPr/>
@@ -1445,7 +1239,7 @@
             <a:spLocks noGrp="1"/>
           </p:cNvSpPr>
           <p:nvPr>
-            <p:ph type="sldNum" idx="5" sz="quarter"/>
+            <p:ph type="sldNum" sz="quarter" idx="5"/>
           </p:nvPr>
         </p:nvSpPr>
         <p:spPr/>
@@ -1459,7 +1253,7 @@
 </file>
 
 <file path=ppt/notesSlides/notesSlide22.xml><?xml version="1.0" encoding="utf-8"?>
-<p:notes xmlns:a="http://schemas.openxmlformats.org/drawingml/2006/main" xmlns:p="http://schemas.openxmlformats.org/presentationml/2006/main" xmlns:r="http://schemas.openxmlformats.org/officeDocument/2006/relationships">
+<p:notes xmlns:a="http://schemas.openxmlformats.org/drawingml/2006/main" xmlns:r="http://schemas.openxmlformats.org/officeDocument/2006/relationships" xmlns:p="http://schemas.openxmlformats.org/presentationml/2006/main">
   <p:cSld>
     <p:spTree>
       <p:nvGrpSpPr>
@@ -1479,7 +1273,7 @@
         <p:nvSpPr>
           <p:cNvPr id="2" name="Slide Image Placeholder 1"/>
           <p:cNvSpPr>
-            <a:spLocks noGrp="1"/>
+            <a:spLocks noGrp="1" noRot="1" noChangeAspect="1"/>
           </p:cNvSpPr>
           <p:nvPr>
             <p:ph type="sldImg" idx="2"/>
@@ -1494,7 +1288,7 @@
             <a:spLocks noGrp="1"/>
           </p:cNvSpPr>
           <p:nvPr>
-            <p:ph type="body" idx="3" sz="quarter"/>
+            <p:ph type="body" sz="quarter" idx="3"/>
           </p:nvPr>
         </p:nvSpPr>
         <p:spPr/>
@@ -1515,7 +1309,7 @@
             <a:spLocks noGrp="1"/>
           </p:cNvSpPr>
           <p:nvPr>
-            <p:ph type="sldNum" idx="5" sz="quarter"/>
+            <p:ph type="sldNum" sz="quarter" idx="5"/>
           </p:nvPr>
         </p:nvSpPr>
         <p:spPr/>
@@ -1529,7 +1323,7 @@
 </file>
 
 <file path=ppt/notesSlides/notesSlide3.xml><?xml version="1.0" encoding="utf-8"?>
-<p:notes xmlns:a="http://schemas.openxmlformats.org/drawingml/2006/main" xmlns:p="http://schemas.openxmlformats.org/presentationml/2006/main" xmlns:r="http://schemas.openxmlformats.org/officeDocument/2006/relationships">
+<p:notes xmlns:a="http://schemas.openxmlformats.org/drawingml/2006/main" xmlns:r="http://schemas.openxmlformats.org/officeDocument/2006/relationships" xmlns:p="http://schemas.openxmlformats.org/presentationml/2006/main">
   <p:cSld>
     <p:spTree>
       <p:nvGrpSpPr>
@@ -1549,7 +1343,7 @@
         <p:nvSpPr>
           <p:cNvPr id="2" name="Slide Image Placeholder 1"/>
           <p:cNvSpPr>
-            <a:spLocks noGrp="1"/>
+            <a:spLocks noGrp="1" noRot="1" noChangeAspect="1"/>
           </p:cNvSpPr>
           <p:nvPr>
             <p:ph type="sldImg" idx="2"/>
@@ -1564,7 +1358,7 @@
             <a:spLocks noGrp="1"/>
           </p:cNvSpPr>
           <p:nvPr>
-            <p:ph type="body" idx="3" sz="quarter"/>
+            <p:ph type="body" sz="quarter" idx="3"/>
           </p:nvPr>
         </p:nvSpPr>
         <p:spPr/>
@@ -1585,7 +1379,7 @@
             <a:spLocks noGrp="1"/>
           </p:cNvSpPr>
           <p:nvPr>
-            <p:ph type="sldNum" idx="5" sz="quarter"/>
+            <p:ph type="sldNum" sz="quarter" idx="5"/>
           </p:nvPr>
         </p:nvSpPr>
         <p:spPr/>
@@ -1599,7 +1393,7 @@
 </file>
 
 <file path=ppt/notesSlides/notesSlide4.xml><?xml version="1.0" encoding="utf-8"?>
-<p:notes xmlns:a="http://schemas.openxmlformats.org/drawingml/2006/main" xmlns:p="http://schemas.openxmlformats.org/presentationml/2006/main" xmlns:r="http://schemas.openxmlformats.org/officeDocument/2006/relationships">
+<p:notes xmlns:a="http://schemas.openxmlformats.org/drawingml/2006/main" xmlns:r="http://schemas.openxmlformats.org/officeDocument/2006/relationships" xmlns:p="http://schemas.openxmlformats.org/presentationml/2006/main">
   <p:cSld>
     <p:spTree>
       <p:nvGrpSpPr>
@@ -1619,7 +1413,7 @@
         <p:nvSpPr>
           <p:cNvPr id="2" name="Slide Image Placeholder 1"/>
           <p:cNvSpPr>
-            <a:spLocks noGrp="1"/>
+            <a:spLocks noGrp="1" noRot="1" noChangeAspect="1"/>
           </p:cNvSpPr>
           <p:nvPr>
             <p:ph type="sldImg" idx="2"/>
@@ -1634,7 +1428,7 @@
             <a:spLocks noGrp="1"/>
           </p:cNvSpPr>
           <p:nvPr>
-            <p:ph type="body" idx="3" sz="quarter"/>
+            <p:ph type="body" sz="quarter" idx="3"/>
           </p:nvPr>
         </p:nvSpPr>
         <p:spPr/>
@@ -1655,7 +1449,7 @@
             <a:spLocks noGrp="1"/>
           </p:cNvSpPr>
           <p:nvPr>
-            <p:ph type="sldNum" idx="5" sz="quarter"/>
+            <p:ph type="sldNum" sz="quarter" idx="5"/>
           </p:nvPr>
         </p:nvSpPr>
         <p:spPr/>
@@ -1669,7 +1463,7 @@
 </file>
 
 <file path=ppt/notesSlides/notesSlide5.xml><?xml version="1.0" encoding="utf-8"?>
-<p:notes xmlns:a="http://schemas.openxmlformats.org/drawingml/2006/main" xmlns:p="http://schemas.openxmlformats.org/presentationml/2006/main" xmlns:r="http://schemas.openxmlformats.org/officeDocument/2006/relationships">
+<p:notes xmlns:a="http://schemas.openxmlformats.org/drawingml/2006/main" xmlns:r="http://schemas.openxmlformats.org/officeDocument/2006/relationships" xmlns:p="http://schemas.openxmlformats.org/presentationml/2006/main">
   <p:cSld>
     <p:spTree>
       <p:nvGrpSpPr>
@@ -1689,7 +1483,7 @@
         <p:nvSpPr>
           <p:cNvPr id="2" name="Slide Image Placeholder 1"/>
           <p:cNvSpPr>
-            <a:spLocks noGrp="1"/>
+            <a:spLocks noGrp="1" noRot="1" noChangeAspect="1"/>
           </p:cNvSpPr>
           <p:nvPr>
             <p:ph type="sldImg" idx="2"/>
@@ -1704,7 +1498,7 @@
             <a:spLocks noGrp="1"/>
           </p:cNvSpPr>
           <p:nvPr>
-            <p:ph type="body" idx="3" sz="quarter"/>
+            <p:ph type="body" sz="quarter" idx="3"/>
           </p:nvPr>
         </p:nvSpPr>
         <p:spPr/>
@@ -1725,7 +1519,7 @@
             <a:spLocks noGrp="1"/>
           </p:cNvSpPr>
           <p:nvPr>
-            <p:ph type="sldNum" idx="5" sz="quarter"/>
+            <p:ph type="sldNum" sz="quarter" idx="5"/>
           </p:nvPr>
         </p:nvSpPr>
         <p:spPr/>
@@ -1739,7 +1533,7 @@
 </file>
 
 <file path=ppt/notesSlides/notesSlide6.xml><?xml version="1.0" encoding="utf-8"?>
-<p:notes xmlns:a="http://schemas.openxmlformats.org/drawingml/2006/main" xmlns:p="http://schemas.openxmlformats.org/presentationml/2006/main" xmlns:r="http://schemas.openxmlformats.org/officeDocument/2006/relationships">
+<p:notes xmlns:a="http://schemas.openxmlformats.org/drawingml/2006/main" xmlns:r="http://schemas.openxmlformats.org/officeDocument/2006/relationships" xmlns:p="http://schemas.openxmlformats.org/presentationml/2006/main">
   <p:cSld>
     <p:spTree>
       <p:nvGrpSpPr>
@@ -1759,7 +1553,7 @@
         <p:nvSpPr>
           <p:cNvPr id="2" name="Slide Image Placeholder 1"/>
           <p:cNvSpPr>
-            <a:spLocks noGrp="1"/>
+            <a:spLocks noGrp="1" noRot="1" noChangeAspect="1"/>
           </p:cNvSpPr>
           <p:nvPr>
             <p:ph type="sldImg" idx="2"/>
@@ -1774,7 +1568,7 @@
             <a:spLocks noGrp="1"/>
           </p:cNvSpPr>
           <p:nvPr>
-            <p:ph type="body" idx="3" sz="quarter"/>
+            <p:ph type="body" sz="quarter" idx="3"/>
           </p:nvPr>
         </p:nvSpPr>
         <p:spPr/>
@@ -1795,7 +1589,7 @@
             <a:spLocks noGrp="1"/>
           </p:cNvSpPr>
           <p:nvPr>
-            <p:ph type="sldNum" idx="5" sz="quarter"/>
+            <p:ph type="sldNum" sz="quarter" idx="5"/>
           </p:nvPr>
         </p:nvSpPr>
         <p:spPr/>
@@ -1809,7 +1603,7 @@
 </file>
 
 <file path=ppt/notesSlides/notesSlide7.xml><?xml version="1.0" encoding="utf-8"?>
-<p:notes xmlns:a="http://schemas.openxmlformats.org/drawingml/2006/main" xmlns:p="http://schemas.openxmlformats.org/presentationml/2006/main" xmlns:r="http://schemas.openxmlformats.org/officeDocument/2006/relationships">
+<p:notes xmlns:a="http://schemas.openxmlformats.org/drawingml/2006/main" xmlns:r="http://schemas.openxmlformats.org/officeDocument/2006/relationships" xmlns:p="http://schemas.openxmlformats.org/presentationml/2006/main">
   <p:cSld>
     <p:spTree>
       <p:nvGrpSpPr>
@@ -1829,7 +1623,7 @@
         <p:nvSpPr>
           <p:cNvPr id="2" name="Slide Image Placeholder 1"/>
           <p:cNvSpPr>
-            <a:spLocks noGrp="1"/>
+            <a:spLocks noGrp="1" noRot="1" noChangeAspect="1"/>
           </p:cNvSpPr>
           <p:nvPr>
             <p:ph type="sldImg" idx="2"/>
@@ -1844,7 +1638,7 @@
             <a:spLocks noGrp="1"/>
           </p:cNvSpPr>
           <p:nvPr>
-            <p:ph type="body" idx="3" sz="quarter"/>
+            <p:ph type="body" sz="quarter" idx="3"/>
           </p:nvPr>
         </p:nvSpPr>
         <p:spPr/>
@@ -1865,7 +1659,7 @@
             <a:spLocks noGrp="1"/>
           </p:cNvSpPr>
           <p:nvPr>
-            <p:ph type="sldNum" idx="5" sz="quarter"/>
+            <p:ph type="sldNum" sz="quarter" idx="5"/>
           </p:nvPr>
         </p:nvSpPr>
         <p:spPr/>
@@ -1879,7 +1673,7 @@
 </file>
 
 <file path=ppt/notesSlides/notesSlide8.xml><?xml version="1.0" encoding="utf-8"?>
-<p:notes xmlns:a="http://schemas.openxmlformats.org/drawingml/2006/main" xmlns:p="http://schemas.openxmlformats.org/presentationml/2006/main" xmlns:r="http://schemas.openxmlformats.org/officeDocument/2006/relationships">
+<p:notes xmlns:a="http://schemas.openxmlformats.org/drawingml/2006/main" xmlns:r="http://schemas.openxmlformats.org/officeDocument/2006/relationships" xmlns:p="http://schemas.openxmlformats.org/presentationml/2006/main">
   <p:cSld>
     <p:spTree>
       <p:nvGrpSpPr>
@@ -1899,7 +1693,7 @@
         <p:nvSpPr>
           <p:cNvPr id="2" name="Slide Image Placeholder 1"/>
           <p:cNvSpPr>
-            <a:spLocks noGrp="1"/>
+            <a:spLocks noGrp="1" noRot="1" noChangeAspect="1"/>
           </p:cNvSpPr>
           <p:nvPr>
             <p:ph type="sldImg" idx="2"/>
@@ -1914,7 +1708,7 @@
             <a:spLocks noGrp="1"/>
           </p:cNvSpPr>
           <p:nvPr>
-            <p:ph type="body" idx="3" sz="quarter"/>
+            <p:ph type="body" sz="quarter" idx="3"/>
           </p:nvPr>
         </p:nvSpPr>
         <p:spPr/>
@@ -1935,7 +1729,7 @@
             <a:spLocks noGrp="1"/>
           </p:cNvSpPr>
           <p:nvPr>
-            <p:ph type="sldNum" idx="5" sz="quarter"/>
+            <p:ph type="sldNum" sz="quarter" idx="5"/>
           </p:nvPr>
         </p:nvSpPr>
         <p:spPr/>
@@ -1949,7 +1743,7 @@
 </file>
 
 <file path=ppt/notesSlides/notesSlide9.xml><?xml version="1.0" encoding="utf-8"?>
-<p:notes xmlns:a="http://schemas.openxmlformats.org/drawingml/2006/main" xmlns:p="http://schemas.openxmlformats.org/presentationml/2006/main" xmlns:r="http://schemas.openxmlformats.org/officeDocument/2006/relationships">
+<p:notes xmlns:a="http://schemas.openxmlformats.org/drawingml/2006/main" xmlns:r="http://schemas.openxmlformats.org/officeDocument/2006/relationships" xmlns:p="http://schemas.openxmlformats.org/presentationml/2006/main">
   <p:cSld>
     <p:spTree>
       <p:nvGrpSpPr>
@@ -1969,7 +1763,7 @@
         <p:nvSpPr>
           <p:cNvPr id="2" name="Slide Image Placeholder 1"/>
           <p:cNvSpPr>
-            <a:spLocks noGrp="1"/>
+            <a:spLocks noGrp="1" noRot="1" noChangeAspect="1"/>
           </p:cNvSpPr>
           <p:nvPr>
             <p:ph type="sldImg" idx="2"/>
@@ -1984,7 +1778,7 @@
             <a:spLocks noGrp="1"/>
           </p:cNvSpPr>
           <p:nvPr>
-            <p:ph type="body" idx="3" sz="quarter"/>
+            <p:ph type="body" sz="quarter" idx="3"/>
           </p:nvPr>
         </p:nvSpPr>
         <p:spPr/>
@@ -2005,7 +1799,7 @@
             <a:spLocks noGrp="1"/>
           </p:cNvSpPr>
           <p:nvPr>
-            <p:ph type="sldNum" idx="5" sz="quarter"/>
+            <p:ph type="sldNum" sz="quarter" idx="5"/>
           </p:nvPr>
         </p:nvSpPr>
         <p:spPr/>
@@ -2056,10 +1850,9 @@
           <a:lstStyle/>
           <a:p>
             <a:r>
-              <a:rPr lang="en-US" smtClean="0"/>
+              <a:rPr lang="en-US"/>
               <a:t>Click to edit Master title style</a:t>
             </a:r>
-            <a:endParaRPr lang="en-US"/>
           </a:p>
         </p:txBody>
       </p:sp>
@@ -2175,10 +1968,9 @@
           </a:lstStyle>
           <a:p>
             <a:r>
-              <a:rPr lang="en-US" smtClean="0"/>
+              <a:rPr lang="en-US"/>
               <a:t>Click to edit Master subtitle style</a:t>
             </a:r>
-            <a:endParaRPr lang="en-US"/>
           </a:p>
         </p:txBody>
       </p:sp>
@@ -2199,7 +1991,7 @@
           <a:p>
             <a:fld id="{5BCAD085-E8A6-8845-BD4E-CB4CCA059FC4}" type="datetimeFigureOut">
               <a:rPr lang="en-US" smtClean="0"/>
-              <a:t>1/27/13</a:t>
+              <a:t>9/1/2026</a:t>
             </a:fld>
             <a:endParaRPr lang="en-US"/>
           </a:p>
@@ -2293,10 +2085,9 @@
           <a:lstStyle/>
           <a:p>
             <a:r>
-              <a:rPr lang="en-US" smtClean="0"/>
+              <a:rPr lang="en-US"/>
               <a:t>Click to edit Master title style</a:t>
             </a:r>
-            <a:endParaRPr lang="en-US"/>
           </a:p>
         </p:txBody>
       </p:sp>
@@ -2317,38 +2108,37 @@
           <a:p>
             <a:pPr lvl="0"/>
             <a:r>
-              <a:rPr lang="en-US" smtClean="0"/>
+              <a:rPr lang="en-US"/>
               <a:t>Click to edit Master text styles</a:t>
             </a:r>
           </a:p>
           <a:p>
             <a:pPr lvl="1"/>
             <a:r>
-              <a:rPr lang="en-US" smtClean="0"/>
+              <a:rPr lang="en-US"/>
               <a:t>Second level</a:t>
             </a:r>
           </a:p>
           <a:p>
             <a:pPr lvl="2"/>
             <a:r>
-              <a:rPr lang="en-US" smtClean="0"/>
+              <a:rPr lang="en-US"/>
               <a:t>Third level</a:t>
             </a:r>
           </a:p>
           <a:p>
             <a:pPr lvl="3"/>
             <a:r>
-              <a:rPr lang="en-US" smtClean="0"/>
+              <a:rPr lang="en-US"/>
               <a:t>Fourth level</a:t>
             </a:r>
           </a:p>
           <a:p>
             <a:pPr lvl="4"/>
             <a:r>
-              <a:rPr lang="en-US" smtClean="0"/>
+              <a:rPr lang="en-US"/>
               <a:t>Fifth level</a:t>
             </a:r>
-            <a:endParaRPr lang="en-US"/>
           </a:p>
         </p:txBody>
       </p:sp>
@@ -2369,7 +2159,7 @@
           <a:p>
             <a:fld id="{5BCAD085-E8A6-8845-BD4E-CB4CCA059FC4}" type="datetimeFigureOut">
               <a:rPr lang="en-US" smtClean="0"/>
-              <a:t>1/27/13</a:t>
+              <a:t>9/1/2026</a:t>
             </a:fld>
             <a:endParaRPr lang="en-US"/>
           </a:p>
@@ -2468,10 +2258,9 @@
           <a:lstStyle/>
           <a:p>
             <a:r>
-              <a:rPr lang="en-US" smtClean="0"/>
+              <a:rPr lang="en-US"/>
               <a:t>Click to edit Master title style</a:t>
             </a:r>
-            <a:endParaRPr lang="en-US"/>
           </a:p>
         </p:txBody>
       </p:sp>
@@ -2497,38 +2286,37 @@
           <a:p>
             <a:pPr lvl="0"/>
             <a:r>
-              <a:rPr lang="en-US" smtClean="0"/>
+              <a:rPr lang="en-US"/>
               <a:t>Click to edit Master text styles</a:t>
             </a:r>
           </a:p>
           <a:p>
             <a:pPr lvl="1"/>
             <a:r>
-              <a:rPr lang="en-US" smtClean="0"/>
+              <a:rPr lang="en-US"/>
               <a:t>Second level</a:t>
             </a:r>
           </a:p>
           <a:p>
             <a:pPr lvl="2"/>
             <a:r>
-              <a:rPr lang="en-US" smtClean="0"/>
+              <a:rPr lang="en-US"/>
               <a:t>Third level</a:t>
             </a:r>
           </a:p>
           <a:p>
             <a:pPr lvl="3"/>
             <a:r>
-              <a:rPr lang="en-US" smtClean="0"/>
+              <a:rPr lang="en-US"/>
               <a:t>Fourth level</a:t>
             </a:r>
           </a:p>
           <a:p>
             <a:pPr lvl="4"/>
             <a:r>
-              <a:rPr lang="en-US" smtClean="0"/>
+              <a:rPr lang="en-US"/>
               <a:t>Fifth level</a:t>
             </a:r>
-            <a:endParaRPr lang="en-US"/>
           </a:p>
         </p:txBody>
       </p:sp>
@@ -2549,7 +2337,7 @@
           <a:p>
             <a:fld id="{5BCAD085-E8A6-8845-BD4E-CB4CCA059FC4}" type="datetimeFigureOut">
               <a:rPr lang="en-US" smtClean="0"/>
-              <a:t>1/27/13</a:t>
+              <a:t>9/1/2026</a:t>
             </a:fld>
             <a:endParaRPr lang="en-US"/>
           </a:p>
@@ -2643,10 +2431,9 @@
           <a:lstStyle/>
           <a:p>
             <a:r>
-              <a:rPr lang="en-US" smtClean="0"/>
+              <a:rPr lang="en-US"/>
               <a:t>Click to edit Master title style</a:t>
             </a:r>
-            <a:endParaRPr lang="en-US"/>
           </a:p>
         </p:txBody>
       </p:sp>
@@ -2667,38 +2454,37 @@
           <a:p>
             <a:pPr lvl="0"/>
             <a:r>
-              <a:rPr lang="en-US" smtClean="0"/>
+              <a:rPr lang="en-US"/>
               <a:t>Click to edit Master text styles</a:t>
             </a:r>
           </a:p>
           <a:p>
             <a:pPr lvl="1"/>
             <a:r>
-              <a:rPr lang="en-US" smtClean="0"/>
+              <a:rPr lang="en-US"/>
               <a:t>Second level</a:t>
             </a:r>
           </a:p>
           <a:p>
             <a:pPr lvl="2"/>
             <a:r>
-              <a:rPr lang="en-US" smtClean="0"/>
+              <a:rPr lang="en-US"/>
               <a:t>Third level</a:t>
             </a:r>
           </a:p>
           <a:p>
             <a:pPr lvl="3"/>
             <a:r>
-              <a:rPr lang="en-US" smtClean="0"/>
+              <a:rPr lang="en-US"/>
               <a:t>Fourth level</a:t>
             </a:r>
           </a:p>
           <a:p>
             <a:pPr lvl="4"/>
             <a:r>
-              <a:rPr lang="en-US" smtClean="0"/>
+              <a:rPr lang="en-US"/>
               <a:t>Fifth level</a:t>
             </a:r>
-            <a:endParaRPr lang="en-US"/>
           </a:p>
         </p:txBody>
       </p:sp>
@@ -2719,7 +2505,7 @@
           <a:p>
             <a:fld id="{5BCAD085-E8A6-8845-BD4E-CB4CCA059FC4}" type="datetimeFigureOut">
               <a:rPr lang="en-US" smtClean="0"/>
-              <a:t>1/27/13</a:t>
+              <a:t>9/1/2026</a:t>
             </a:fld>
             <a:endParaRPr lang="en-US"/>
           </a:p>
@@ -2822,10 +2608,9 @@
           </a:lstStyle>
           <a:p>
             <a:r>
-              <a:rPr lang="en-US" smtClean="0"/>
+              <a:rPr lang="en-US"/>
               <a:t>Click to edit Master title style</a:t>
             </a:r>
-            <a:endParaRPr lang="en-US"/>
           </a:p>
         </p:txBody>
       </p:sp>
@@ -2942,7 +2727,7 @@
           <a:p>
             <a:pPr lvl="0"/>
             <a:r>
-              <a:rPr lang="en-US" smtClean="0"/>
+              <a:rPr lang="en-US"/>
               <a:t>Click to edit Master text styles</a:t>
             </a:r>
           </a:p>
@@ -2965,7 +2750,7 @@
           <a:p>
             <a:fld id="{5BCAD085-E8A6-8845-BD4E-CB4CCA059FC4}" type="datetimeFigureOut">
               <a:rPr lang="en-US" smtClean="0"/>
-              <a:t>1/27/13</a:t>
+              <a:t>9/1/2026</a:t>
             </a:fld>
             <a:endParaRPr lang="en-US"/>
           </a:p>
@@ -3059,10 +2844,9 @@
           <a:lstStyle/>
           <a:p>
             <a:r>
-              <a:rPr lang="en-US" smtClean="0"/>
+              <a:rPr lang="en-US"/>
               <a:t>Click to edit Master title style</a:t>
             </a:r>
-            <a:endParaRPr lang="en-US"/>
           </a:p>
         </p:txBody>
       </p:sp>
@@ -3116,38 +2900,37 @@
           <a:p>
             <a:pPr lvl="0"/>
             <a:r>
-              <a:rPr lang="en-US" smtClean="0"/>
+              <a:rPr lang="en-US"/>
               <a:t>Click to edit Master text styles</a:t>
             </a:r>
           </a:p>
           <a:p>
             <a:pPr lvl="1"/>
             <a:r>
-              <a:rPr lang="en-US" smtClean="0"/>
+              <a:rPr lang="en-US"/>
               <a:t>Second level</a:t>
             </a:r>
           </a:p>
           <a:p>
             <a:pPr lvl="2"/>
             <a:r>
-              <a:rPr lang="en-US" smtClean="0"/>
+              <a:rPr lang="en-US"/>
               <a:t>Third level</a:t>
             </a:r>
           </a:p>
           <a:p>
             <a:pPr lvl="3"/>
             <a:r>
-              <a:rPr lang="en-US" smtClean="0"/>
+              <a:rPr lang="en-US"/>
               <a:t>Fourth level</a:t>
             </a:r>
           </a:p>
           <a:p>
             <a:pPr lvl="4"/>
             <a:r>
-              <a:rPr lang="en-US" smtClean="0"/>
+              <a:rPr lang="en-US"/>
               <a:t>Fifth level</a:t>
             </a:r>
-            <a:endParaRPr lang="en-US"/>
           </a:p>
         </p:txBody>
       </p:sp>
@@ -3201,38 +2984,37 @@
           <a:p>
             <a:pPr lvl="0"/>
             <a:r>
-              <a:rPr lang="en-US" smtClean="0"/>
+              <a:rPr lang="en-US"/>
               <a:t>Click to edit Master text styles</a:t>
             </a:r>
           </a:p>
           <a:p>
             <a:pPr lvl="1"/>
             <a:r>
-              <a:rPr lang="en-US" smtClean="0"/>
+              <a:rPr lang="en-US"/>
               <a:t>Second level</a:t>
             </a:r>
           </a:p>
           <a:p>
             <a:pPr lvl="2"/>
             <a:r>
-              <a:rPr lang="en-US" smtClean="0"/>
+              <a:rPr lang="en-US"/>
               <a:t>Third level</a:t>
             </a:r>
           </a:p>
           <a:p>
             <a:pPr lvl="3"/>
             <a:r>
-              <a:rPr lang="en-US" smtClean="0"/>
+              <a:rPr lang="en-US"/>
               <a:t>Fourth level</a:t>
             </a:r>
           </a:p>
           <a:p>
             <a:pPr lvl="4"/>
             <a:r>
-              <a:rPr lang="en-US" smtClean="0"/>
+              <a:rPr lang="en-US"/>
               <a:t>Fifth level</a:t>
             </a:r>
-            <a:endParaRPr lang="en-US"/>
           </a:p>
         </p:txBody>
       </p:sp>
@@ -3253,7 +3035,7 @@
           <a:p>
             <a:fld id="{5BCAD085-E8A6-8845-BD4E-CB4CCA059FC4}" type="datetimeFigureOut">
               <a:rPr lang="en-US" smtClean="0"/>
-              <a:t>1/27/13</a:t>
+              <a:t>9/1/2026</a:t>
             </a:fld>
             <a:endParaRPr lang="en-US"/>
           </a:p>
@@ -3351,10 +3133,9 @@
           </a:lstStyle>
           <a:p>
             <a:r>
-              <a:rPr lang="en-US" smtClean="0"/>
+              <a:rPr lang="en-US"/>
               <a:t>Click to edit Master title style</a:t>
             </a:r>
-            <a:endParaRPr lang="en-US"/>
           </a:p>
         </p:txBody>
       </p:sp>
@@ -3417,7 +3198,7 @@
           <a:p>
             <a:pPr lvl="0"/>
             <a:r>
-              <a:rPr lang="en-US" smtClean="0"/>
+              <a:rPr lang="en-US"/>
               <a:t>Click to edit Master text styles</a:t>
             </a:r>
           </a:p>
@@ -3473,38 +3254,37 @@
           <a:p>
             <a:pPr lvl="0"/>
             <a:r>
-              <a:rPr lang="en-US" smtClean="0"/>
+              <a:rPr lang="en-US"/>
               <a:t>Click to edit Master text styles</a:t>
             </a:r>
           </a:p>
           <a:p>
             <a:pPr lvl="1"/>
             <a:r>
-              <a:rPr lang="en-US" smtClean="0"/>
+              <a:rPr lang="en-US"/>
               <a:t>Second level</a:t>
             </a:r>
           </a:p>
           <a:p>
             <a:pPr lvl="2"/>
             <a:r>
-              <a:rPr lang="en-US" smtClean="0"/>
+              <a:rPr lang="en-US"/>
               <a:t>Third level</a:t>
             </a:r>
           </a:p>
           <a:p>
             <a:pPr lvl="3"/>
             <a:r>
-              <a:rPr lang="en-US" smtClean="0"/>
+              <a:rPr lang="en-US"/>
               <a:t>Fourth level</a:t>
             </a:r>
           </a:p>
           <a:p>
             <a:pPr lvl="4"/>
             <a:r>
-              <a:rPr lang="en-US" smtClean="0"/>
+              <a:rPr lang="en-US"/>
               <a:t>Fifth level</a:t>
             </a:r>
-            <a:endParaRPr lang="en-US"/>
           </a:p>
         </p:txBody>
       </p:sp>
@@ -3567,7 +3347,7 @@
           <a:p>
             <a:pPr lvl="0"/>
             <a:r>
-              <a:rPr lang="en-US" smtClean="0"/>
+              <a:rPr lang="en-US"/>
               <a:t>Click to edit Master text styles</a:t>
             </a:r>
           </a:p>
@@ -3623,38 +3403,37 @@
           <a:p>
             <a:pPr lvl="0"/>
             <a:r>
-              <a:rPr lang="en-US" smtClean="0"/>
+              <a:rPr lang="en-US"/>
               <a:t>Click to edit Master text styles</a:t>
             </a:r>
           </a:p>
           <a:p>
             <a:pPr lvl="1"/>
             <a:r>
-              <a:rPr lang="en-US" smtClean="0"/>
+              <a:rPr lang="en-US"/>
               <a:t>Second level</a:t>
             </a:r>
           </a:p>
           <a:p>
             <a:pPr lvl="2"/>
             <a:r>
-              <a:rPr lang="en-US" smtClean="0"/>
+              <a:rPr lang="en-US"/>
               <a:t>Third level</a:t>
             </a:r>
           </a:p>
           <a:p>
             <a:pPr lvl="3"/>
             <a:r>
-              <a:rPr lang="en-US" smtClean="0"/>
+              <a:rPr lang="en-US"/>
               <a:t>Fourth level</a:t>
             </a:r>
           </a:p>
           <a:p>
             <a:pPr lvl="4"/>
             <a:r>
-              <a:rPr lang="en-US" smtClean="0"/>
+              <a:rPr lang="en-US"/>
               <a:t>Fifth level</a:t>
             </a:r>
-            <a:endParaRPr lang="en-US"/>
           </a:p>
         </p:txBody>
       </p:sp>
@@ -3675,7 +3454,7 @@
           <a:p>
             <a:fld id="{5BCAD085-E8A6-8845-BD4E-CB4CCA059FC4}" type="datetimeFigureOut">
               <a:rPr lang="en-US" smtClean="0"/>
-              <a:t>1/27/13</a:t>
+              <a:t>9/1/2026</a:t>
             </a:fld>
             <a:endParaRPr lang="en-US"/>
           </a:p>
@@ -3769,10 +3548,9 @@
           <a:lstStyle/>
           <a:p>
             <a:r>
-              <a:rPr lang="en-US" smtClean="0"/>
+              <a:rPr lang="en-US"/>
               <a:t>Click to edit Master title style</a:t>
             </a:r>
-            <a:endParaRPr lang="en-US"/>
           </a:p>
         </p:txBody>
       </p:sp>
@@ -3793,7 +3571,7 @@
           <a:p>
             <a:fld id="{5BCAD085-E8A6-8845-BD4E-CB4CCA059FC4}" type="datetimeFigureOut">
               <a:rPr lang="en-US" smtClean="0"/>
-              <a:t>1/27/13</a:t>
+              <a:t>9/1/2026</a:t>
             </a:fld>
             <a:endParaRPr lang="en-US"/>
           </a:p>
@@ -3888,7 +3666,7 @@
           <a:p>
             <a:fld id="{5BCAD085-E8A6-8845-BD4E-CB4CCA059FC4}" type="datetimeFigureOut">
               <a:rPr lang="en-US" smtClean="0"/>
-              <a:t>1/27/13</a:t>
+              <a:t>9/1/2026</a:t>
             </a:fld>
             <a:endParaRPr lang="en-US"/>
           </a:p>
@@ -3991,10 +3769,9 @@
           </a:lstStyle>
           <a:p>
             <a:r>
-              <a:rPr lang="en-US" smtClean="0"/>
+              <a:rPr lang="en-US"/>
               <a:t>Click to edit Master title style</a:t>
             </a:r>
-            <a:endParaRPr lang="en-US"/>
           </a:p>
         </p:txBody>
       </p:sp>
@@ -4048,38 +3825,37 @@
           <a:p>
             <a:pPr lvl="0"/>
             <a:r>
-              <a:rPr lang="en-US" smtClean="0"/>
+              <a:rPr lang="en-US"/>
               <a:t>Click to edit Master text styles</a:t>
             </a:r>
           </a:p>
           <a:p>
             <a:pPr lvl="1"/>
             <a:r>
-              <a:rPr lang="en-US" smtClean="0"/>
+              <a:rPr lang="en-US"/>
               <a:t>Second level</a:t>
             </a:r>
           </a:p>
           <a:p>
             <a:pPr lvl="2"/>
             <a:r>
-              <a:rPr lang="en-US" smtClean="0"/>
+              <a:rPr lang="en-US"/>
               <a:t>Third level</a:t>
             </a:r>
           </a:p>
           <a:p>
             <a:pPr lvl="3"/>
             <a:r>
-              <a:rPr lang="en-US" smtClean="0"/>
+              <a:rPr lang="en-US"/>
               <a:t>Fourth level</a:t>
             </a:r>
           </a:p>
           <a:p>
             <a:pPr lvl="4"/>
             <a:r>
-              <a:rPr lang="en-US" smtClean="0"/>
+              <a:rPr lang="en-US"/>
               <a:t>Fifth level</a:t>
             </a:r>
-            <a:endParaRPr lang="en-US"/>
           </a:p>
         </p:txBody>
       </p:sp>
@@ -4142,7 +3918,7 @@
           <a:p>
             <a:pPr lvl="0"/>
             <a:r>
-              <a:rPr lang="en-US" smtClean="0"/>
+              <a:rPr lang="en-US"/>
               <a:t>Click to edit Master text styles</a:t>
             </a:r>
           </a:p>
@@ -4165,7 +3941,7 @@
           <a:p>
             <a:fld id="{5BCAD085-E8A6-8845-BD4E-CB4CCA059FC4}" type="datetimeFigureOut">
               <a:rPr lang="en-US" smtClean="0"/>
-              <a:t>1/27/13</a:t>
+              <a:t>9/1/2026</a:t>
             </a:fld>
             <a:endParaRPr lang="en-US"/>
           </a:p>
@@ -4268,10 +4044,9 @@
           </a:lstStyle>
           <a:p>
             <a:r>
-              <a:rPr lang="en-US" smtClean="0"/>
+              <a:rPr lang="en-US"/>
               <a:t>Click to edit Master title style</a:t>
             </a:r>
-            <a:endParaRPr lang="en-US"/>
           </a:p>
         </p:txBody>
       </p:sp>
@@ -4395,7 +4170,7 @@
           <a:p>
             <a:pPr lvl="0"/>
             <a:r>
-              <a:rPr lang="en-US" smtClean="0"/>
+              <a:rPr lang="en-US"/>
               <a:t>Click to edit Master text styles</a:t>
             </a:r>
           </a:p>
@@ -4418,7 +4193,7 @@
           <a:p>
             <a:fld id="{5BCAD085-E8A6-8845-BD4E-CB4CCA059FC4}" type="datetimeFigureOut">
               <a:rPr lang="en-US" smtClean="0"/>
-              <a:t>1/27/13</a:t>
+              <a:t>9/1/2026</a:t>
             </a:fld>
             <a:endParaRPr lang="en-US"/>
           </a:p>
@@ -4527,10 +4302,9 @@
           <a:lstStyle/>
           <a:p>
             <a:r>
-              <a:rPr lang="en-US" smtClean="0"/>
+              <a:rPr lang="en-US"/>
               <a:t>Click to edit Master title style</a:t>
             </a:r>
-            <a:endParaRPr lang="en-US"/>
           </a:p>
         </p:txBody>
       </p:sp>
@@ -4561,38 +4335,37 @@
           <a:p>
             <a:pPr lvl="0"/>
             <a:r>
-              <a:rPr lang="en-US" smtClean="0"/>
+              <a:rPr lang="en-US"/>
               <a:t>Click to edit Master text styles</a:t>
             </a:r>
           </a:p>
           <a:p>
             <a:pPr lvl="1"/>
             <a:r>
-              <a:rPr lang="en-US" smtClean="0"/>
+              <a:rPr lang="en-US"/>
               <a:t>Second level</a:t>
             </a:r>
           </a:p>
           <a:p>
             <a:pPr lvl="2"/>
             <a:r>
-              <a:rPr lang="en-US" smtClean="0"/>
+              <a:rPr lang="en-US"/>
               <a:t>Third level</a:t>
             </a:r>
           </a:p>
           <a:p>
             <a:pPr lvl="3"/>
             <a:r>
-              <a:rPr lang="en-US" smtClean="0"/>
+              <a:rPr lang="en-US"/>
               <a:t>Fourth level</a:t>
             </a:r>
           </a:p>
           <a:p>
             <a:pPr lvl="4"/>
             <a:r>
-              <a:rPr lang="en-US" smtClean="0"/>
+              <a:rPr lang="en-US"/>
               <a:t>Fifth level</a:t>
             </a:r>
-            <a:endParaRPr lang="en-US"/>
           </a:p>
         </p:txBody>
       </p:sp>
@@ -4631,7 +4404,7 @@
           <a:p>
             <a:fld id="{5BCAD085-E8A6-8845-BD4E-CB4CCA059FC4}" type="datetimeFigureOut">
               <a:rPr lang="en-US" smtClean="0"/>
-              <a:t>1/27/13</a:t>
+              <a:t>9/1/2026</a:t>
             </a:fld>
             <a:endParaRPr lang="en-US"/>
           </a:p>
@@ -4990,7 +4763,7 @@
 </file>
 
 <file path=ppt/slides/slide1.xml><?xml version="1.0" encoding="utf-8"?>
-<p:sld xmlns:a="http://schemas.openxmlformats.org/drawingml/2006/main" xmlns:p="http://schemas.openxmlformats.org/presentationml/2006/main" xmlns:r="http://schemas.openxmlformats.org/officeDocument/2006/relationships">
+<p:sld xmlns:a="http://schemas.openxmlformats.org/drawingml/2006/main" xmlns:r="http://schemas.openxmlformats.org/officeDocument/2006/relationships" xmlns:p="http://schemas.openxmlformats.org/presentationml/2006/main">
   <p:cSld>
     <p:spTree>
       <p:nvGrpSpPr>
@@ -4998,7 +4771,14 @@
         <p:cNvGrpSpPr/>
         <p:nvPr/>
       </p:nvGrpSpPr>
-      <p:grpSpPr/>
+      <p:grpSpPr>
+        <a:xfrm>
+          <a:off x="0" y="0"/>
+          <a:ext cx="0" cy="0"/>
+          <a:chOff x="0" y="0"/>
+          <a:chExt cx="0" cy="0"/>
+        </a:xfrm>
+      </p:grpSpPr>
       <p:sp>
         <p:nvSpPr>
           <p:cNvPr id="2" name="Rectangle 1"/>
@@ -5039,6 +4819,7 @@
           <a:lstStyle/>
           <a:p>
             <a:pPr algn="ctr"/>
+            <a:endParaRPr/>
           </a:p>
         </p:txBody>
       </p:sp>
@@ -5059,7 +4840,7 @@
           <a:noFill/>
         </p:spPr>
         <p:txBody>
-          <a:bodyPr wrap="square" anchor="t" lIns="0" rIns="0" tIns="0" bIns="0">
+          <a:bodyPr wrap="square" lIns="0" tIns="0" rIns="0" bIns="0" anchor="t">
             <a:spAutoFit/>
           </a:bodyPr>
           <a:lstStyle/>
@@ -5098,7 +4879,7 @@
           <a:noFill/>
         </p:spPr>
         <p:txBody>
-          <a:bodyPr wrap="square" anchor="t" lIns="0" rIns="0" tIns="0" bIns="0">
+          <a:bodyPr wrap="square" lIns="0" tIns="0" rIns="0" bIns="0" anchor="t">
             <a:spAutoFit/>
           </a:bodyPr>
           <a:lstStyle/>
@@ -5137,7 +4918,7 @@
           <a:noFill/>
         </p:spPr>
         <p:txBody>
-          <a:bodyPr wrap="square" anchor="t" lIns="0" rIns="0" tIns="0" bIns="0">
+          <a:bodyPr wrap="square" lIns="0" tIns="0" rIns="0" bIns="0" anchor="t">
             <a:spAutoFit/>
           </a:bodyPr>
           <a:lstStyle/>
@@ -5199,6 +4980,7 @@
           <a:lstStyle/>
           <a:p>
             <a:pPr algn="ctr"/>
+            <a:endParaRPr/>
           </a:p>
         </p:txBody>
       </p:sp>
@@ -5219,7 +5001,7 @@
           <a:noFill/>
         </p:spPr>
         <p:txBody>
-          <a:bodyPr wrap="square" anchor="t" lIns="0" rIns="0" tIns="0" bIns="0">
+          <a:bodyPr wrap="square" lIns="0" tIns="0" rIns="0" bIns="0" anchor="t">
             <a:spAutoFit/>
           </a:bodyPr>
           <a:lstStyle/>
@@ -5258,7 +5040,7 @@
           <a:noFill/>
         </p:spPr>
         <p:txBody>
-          <a:bodyPr wrap="square" anchor="t" lIns="0" rIns="0" tIns="0" bIns="0">
+          <a:bodyPr wrap="square" lIns="0" tIns="0" rIns="0" bIns="0" anchor="t">
             <a:spAutoFit/>
           </a:bodyPr>
           <a:lstStyle/>
@@ -5322,6 +5104,7 @@
           <a:lstStyle/>
           <a:p>
             <a:pPr algn="ctr"/>
+            <a:endParaRPr/>
           </a:p>
         </p:txBody>
       </p:sp>
@@ -5342,7 +5125,7 @@
           <a:noFill/>
         </p:spPr>
         <p:txBody>
-          <a:bodyPr wrap="square" anchor="t" lIns="0" rIns="0" tIns="0" bIns="0">
+          <a:bodyPr wrap="square" lIns="0" tIns="0" rIns="0" bIns="0" anchor="t">
             <a:spAutoFit/>
           </a:bodyPr>
           <a:lstStyle/>
@@ -5381,7 +5164,7 @@
           <a:noFill/>
         </p:spPr>
         <p:txBody>
-          <a:bodyPr wrap="square" anchor="t" lIns="0" rIns="0" tIns="0" bIns="0">
+          <a:bodyPr wrap="square" lIns="0" tIns="0" rIns="0" bIns="0" anchor="t">
             <a:spAutoFit/>
           </a:bodyPr>
           <a:lstStyle/>
@@ -5445,6 +5228,7 @@
           <a:lstStyle/>
           <a:p>
             <a:pPr algn="ctr"/>
+            <a:endParaRPr/>
           </a:p>
         </p:txBody>
       </p:sp>
@@ -5465,7 +5249,7 @@
           <a:noFill/>
         </p:spPr>
         <p:txBody>
-          <a:bodyPr wrap="square" anchor="t" lIns="0" rIns="0" tIns="0" bIns="0">
+          <a:bodyPr wrap="square" lIns="0" tIns="0" rIns="0" bIns="0" anchor="t">
             <a:spAutoFit/>
           </a:bodyPr>
           <a:lstStyle/>
@@ -5504,7 +5288,7 @@
           <a:noFill/>
         </p:spPr>
         <p:txBody>
-          <a:bodyPr wrap="square" anchor="t" lIns="0" rIns="0" tIns="0" bIns="0">
+          <a:bodyPr wrap="square" lIns="0" tIns="0" rIns="0" bIns="0" anchor="t">
             <a:spAutoFit/>
           </a:bodyPr>
           <a:lstStyle/>
@@ -5568,6 +5352,7 @@
           <a:lstStyle/>
           <a:p>
             <a:pPr algn="ctr"/>
+            <a:endParaRPr/>
           </a:p>
         </p:txBody>
       </p:sp>
@@ -5588,7 +5373,7 @@
           <a:noFill/>
         </p:spPr>
         <p:txBody>
-          <a:bodyPr wrap="square" anchor="t" lIns="0" rIns="0" tIns="0" bIns="0">
+          <a:bodyPr wrap="square" lIns="0" tIns="0" rIns="0" bIns="0" anchor="t">
             <a:spAutoFit/>
           </a:bodyPr>
           <a:lstStyle/>
@@ -5619,7 +5404,7 @@
 </file>
 
 <file path=ppt/slides/slide10.xml><?xml version="1.0" encoding="utf-8"?>
-<p:sld xmlns:a="http://schemas.openxmlformats.org/drawingml/2006/main" xmlns:p="http://schemas.openxmlformats.org/presentationml/2006/main" xmlns:r="http://schemas.openxmlformats.org/officeDocument/2006/relationships">
+<p:sld xmlns:a="http://schemas.openxmlformats.org/drawingml/2006/main" xmlns:r="http://schemas.openxmlformats.org/officeDocument/2006/relationships" xmlns:p="http://schemas.openxmlformats.org/presentationml/2006/main">
   <p:cSld>
     <p:spTree>
       <p:nvGrpSpPr>
@@ -5627,7 +5412,14 @@
         <p:cNvGrpSpPr/>
         <p:nvPr/>
       </p:nvGrpSpPr>
-      <p:grpSpPr/>
+      <p:grpSpPr>
+        <a:xfrm>
+          <a:off x="0" y="0"/>
+          <a:ext cx="0" cy="0"/>
+          <a:chOff x="0" y="0"/>
+          <a:chExt cx="0" cy="0"/>
+        </a:xfrm>
+      </p:grpSpPr>
       <p:sp>
         <p:nvSpPr>
           <p:cNvPr id="2" name="Rectangle 1"/>
@@ -5668,6 +5460,7 @@
           <a:lstStyle/>
           <a:p>
             <a:pPr algn="ctr"/>
+            <a:endParaRPr/>
           </a:p>
         </p:txBody>
       </p:sp>
@@ -5688,7 +5481,7 @@
           <a:noFill/>
         </p:spPr>
         <p:txBody>
-          <a:bodyPr wrap="square" anchor="t" lIns="0" rIns="0" tIns="0" bIns="0">
+          <a:bodyPr wrap="square" lIns="0" tIns="0" rIns="0" bIns="0" anchor="t">
             <a:spAutoFit/>
           </a:bodyPr>
           <a:lstStyle/>
@@ -5727,7 +5520,7 @@
           <a:noFill/>
         </p:spPr>
         <p:txBody>
-          <a:bodyPr wrap="square" anchor="t" lIns="0" rIns="0" tIns="0" bIns="0">
+          <a:bodyPr wrap="square" lIns="0" tIns="0" rIns="0" bIns="0" anchor="t">
             <a:spAutoFit/>
           </a:bodyPr>
           <a:lstStyle/>
@@ -5789,6 +5582,7 @@
           <a:lstStyle/>
           <a:p>
             <a:pPr algn="ctr"/>
+            <a:endParaRPr/>
           </a:p>
         </p:txBody>
       </p:sp>
@@ -5809,7 +5603,7 @@
           <a:noFill/>
         </p:spPr>
         <p:txBody>
-          <a:bodyPr wrap="square" anchor="t" lIns="0" rIns="0" tIns="0" bIns="0">
+          <a:bodyPr wrap="square" lIns="0" tIns="0" rIns="0" bIns="0" anchor="t">
             <a:spAutoFit/>
           </a:bodyPr>
           <a:lstStyle/>
@@ -5840,7 +5634,7 @@
 </file>
 
 <file path=ppt/slides/slide11.xml><?xml version="1.0" encoding="utf-8"?>
-<p:sld xmlns:a="http://schemas.openxmlformats.org/drawingml/2006/main" xmlns:p="http://schemas.openxmlformats.org/presentationml/2006/main" xmlns:r="http://schemas.openxmlformats.org/officeDocument/2006/relationships">
+<p:sld xmlns:a="http://schemas.openxmlformats.org/drawingml/2006/main" xmlns:r="http://schemas.openxmlformats.org/officeDocument/2006/relationships" xmlns:p="http://schemas.openxmlformats.org/presentationml/2006/main">
   <p:cSld>
     <p:spTree>
       <p:nvGrpSpPr>
@@ -5848,7 +5642,14 @@
         <p:cNvGrpSpPr/>
         <p:nvPr/>
       </p:nvGrpSpPr>
-      <p:grpSpPr/>
+      <p:grpSpPr>
+        <a:xfrm>
+          <a:off x="0" y="0"/>
+          <a:ext cx="0" cy="0"/>
+          <a:chOff x="0" y="0"/>
+          <a:chExt cx="0" cy="0"/>
+        </a:xfrm>
+      </p:grpSpPr>
       <p:sp>
         <p:nvSpPr>
           <p:cNvPr id="2" name="Rectangle 1"/>
@@ -5889,6 +5690,7 @@
           <a:lstStyle/>
           <a:p>
             <a:pPr algn="ctr"/>
+            <a:endParaRPr/>
           </a:p>
         </p:txBody>
       </p:sp>
@@ -5909,7 +5711,7 @@
           <a:noFill/>
         </p:spPr>
         <p:txBody>
-          <a:bodyPr wrap="square" anchor="t" lIns="0" rIns="0" tIns="0" bIns="0">
+          <a:bodyPr wrap="square" lIns="0" tIns="0" rIns="0" bIns="0" anchor="t">
             <a:spAutoFit/>
           </a:bodyPr>
           <a:lstStyle/>
@@ -5971,6 +5773,7 @@
           <a:lstStyle/>
           <a:p>
             <a:pPr algn="ctr"/>
+            <a:endParaRPr/>
           </a:p>
         </p:txBody>
       </p:sp>
@@ -5991,7 +5794,7 @@
           <a:noFill/>
         </p:spPr>
         <p:txBody>
-          <a:bodyPr wrap="square" anchor="t" lIns="0" rIns="0" tIns="0" bIns="0">
+          <a:bodyPr wrap="square" lIns="0" tIns="0" rIns="0" bIns="0" anchor="t">
             <a:spAutoFit/>
           </a:bodyPr>
           <a:lstStyle/>
@@ -6055,6 +5858,7 @@
           <a:lstStyle/>
           <a:p>
             <a:pPr algn="ctr"/>
+            <a:endParaRPr/>
           </a:p>
         </p:txBody>
       </p:sp>
@@ -6075,7 +5879,7 @@
           <a:noFill/>
         </p:spPr>
         <p:txBody>
-          <a:bodyPr wrap="square" anchor="t" lIns="0" rIns="0" tIns="0" bIns="0">
+          <a:bodyPr wrap="square" lIns="0" tIns="0" rIns="0" bIns="0" anchor="t">
             <a:spAutoFit/>
           </a:bodyPr>
           <a:lstStyle/>
@@ -6114,7 +5918,7 @@
           <a:noFill/>
         </p:spPr>
         <p:txBody>
-          <a:bodyPr wrap="square" anchor="t" lIns="0" rIns="0" tIns="0" bIns="0">
+          <a:bodyPr wrap="square" lIns="0" tIns="0" rIns="0" bIns="0" anchor="t">
             <a:spAutoFit/>
           </a:bodyPr>
           <a:lstStyle/>
@@ -6153,7 +5957,7 @@
           <a:noFill/>
         </p:spPr>
         <p:txBody>
-          <a:bodyPr wrap="square" anchor="t" lIns="0" rIns="0" tIns="0" bIns="0">
+          <a:bodyPr wrap="square" lIns="0" tIns="0" rIns="0" bIns="0" anchor="t">
             <a:spAutoFit/>
           </a:bodyPr>
           <a:lstStyle/>
@@ -6215,6 +6019,7 @@
           <a:lstStyle/>
           <a:p>
             <a:pPr algn="ctr"/>
+            <a:endParaRPr/>
           </a:p>
         </p:txBody>
       </p:sp>
@@ -6235,7 +6040,7 @@
           <a:noFill/>
         </p:spPr>
         <p:txBody>
-          <a:bodyPr wrap="square" anchor="t" lIns="0" rIns="0" tIns="0" bIns="0">
+          <a:bodyPr wrap="square" lIns="0" tIns="0" rIns="0" bIns="0" anchor="t">
             <a:spAutoFit/>
           </a:bodyPr>
           <a:lstStyle/>
@@ -6274,7 +6079,7 @@
           <a:noFill/>
         </p:spPr>
         <p:txBody>
-          <a:bodyPr wrap="square" anchor="t" lIns="0" rIns="0" tIns="0" bIns="0">
+          <a:bodyPr wrap="square" lIns="0" tIns="0" rIns="0" bIns="0" anchor="t">
             <a:spAutoFit/>
           </a:bodyPr>
           <a:lstStyle/>
@@ -6336,6 +6141,7 @@
           <a:lstStyle/>
           <a:p>
             <a:pPr algn="ctr"/>
+            <a:endParaRPr/>
           </a:p>
         </p:txBody>
       </p:sp>
@@ -6356,7 +6162,7 @@
           <a:noFill/>
         </p:spPr>
         <p:txBody>
-          <a:bodyPr wrap="square" anchor="t" lIns="0" rIns="0" tIns="0" bIns="0">
+          <a:bodyPr wrap="square" lIns="0" tIns="0" rIns="0" bIns="0" anchor="t">
             <a:spAutoFit/>
           </a:bodyPr>
           <a:lstStyle/>
@@ -6395,7 +6201,7 @@
           <a:noFill/>
         </p:spPr>
         <p:txBody>
-          <a:bodyPr wrap="square" anchor="t" lIns="0" rIns="0" tIns="0" bIns="0">
+          <a:bodyPr wrap="square" lIns="0" tIns="0" rIns="0" bIns="0" anchor="t">
             <a:spAutoFit/>
           </a:bodyPr>
           <a:lstStyle/>
@@ -6434,7 +6240,7 @@
           <a:noFill/>
         </p:spPr>
         <p:txBody>
-          <a:bodyPr wrap="square" anchor="t" lIns="0" rIns="0" tIns="0" bIns="0">
+          <a:bodyPr wrap="square" lIns="0" tIns="0" rIns="0" bIns="0" anchor="t">
             <a:spAutoFit/>
           </a:bodyPr>
           <a:lstStyle/>
@@ -6473,7 +6279,7 @@
           <a:noFill/>
         </p:spPr>
         <p:txBody>
-          <a:bodyPr wrap="square" anchor="t" lIns="0" rIns="0" tIns="0" bIns="0">
+          <a:bodyPr wrap="square" lIns="0" tIns="0" rIns="0" bIns="0" anchor="t">
             <a:spAutoFit/>
           </a:bodyPr>
           <a:lstStyle/>
@@ -6504,7 +6310,7 @@
 </file>
 
 <file path=ppt/slides/slide12.xml><?xml version="1.0" encoding="utf-8"?>
-<p:sld xmlns:a="http://schemas.openxmlformats.org/drawingml/2006/main" xmlns:p="http://schemas.openxmlformats.org/presentationml/2006/main" xmlns:r="http://schemas.openxmlformats.org/officeDocument/2006/relationships">
+<p:sld xmlns:a="http://schemas.openxmlformats.org/drawingml/2006/main" xmlns:r="http://schemas.openxmlformats.org/officeDocument/2006/relationships" xmlns:p="http://schemas.openxmlformats.org/presentationml/2006/main">
   <p:cSld>
     <p:spTree>
       <p:nvGrpSpPr>
@@ -6512,7 +6318,14 @@
         <p:cNvGrpSpPr/>
         <p:nvPr/>
       </p:nvGrpSpPr>
-      <p:grpSpPr/>
+      <p:grpSpPr>
+        <a:xfrm>
+          <a:off x="0" y="0"/>
+          <a:ext cx="0" cy="0"/>
+          <a:chOff x="0" y="0"/>
+          <a:chExt cx="0" cy="0"/>
+        </a:xfrm>
+      </p:grpSpPr>
       <p:sp>
         <p:nvSpPr>
           <p:cNvPr id="2" name="Rectangle 1"/>
@@ -6553,6 +6366,7 @@
           <a:lstStyle/>
           <a:p>
             <a:pPr algn="ctr"/>
+            <a:endParaRPr/>
           </a:p>
         </p:txBody>
       </p:sp>
@@ -6573,7 +6387,7 @@
           <a:noFill/>
         </p:spPr>
         <p:txBody>
-          <a:bodyPr wrap="square" anchor="t" lIns="0" rIns="0" tIns="0" bIns="0">
+          <a:bodyPr wrap="square" lIns="0" tIns="0" rIns="0" bIns="0" anchor="t">
             <a:spAutoFit/>
           </a:bodyPr>
           <a:lstStyle/>
@@ -6635,6 +6449,7 @@
           <a:lstStyle/>
           <a:p>
             <a:pPr algn="ctr"/>
+            <a:endParaRPr/>
           </a:p>
         </p:txBody>
       </p:sp>
@@ -6655,7 +6470,7 @@
           <a:noFill/>
         </p:spPr>
         <p:txBody>
-          <a:bodyPr wrap="square" anchor="t" lIns="0" rIns="0" tIns="0" bIns="0">
+          <a:bodyPr wrap="square" lIns="0" tIns="0" rIns="0" bIns="0" anchor="t">
             <a:spAutoFit/>
           </a:bodyPr>
           <a:lstStyle/>
@@ -6717,6 +6532,7 @@
           <a:lstStyle/>
           <a:p>
             <a:pPr algn="ctr"/>
+            <a:endParaRPr/>
           </a:p>
         </p:txBody>
       </p:sp>
@@ -6737,7 +6553,7 @@
           <a:noFill/>
         </p:spPr>
         <p:txBody>
-          <a:bodyPr wrap="square" anchor="t" lIns="0" rIns="0" tIns="0" bIns="0">
+          <a:bodyPr wrap="square" lIns="0" tIns="0" rIns="0" bIns="0" anchor="t">
             <a:spAutoFit/>
           </a:bodyPr>
           <a:lstStyle/>
@@ -6776,7 +6592,7 @@
           <a:noFill/>
         </p:spPr>
         <p:txBody>
-          <a:bodyPr wrap="square" anchor="t" lIns="0" rIns="0" tIns="0" bIns="0">
+          <a:bodyPr wrap="square" lIns="0" tIns="0" rIns="0" bIns="0" anchor="t">
             <a:spAutoFit/>
           </a:bodyPr>
           <a:lstStyle/>
@@ -6838,6 +6654,7 @@
           <a:lstStyle/>
           <a:p>
             <a:pPr algn="ctr"/>
+            <a:endParaRPr/>
           </a:p>
         </p:txBody>
       </p:sp>
@@ -6858,7 +6675,7 @@
           <a:noFill/>
         </p:spPr>
         <p:txBody>
-          <a:bodyPr wrap="square" anchor="t" lIns="0" rIns="0" tIns="0" bIns="0">
+          <a:bodyPr wrap="square" lIns="0" tIns="0" rIns="0" bIns="0" anchor="t">
             <a:spAutoFit/>
           </a:bodyPr>
           <a:lstStyle/>
@@ -6897,7 +6714,7 @@
           <a:noFill/>
         </p:spPr>
         <p:txBody>
-          <a:bodyPr wrap="square" anchor="t" lIns="0" rIns="0" tIns="0" bIns="0">
+          <a:bodyPr wrap="square" lIns="0" tIns="0" rIns="0" bIns="0" anchor="t">
             <a:spAutoFit/>
           </a:bodyPr>
           <a:lstStyle/>
@@ -6959,6 +6776,7 @@
           <a:lstStyle/>
           <a:p>
             <a:pPr algn="ctr"/>
+            <a:endParaRPr/>
           </a:p>
         </p:txBody>
       </p:sp>
@@ -6979,7 +6797,7 @@
           <a:noFill/>
         </p:spPr>
         <p:txBody>
-          <a:bodyPr wrap="square" anchor="t" lIns="0" rIns="0" tIns="0" bIns="0">
+          <a:bodyPr wrap="square" lIns="0" tIns="0" rIns="0" bIns="0" anchor="t">
             <a:spAutoFit/>
           </a:bodyPr>
           <a:lstStyle/>
@@ -7018,7 +6836,7 @@
           <a:noFill/>
         </p:spPr>
         <p:txBody>
-          <a:bodyPr wrap="square" anchor="t" lIns="0" rIns="0" tIns="0" bIns="0">
+          <a:bodyPr wrap="square" lIns="0" tIns="0" rIns="0" bIns="0" anchor="t">
             <a:spAutoFit/>
           </a:bodyPr>
           <a:lstStyle/>
@@ -7080,6 +6898,7 @@
           <a:lstStyle/>
           <a:p>
             <a:pPr algn="ctr"/>
+            <a:endParaRPr/>
           </a:p>
         </p:txBody>
       </p:sp>
@@ -7100,7 +6919,7 @@
           <a:noFill/>
         </p:spPr>
         <p:txBody>
-          <a:bodyPr wrap="square" anchor="t" lIns="0" rIns="0" tIns="0" bIns="0">
+          <a:bodyPr wrap="square" lIns="0" tIns="0" rIns="0" bIns="0" anchor="t">
             <a:spAutoFit/>
           </a:bodyPr>
           <a:lstStyle/>
@@ -7139,7 +6958,7 @@
           <a:noFill/>
         </p:spPr>
         <p:txBody>
-          <a:bodyPr wrap="square" anchor="t" lIns="0" rIns="0" tIns="0" bIns="0">
+          <a:bodyPr wrap="square" lIns="0" tIns="0" rIns="0" bIns="0" anchor="t">
             <a:spAutoFit/>
           </a:bodyPr>
           <a:lstStyle/>
@@ -7201,6 +7020,7 @@
           <a:lstStyle/>
           <a:p>
             <a:pPr algn="ctr"/>
+            <a:endParaRPr/>
           </a:p>
         </p:txBody>
       </p:sp>
@@ -7221,7 +7041,7 @@
           <a:noFill/>
         </p:spPr>
         <p:txBody>
-          <a:bodyPr wrap="square" anchor="t" lIns="0" rIns="0" tIns="0" bIns="0">
+          <a:bodyPr wrap="square" lIns="0" tIns="0" rIns="0" bIns="0" anchor="t">
             <a:spAutoFit/>
           </a:bodyPr>
           <a:lstStyle/>
@@ -7260,7 +7080,7 @@
           <a:noFill/>
         </p:spPr>
         <p:txBody>
-          <a:bodyPr wrap="square" anchor="t" lIns="0" rIns="0" tIns="0" bIns="0">
+          <a:bodyPr wrap="square" lIns="0" tIns="0" rIns="0" bIns="0" anchor="t">
             <a:spAutoFit/>
           </a:bodyPr>
           <a:lstStyle/>
@@ -7299,7 +7119,7 @@
           <a:noFill/>
         </p:spPr>
         <p:txBody>
-          <a:bodyPr wrap="square" anchor="t" lIns="0" rIns="0" tIns="0" bIns="0">
+          <a:bodyPr wrap="square" lIns="0" tIns="0" rIns="0" bIns="0" anchor="t">
             <a:spAutoFit/>
           </a:bodyPr>
           <a:lstStyle/>
@@ -7338,7 +7158,7 @@
           <a:noFill/>
         </p:spPr>
         <p:txBody>
-          <a:bodyPr wrap="square" anchor="t" lIns="0" rIns="0" tIns="0" bIns="0">
+          <a:bodyPr wrap="square" lIns="0" tIns="0" rIns="0" bIns="0" anchor="t">
             <a:spAutoFit/>
           </a:bodyPr>
           <a:lstStyle/>
@@ -7369,7 +7189,7 @@
 </file>
 
 <file path=ppt/slides/slide13.xml><?xml version="1.0" encoding="utf-8"?>
-<p:sld xmlns:a="http://schemas.openxmlformats.org/drawingml/2006/main" xmlns:p="http://schemas.openxmlformats.org/presentationml/2006/main" xmlns:r="http://schemas.openxmlformats.org/officeDocument/2006/relationships">
+<p:sld xmlns:a="http://schemas.openxmlformats.org/drawingml/2006/main" xmlns:r="http://schemas.openxmlformats.org/officeDocument/2006/relationships" xmlns:p="http://schemas.openxmlformats.org/presentationml/2006/main">
   <p:cSld>
     <p:spTree>
       <p:nvGrpSpPr>
@@ -7377,7 +7197,14 @@
         <p:cNvGrpSpPr/>
         <p:nvPr/>
       </p:nvGrpSpPr>
-      <p:grpSpPr/>
+      <p:grpSpPr>
+        <a:xfrm>
+          <a:off x="0" y="0"/>
+          <a:ext cx="0" cy="0"/>
+          <a:chOff x="0" y="0"/>
+          <a:chExt cx="0" cy="0"/>
+        </a:xfrm>
+      </p:grpSpPr>
       <p:sp>
         <p:nvSpPr>
           <p:cNvPr id="2" name="Rectangle 1"/>
@@ -7418,6 +7245,7 @@
           <a:lstStyle/>
           <a:p>
             <a:pPr algn="ctr"/>
+            <a:endParaRPr/>
           </a:p>
         </p:txBody>
       </p:sp>
@@ -7438,7 +7266,7 @@
           <a:noFill/>
         </p:spPr>
         <p:txBody>
-          <a:bodyPr wrap="square" anchor="t" lIns="0" rIns="0" tIns="0" bIns="0">
+          <a:bodyPr wrap="square" lIns="0" tIns="0" rIns="0" bIns="0" anchor="t">
             <a:spAutoFit/>
           </a:bodyPr>
           <a:lstStyle/>
@@ -7500,6 +7328,7 @@
           <a:lstStyle/>
           <a:p>
             <a:pPr algn="ctr"/>
+            <a:endParaRPr/>
           </a:p>
         </p:txBody>
       </p:sp>
@@ -7520,7 +7349,7 @@
           <a:noFill/>
         </p:spPr>
         <p:txBody>
-          <a:bodyPr wrap="square" anchor="t" lIns="0" rIns="0" tIns="0" bIns="0">
+          <a:bodyPr wrap="square" lIns="0" tIns="0" rIns="0" bIns="0" anchor="t">
             <a:spAutoFit/>
           </a:bodyPr>
           <a:lstStyle/>
@@ -7559,7 +7388,7 @@
           <a:noFill/>
         </p:spPr>
         <p:txBody>
-          <a:bodyPr wrap="square" anchor="t" lIns="0" rIns="0" tIns="0" bIns="0">
+          <a:bodyPr wrap="square" lIns="0" tIns="0" rIns="0" bIns="0" anchor="t">
             <a:spAutoFit/>
           </a:bodyPr>
           <a:lstStyle/>
@@ -7621,6 +7450,7 @@
           <a:lstStyle/>
           <a:p>
             <a:pPr algn="ctr"/>
+            <a:endParaRPr/>
           </a:p>
         </p:txBody>
       </p:sp>
@@ -7641,7 +7471,7 @@
           <a:noFill/>
         </p:spPr>
         <p:txBody>
-          <a:bodyPr wrap="square" anchor="t" lIns="0" rIns="0" tIns="0" bIns="0">
+          <a:bodyPr wrap="square" lIns="0" tIns="0" rIns="0" bIns="0" anchor="t">
             <a:spAutoFit/>
           </a:bodyPr>
           <a:lstStyle/>
@@ -7680,7 +7510,7 @@
           <a:noFill/>
         </p:spPr>
         <p:txBody>
-          <a:bodyPr wrap="square" anchor="t" lIns="0" rIns="0" tIns="0" bIns="0">
+          <a:bodyPr wrap="square" lIns="0" tIns="0" rIns="0" bIns="0" anchor="t">
             <a:spAutoFit/>
           </a:bodyPr>
           <a:lstStyle/>
@@ -7719,7 +7549,7 @@
           <a:noFill/>
         </p:spPr>
         <p:txBody>
-          <a:bodyPr wrap="square" anchor="t" lIns="0" rIns="0" tIns="0" bIns="0">
+          <a:bodyPr wrap="square" lIns="0" tIns="0" rIns="0" bIns="0" anchor="t">
             <a:spAutoFit/>
           </a:bodyPr>
           <a:lstStyle/>
@@ -7797,6 +7627,7 @@
           <a:lstStyle/>
           <a:p>
             <a:pPr algn="ctr"/>
+            <a:endParaRPr/>
           </a:p>
         </p:txBody>
       </p:sp>
@@ -7817,7 +7648,7 @@
           <a:noFill/>
         </p:spPr>
         <p:txBody>
-          <a:bodyPr wrap="square" anchor="t" lIns="0" rIns="0" tIns="0" bIns="0">
+          <a:bodyPr wrap="square" lIns="0" tIns="0" rIns="0" bIns="0" anchor="t">
             <a:spAutoFit/>
           </a:bodyPr>
           <a:lstStyle/>
@@ -7856,7 +7687,7 @@
           <a:noFill/>
         </p:spPr>
         <p:txBody>
-          <a:bodyPr wrap="square" anchor="t" lIns="0" rIns="0" tIns="0" bIns="0">
+          <a:bodyPr wrap="square" lIns="0" tIns="0" rIns="0" bIns="0" anchor="t">
             <a:spAutoFit/>
           </a:bodyPr>
           <a:lstStyle/>
@@ -7895,7 +7726,7 @@
           <a:noFill/>
         </p:spPr>
         <p:txBody>
-          <a:bodyPr wrap="square" anchor="t" lIns="0" rIns="0" tIns="0" bIns="0">
+          <a:bodyPr wrap="square" lIns="0" tIns="0" rIns="0" bIns="0" anchor="t">
             <a:spAutoFit/>
           </a:bodyPr>
           <a:lstStyle/>
@@ -7973,6 +7804,7 @@
           <a:lstStyle/>
           <a:p>
             <a:pPr algn="ctr"/>
+            <a:endParaRPr/>
           </a:p>
         </p:txBody>
       </p:sp>
@@ -7993,7 +7825,7 @@
           <a:noFill/>
         </p:spPr>
         <p:txBody>
-          <a:bodyPr wrap="square" anchor="t" lIns="0" rIns="0" tIns="0" bIns="0">
+          <a:bodyPr wrap="square" lIns="0" tIns="0" rIns="0" bIns="0" anchor="t">
             <a:spAutoFit/>
           </a:bodyPr>
           <a:lstStyle/>
@@ -8032,7 +7864,7 @@
           <a:noFill/>
         </p:spPr>
         <p:txBody>
-          <a:bodyPr wrap="square" anchor="t" lIns="0" rIns="0" tIns="0" bIns="0">
+          <a:bodyPr wrap="square" lIns="0" tIns="0" rIns="0" bIns="0" anchor="t">
             <a:spAutoFit/>
           </a:bodyPr>
           <a:lstStyle/>
@@ -8071,7 +7903,7 @@
           <a:noFill/>
         </p:spPr>
         <p:txBody>
-          <a:bodyPr wrap="square" anchor="t" lIns="0" rIns="0" tIns="0" bIns="0">
+          <a:bodyPr wrap="square" lIns="0" tIns="0" rIns="0" bIns="0" anchor="t">
             <a:spAutoFit/>
           </a:bodyPr>
           <a:lstStyle/>
@@ -8133,6 +7965,7 @@
           <a:lstStyle/>
           <a:p>
             <a:pPr algn="ctr"/>
+            <a:endParaRPr/>
           </a:p>
         </p:txBody>
       </p:sp>
@@ -8153,7 +7986,7 @@
           <a:noFill/>
         </p:spPr>
         <p:txBody>
-          <a:bodyPr wrap="square" anchor="t" lIns="0" rIns="0" tIns="0" bIns="0">
+          <a:bodyPr wrap="square" lIns="0" tIns="0" rIns="0" bIns="0" anchor="t">
             <a:spAutoFit/>
           </a:bodyPr>
           <a:lstStyle/>
@@ -8192,7 +8025,7 @@
           <a:noFill/>
         </p:spPr>
         <p:txBody>
-          <a:bodyPr wrap="square" anchor="t" lIns="0" rIns="0" tIns="0" bIns="0">
+          <a:bodyPr wrap="square" lIns="0" tIns="0" rIns="0" bIns="0" anchor="t">
             <a:spAutoFit/>
           </a:bodyPr>
           <a:lstStyle/>
@@ -8231,7 +8064,7 @@
           <a:noFill/>
         </p:spPr>
         <p:txBody>
-          <a:bodyPr wrap="square" anchor="t" lIns="0" rIns="0" tIns="0" bIns="0">
+          <a:bodyPr wrap="square" lIns="0" tIns="0" rIns="0" bIns="0" anchor="t">
             <a:spAutoFit/>
           </a:bodyPr>
           <a:lstStyle/>
@@ -8293,6 +8126,7 @@
           <a:lstStyle/>
           <a:p>
             <a:pPr algn="ctr"/>
+            <a:endParaRPr/>
           </a:p>
         </p:txBody>
       </p:sp>
@@ -8313,7 +8147,7 @@
           <a:noFill/>
         </p:spPr>
         <p:txBody>
-          <a:bodyPr wrap="square" anchor="t" lIns="0" rIns="0" tIns="0" bIns="0">
+          <a:bodyPr wrap="square" lIns="0" tIns="0" rIns="0" bIns="0" anchor="t">
             <a:spAutoFit/>
           </a:bodyPr>
           <a:lstStyle/>
@@ -8352,7 +8186,7 @@
           <a:noFill/>
         </p:spPr>
         <p:txBody>
-          <a:bodyPr wrap="square" anchor="t" lIns="0" rIns="0" tIns="0" bIns="0">
+          <a:bodyPr wrap="square" lIns="0" tIns="0" rIns="0" bIns="0" anchor="t">
             <a:spAutoFit/>
           </a:bodyPr>
           <a:lstStyle/>
@@ -8391,7 +8225,7 @@
           <a:noFill/>
         </p:spPr>
         <p:txBody>
-          <a:bodyPr wrap="square" anchor="t" lIns="0" rIns="0" tIns="0" bIns="0">
+          <a:bodyPr wrap="square" lIns="0" tIns="0" rIns="0" bIns="0" anchor="t">
             <a:spAutoFit/>
           </a:bodyPr>
           <a:lstStyle/>
@@ -8430,7 +8264,7 @@
           <a:noFill/>
         </p:spPr>
         <p:txBody>
-          <a:bodyPr wrap="square" anchor="t" lIns="0" rIns="0" tIns="0" bIns="0">
+          <a:bodyPr wrap="square" lIns="0" tIns="0" rIns="0" bIns="0" anchor="t">
             <a:spAutoFit/>
           </a:bodyPr>
           <a:lstStyle/>
@@ -8469,7 +8303,7 @@
           <a:noFill/>
         </p:spPr>
         <p:txBody>
-          <a:bodyPr wrap="square" anchor="t" lIns="0" rIns="0" tIns="0" bIns="0">
+          <a:bodyPr wrap="square" lIns="0" tIns="0" rIns="0" bIns="0" anchor="t">
             <a:spAutoFit/>
           </a:bodyPr>
           <a:lstStyle/>
@@ -8500,7 +8334,7 @@
 </file>
 
 <file path=ppt/slides/slide14.xml><?xml version="1.0" encoding="utf-8"?>
-<p:sld xmlns:a="http://schemas.openxmlformats.org/drawingml/2006/main" xmlns:p="http://schemas.openxmlformats.org/presentationml/2006/main" xmlns:r="http://schemas.openxmlformats.org/officeDocument/2006/relationships">
+<p:sld xmlns:a="http://schemas.openxmlformats.org/drawingml/2006/main" xmlns:r="http://schemas.openxmlformats.org/officeDocument/2006/relationships" xmlns:p="http://schemas.openxmlformats.org/presentationml/2006/main">
   <p:cSld>
     <p:spTree>
       <p:nvGrpSpPr>
@@ -8508,7 +8342,14 @@
         <p:cNvGrpSpPr/>
         <p:nvPr/>
       </p:nvGrpSpPr>
-      <p:grpSpPr/>
+      <p:grpSpPr>
+        <a:xfrm>
+          <a:off x="0" y="0"/>
+          <a:ext cx="0" cy="0"/>
+          <a:chOff x="0" y="0"/>
+          <a:chExt cx="0" cy="0"/>
+        </a:xfrm>
+      </p:grpSpPr>
       <p:sp>
         <p:nvSpPr>
           <p:cNvPr id="2" name="Rectangle 1"/>
@@ -8549,6 +8390,7 @@
           <a:lstStyle/>
           <a:p>
             <a:pPr algn="ctr"/>
+            <a:endParaRPr/>
           </a:p>
         </p:txBody>
       </p:sp>
@@ -8569,7 +8411,7 @@
           <a:noFill/>
         </p:spPr>
         <p:txBody>
-          <a:bodyPr wrap="square" anchor="t" lIns="0" rIns="0" tIns="0" bIns="0">
+          <a:bodyPr wrap="square" lIns="0" tIns="0" rIns="0" bIns="0" anchor="t">
             <a:spAutoFit/>
           </a:bodyPr>
           <a:lstStyle/>
@@ -8631,6 +8473,7 @@
           <a:lstStyle/>
           <a:p>
             <a:pPr algn="ctr"/>
+            <a:endParaRPr/>
           </a:p>
         </p:txBody>
       </p:sp>
@@ -8651,7 +8494,7 @@
           <a:noFill/>
         </p:spPr>
         <p:txBody>
-          <a:bodyPr wrap="square" anchor="t" lIns="0" rIns="0" tIns="0" bIns="0">
+          <a:bodyPr wrap="square" lIns="0" tIns="0" rIns="0" bIns="0" anchor="t">
             <a:spAutoFit/>
           </a:bodyPr>
           <a:lstStyle/>
@@ -8715,6 +8558,7 @@
           <a:lstStyle/>
           <a:p>
             <a:pPr algn="ctr"/>
+            <a:endParaRPr/>
           </a:p>
         </p:txBody>
       </p:sp>
@@ -8735,7 +8579,7 @@
           <a:noFill/>
         </p:spPr>
         <p:txBody>
-          <a:bodyPr wrap="square" anchor="t" lIns="0" rIns="0" tIns="0" bIns="0">
+          <a:bodyPr wrap="square" lIns="0" tIns="0" rIns="0" bIns="0" anchor="t">
             <a:spAutoFit/>
           </a:bodyPr>
           <a:lstStyle/>
@@ -8774,7 +8618,7 @@
           <a:noFill/>
         </p:spPr>
         <p:txBody>
-          <a:bodyPr wrap="square" anchor="t" lIns="0" rIns="0" tIns="0" bIns="0">
+          <a:bodyPr wrap="square" lIns="0" tIns="0" rIns="0" bIns="0" anchor="t">
             <a:spAutoFit/>
           </a:bodyPr>
           <a:lstStyle/>
@@ -8813,7 +8657,7 @@
           <a:noFill/>
         </p:spPr>
         <p:txBody>
-          <a:bodyPr wrap="square" anchor="t" lIns="0" rIns="0" tIns="0" bIns="0">
+          <a:bodyPr wrap="square" lIns="0" tIns="0" rIns="0" bIns="0" anchor="t">
             <a:spAutoFit/>
           </a:bodyPr>
           <a:lstStyle/>
@@ -8875,6 +8719,7 @@
           <a:lstStyle/>
           <a:p>
             <a:pPr algn="ctr"/>
+            <a:endParaRPr/>
           </a:p>
         </p:txBody>
       </p:sp>
@@ -8895,7 +8740,7 @@
           <a:noFill/>
         </p:spPr>
         <p:txBody>
-          <a:bodyPr wrap="square" anchor="t" lIns="0" rIns="0" tIns="0" bIns="0">
+          <a:bodyPr wrap="square" lIns="0" tIns="0" rIns="0" bIns="0" anchor="t">
             <a:spAutoFit/>
           </a:bodyPr>
           <a:lstStyle/>
@@ -8926,7 +8771,7 @@
 </file>
 
 <file path=ppt/slides/slide15.xml><?xml version="1.0" encoding="utf-8"?>
-<p:sld xmlns:a="http://schemas.openxmlformats.org/drawingml/2006/main" xmlns:p="http://schemas.openxmlformats.org/presentationml/2006/main" xmlns:r="http://schemas.openxmlformats.org/officeDocument/2006/relationships">
+<p:sld xmlns:a="http://schemas.openxmlformats.org/drawingml/2006/main" xmlns:r="http://schemas.openxmlformats.org/officeDocument/2006/relationships" xmlns:p="http://schemas.openxmlformats.org/presentationml/2006/main">
   <p:cSld>
     <p:spTree>
       <p:nvGrpSpPr>
@@ -8934,7 +8779,14 @@
         <p:cNvGrpSpPr/>
         <p:nvPr/>
       </p:nvGrpSpPr>
-      <p:grpSpPr/>
+      <p:grpSpPr>
+        <a:xfrm>
+          <a:off x="0" y="0"/>
+          <a:ext cx="0" cy="0"/>
+          <a:chOff x="0" y="0"/>
+          <a:chExt cx="0" cy="0"/>
+        </a:xfrm>
+      </p:grpSpPr>
       <p:sp>
         <p:nvSpPr>
           <p:cNvPr id="2" name="Rectangle 1"/>
@@ -8975,6 +8827,7 @@
           <a:lstStyle/>
           <a:p>
             <a:pPr algn="ctr"/>
+            <a:endParaRPr/>
           </a:p>
         </p:txBody>
       </p:sp>
@@ -8995,7 +8848,7 @@
           <a:noFill/>
         </p:spPr>
         <p:txBody>
-          <a:bodyPr wrap="square" anchor="t" lIns="0" rIns="0" tIns="0" bIns="0">
+          <a:bodyPr wrap="square" lIns="0" tIns="0" rIns="0" bIns="0" anchor="t">
             <a:spAutoFit/>
           </a:bodyPr>
           <a:lstStyle/>
@@ -9034,7 +8887,7 @@
           <a:noFill/>
         </p:spPr>
         <p:txBody>
-          <a:bodyPr wrap="square" anchor="t" lIns="0" rIns="0" tIns="0" bIns="0">
+          <a:bodyPr wrap="square" lIns="0" tIns="0" rIns="0" bIns="0" anchor="t">
             <a:spAutoFit/>
           </a:bodyPr>
           <a:lstStyle/>
@@ -9096,6 +8949,7 @@
           <a:lstStyle/>
           <a:p>
             <a:pPr algn="ctr"/>
+            <a:endParaRPr/>
           </a:p>
         </p:txBody>
       </p:sp>
@@ -9116,7 +8970,7 @@
           <a:noFill/>
         </p:spPr>
         <p:txBody>
-          <a:bodyPr wrap="square" anchor="t" lIns="0" rIns="0" tIns="0" bIns="0">
+          <a:bodyPr wrap="square" lIns="0" tIns="0" rIns="0" bIns="0" anchor="t">
             <a:spAutoFit/>
           </a:bodyPr>
           <a:lstStyle/>
@@ -9147,7 +9001,7 @@
 </file>
 
 <file path=ppt/slides/slide16.xml><?xml version="1.0" encoding="utf-8"?>
-<p:sld xmlns:a="http://schemas.openxmlformats.org/drawingml/2006/main" xmlns:p="http://schemas.openxmlformats.org/presentationml/2006/main" xmlns:r="http://schemas.openxmlformats.org/officeDocument/2006/relationships">
+<p:sld xmlns:a="http://schemas.openxmlformats.org/drawingml/2006/main" xmlns:r="http://schemas.openxmlformats.org/officeDocument/2006/relationships" xmlns:p="http://schemas.openxmlformats.org/presentationml/2006/main">
   <p:cSld>
     <p:spTree>
       <p:nvGrpSpPr>
@@ -9155,7 +9009,14 @@
         <p:cNvGrpSpPr/>
         <p:nvPr/>
       </p:nvGrpSpPr>
-      <p:grpSpPr/>
+      <p:grpSpPr>
+        <a:xfrm>
+          <a:off x="0" y="0"/>
+          <a:ext cx="0" cy="0"/>
+          <a:chOff x="0" y="0"/>
+          <a:chExt cx="0" cy="0"/>
+        </a:xfrm>
+      </p:grpSpPr>
       <p:sp>
         <p:nvSpPr>
           <p:cNvPr id="2" name="Rectangle 1"/>
@@ -9196,6 +9057,7 @@
           <a:lstStyle/>
           <a:p>
             <a:pPr algn="ctr"/>
+            <a:endParaRPr/>
           </a:p>
         </p:txBody>
       </p:sp>
@@ -9216,7 +9078,7 @@
           <a:noFill/>
         </p:spPr>
         <p:txBody>
-          <a:bodyPr wrap="square" anchor="t" lIns="0" rIns="0" tIns="0" bIns="0">
+          <a:bodyPr wrap="square" lIns="0" tIns="0" rIns="0" bIns="0" anchor="t">
             <a:spAutoFit/>
           </a:bodyPr>
           <a:lstStyle/>
@@ -9278,6 +9140,7 @@
           <a:lstStyle/>
           <a:p>
             <a:pPr algn="ctr"/>
+            <a:endParaRPr/>
           </a:p>
         </p:txBody>
       </p:sp>
@@ -9298,7 +9161,7 @@
           <a:noFill/>
         </p:spPr>
         <p:txBody>
-          <a:bodyPr wrap="square" anchor="t" lIns="0" rIns="0" tIns="0" bIns="0">
+          <a:bodyPr wrap="square" lIns="0" tIns="0" rIns="0" bIns="0" anchor="t">
             <a:spAutoFit/>
           </a:bodyPr>
           <a:lstStyle/>
@@ -9360,6 +9223,7 @@
           <a:lstStyle/>
           <a:p>
             <a:pPr algn="ctr"/>
+            <a:endParaRPr/>
           </a:p>
         </p:txBody>
       </p:sp>
@@ -9380,7 +9244,7 @@
           <a:noFill/>
         </p:spPr>
         <p:txBody>
-          <a:bodyPr wrap="square" anchor="t" lIns="0" rIns="0" tIns="0" bIns="0">
+          <a:bodyPr wrap="square" lIns="0" tIns="0" rIns="0" bIns="0" anchor="t">
             <a:spAutoFit/>
           </a:bodyPr>
           <a:lstStyle/>
@@ -9419,7 +9283,7 @@
           <a:noFill/>
         </p:spPr>
         <p:txBody>
-          <a:bodyPr wrap="square" anchor="t" lIns="0" rIns="0" tIns="0" bIns="0">
+          <a:bodyPr wrap="square" lIns="0" tIns="0" rIns="0" bIns="0" anchor="t">
             <a:spAutoFit/>
           </a:bodyPr>
           <a:lstStyle/>
@@ -9481,6 +9345,7 @@
           <a:lstStyle/>
           <a:p>
             <a:pPr algn="ctr"/>
+            <a:endParaRPr/>
           </a:p>
         </p:txBody>
       </p:sp>
@@ -9501,7 +9366,7 @@
           <a:noFill/>
         </p:spPr>
         <p:txBody>
-          <a:bodyPr wrap="square" anchor="t" lIns="0" rIns="0" tIns="0" bIns="0">
+          <a:bodyPr wrap="square" lIns="0" tIns="0" rIns="0" bIns="0" anchor="t">
             <a:spAutoFit/>
           </a:bodyPr>
           <a:lstStyle/>
@@ -9540,7 +9405,7 @@
           <a:noFill/>
         </p:spPr>
         <p:txBody>
-          <a:bodyPr wrap="square" anchor="t" lIns="0" rIns="0" tIns="0" bIns="0">
+          <a:bodyPr wrap="square" lIns="0" tIns="0" rIns="0" bIns="0" anchor="t">
             <a:spAutoFit/>
           </a:bodyPr>
           <a:lstStyle/>
@@ -9604,6 +9469,7 @@
           <a:lstStyle/>
           <a:p>
             <a:pPr algn="ctr"/>
+            <a:endParaRPr/>
           </a:p>
         </p:txBody>
       </p:sp>
@@ -9624,7 +9490,7 @@
           <a:noFill/>
         </p:spPr>
         <p:txBody>
-          <a:bodyPr wrap="square" anchor="t" lIns="0" rIns="0" tIns="0" bIns="0">
+          <a:bodyPr wrap="square" lIns="0" tIns="0" rIns="0" bIns="0" anchor="t">
             <a:spAutoFit/>
           </a:bodyPr>
           <a:lstStyle/>
@@ -9688,6 +9554,7 @@
           <a:lstStyle/>
           <a:p>
             <a:pPr algn="ctr"/>
+            <a:endParaRPr/>
           </a:p>
         </p:txBody>
       </p:sp>
@@ -9708,7 +9575,7 @@
           <a:noFill/>
         </p:spPr>
         <p:txBody>
-          <a:bodyPr wrap="square" anchor="t" lIns="0" rIns="0" tIns="0" bIns="0">
+          <a:bodyPr wrap="square" lIns="0" tIns="0" rIns="0" bIns="0" anchor="t">
             <a:spAutoFit/>
           </a:bodyPr>
           <a:lstStyle/>
@@ -9772,6 +9639,7 @@
           <a:lstStyle/>
           <a:p>
             <a:pPr algn="ctr"/>
+            <a:endParaRPr/>
           </a:p>
         </p:txBody>
       </p:sp>
@@ -9792,7 +9660,7 @@
           <a:noFill/>
         </p:spPr>
         <p:txBody>
-          <a:bodyPr wrap="square" anchor="t" lIns="0" rIns="0" tIns="0" bIns="0">
+          <a:bodyPr wrap="square" lIns="0" tIns="0" rIns="0" bIns="0" anchor="t">
             <a:spAutoFit/>
           </a:bodyPr>
           <a:lstStyle/>
@@ -9831,7 +9699,7 @@
           <a:noFill/>
         </p:spPr>
         <p:txBody>
-          <a:bodyPr wrap="square" anchor="t" lIns="0" rIns="0" tIns="0" bIns="0">
+          <a:bodyPr wrap="square" lIns="0" tIns="0" rIns="0" bIns="0" anchor="t">
             <a:spAutoFit/>
           </a:bodyPr>
           <a:lstStyle/>
@@ -9870,7 +9738,7 @@
           <a:noFill/>
         </p:spPr>
         <p:txBody>
-          <a:bodyPr wrap="square" anchor="t" lIns="0" rIns="0" tIns="0" bIns="0">
+          <a:bodyPr wrap="square" lIns="0" tIns="0" rIns="0" bIns="0" anchor="t">
             <a:spAutoFit/>
           </a:bodyPr>
           <a:lstStyle/>
@@ -9932,6 +9800,7 @@
           <a:lstStyle/>
           <a:p>
             <a:pPr algn="ctr"/>
+            <a:endParaRPr/>
           </a:p>
         </p:txBody>
       </p:sp>
@@ -9952,7 +9821,7 @@
           <a:noFill/>
         </p:spPr>
         <p:txBody>
-          <a:bodyPr wrap="square" anchor="t" lIns="0" rIns="0" tIns="0" bIns="0">
+          <a:bodyPr wrap="square" lIns="0" tIns="0" rIns="0" bIns="0" anchor="t">
             <a:spAutoFit/>
           </a:bodyPr>
           <a:lstStyle/>
@@ -10007,7 +9876,7 @@
           <a:noFill/>
         </p:spPr>
         <p:txBody>
-          <a:bodyPr wrap="square" anchor="t" lIns="0" rIns="0" tIns="0" bIns="0">
+          <a:bodyPr wrap="square" lIns="0" tIns="0" rIns="0" bIns="0" anchor="t">
             <a:spAutoFit/>
           </a:bodyPr>
           <a:lstStyle/>
@@ -10071,6 +9940,7 @@
           <a:lstStyle/>
           <a:p>
             <a:pPr algn="ctr"/>
+            <a:endParaRPr/>
           </a:p>
         </p:txBody>
       </p:sp>
@@ -10091,7 +9961,7 @@
           <a:noFill/>
         </p:spPr>
         <p:txBody>
-          <a:bodyPr wrap="square" anchor="t" lIns="0" rIns="0" tIns="0" bIns="0">
+          <a:bodyPr wrap="square" lIns="0" tIns="0" rIns="0" bIns="0" anchor="t">
             <a:spAutoFit/>
           </a:bodyPr>
           <a:lstStyle/>
@@ -10154,7 +10024,7 @@
 </file>
 
 <file path=ppt/slides/slide17.xml><?xml version="1.0" encoding="utf-8"?>
-<p:sld xmlns:a="http://schemas.openxmlformats.org/drawingml/2006/main" xmlns:p="http://schemas.openxmlformats.org/presentationml/2006/main" xmlns:r="http://schemas.openxmlformats.org/officeDocument/2006/relationships">
+<p:sld xmlns:a="http://schemas.openxmlformats.org/drawingml/2006/main" xmlns:r="http://schemas.openxmlformats.org/officeDocument/2006/relationships" xmlns:p="http://schemas.openxmlformats.org/presentationml/2006/main">
   <p:cSld>
     <p:spTree>
       <p:nvGrpSpPr>
@@ -10162,7 +10032,14 @@
         <p:cNvGrpSpPr/>
         <p:nvPr/>
       </p:nvGrpSpPr>
-      <p:grpSpPr/>
+      <p:grpSpPr>
+        <a:xfrm>
+          <a:off x="0" y="0"/>
+          <a:ext cx="0" cy="0"/>
+          <a:chOff x="0" y="0"/>
+          <a:chExt cx="0" cy="0"/>
+        </a:xfrm>
+      </p:grpSpPr>
       <p:sp>
         <p:nvSpPr>
           <p:cNvPr id="2" name="Rectangle 1"/>
@@ -10203,6 +10080,7 @@
           <a:lstStyle/>
           <a:p>
             <a:pPr algn="ctr"/>
+            <a:endParaRPr/>
           </a:p>
         </p:txBody>
       </p:sp>
@@ -10223,7 +10101,7 @@
           <a:noFill/>
         </p:spPr>
         <p:txBody>
-          <a:bodyPr wrap="square" anchor="t" lIns="0" rIns="0" tIns="0" bIns="0">
+          <a:bodyPr wrap="square" lIns="0" tIns="0" rIns="0" bIns="0" anchor="t">
             <a:spAutoFit/>
           </a:bodyPr>
           <a:lstStyle/>
@@ -10285,6 +10163,7 @@
           <a:lstStyle/>
           <a:p>
             <a:pPr algn="ctr"/>
+            <a:endParaRPr/>
           </a:p>
         </p:txBody>
       </p:sp>
@@ -10305,7 +10184,7 @@
           <a:noFill/>
         </p:spPr>
         <p:txBody>
-          <a:bodyPr wrap="square" anchor="t" lIns="0" rIns="0" tIns="0" bIns="0">
+          <a:bodyPr wrap="square" lIns="0" tIns="0" rIns="0" bIns="0" anchor="t">
             <a:spAutoFit/>
           </a:bodyPr>
           <a:lstStyle/>
@@ -10369,6 +10248,7 @@
           <a:lstStyle/>
           <a:p>
             <a:pPr algn="ctr"/>
+            <a:endParaRPr/>
           </a:p>
         </p:txBody>
       </p:sp>
@@ -10389,7 +10269,7 @@
           <a:noFill/>
         </p:spPr>
         <p:txBody>
-          <a:bodyPr wrap="square" anchor="t" lIns="0" rIns="0" tIns="0" bIns="0">
+          <a:bodyPr wrap="square" lIns="0" tIns="0" rIns="0" bIns="0" anchor="t">
             <a:spAutoFit/>
           </a:bodyPr>
           <a:lstStyle/>
@@ -10476,7 +10356,7 @@
           <a:noFill/>
         </p:spPr>
         <p:txBody>
-          <a:bodyPr wrap="square" anchor="t" lIns="0" rIns="0" tIns="0" bIns="0">
+          <a:bodyPr wrap="square" lIns="0" tIns="0" rIns="0" bIns="0" anchor="t">
             <a:spAutoFit/>
           </a:bodyPr>
           <a:lstStyle/>
@@ -10515,7 +10395,7 @@
           <a:noFill/>
         </p:spPr>
         <p:txBody>
-          <a:bodyPr wrap="square" anchor="t" lIns="0" rIns="0" tIns="0" bIns="0">
+          <a:bodyPr wrap="square" lIns="0" tIns="0" rIns="0" bIns="0" anchor="t">
             <a:spAutoFit/>
           </a:bodyPr>
           <a:lstStyle/>
@@ -10577,6 +10457,7 @@
           <a:lstStyle/>
           <a:p>
             <a:pPr algn="ctr"/>
+            <a:endParaRPr/>
           </a:p>
         </p:txBody>
       </p:sp>
@@ -10597,7 +10478,7 @@
           <a:noFill/>
         </p:spPr>
         <p:txBody>
-          <a:bodyPr wrap="square" anchor="t" lIns="0" rIns="0" tIns="0" bIns="0">
+          <a:bodyPr wrap="square" lIns="0" tIns="0" rIns="0" bIns="0" anchor="t">
             <a:spAutoFit/>
           </a:bodyPr>
           <a:lstStyle/>
@@ -10628,7 +10509,7 @@
 </file>
 
 <file path=ppt/slides/slide18.xml><?xml version="1.0" encoding="utf-8"?>
-<p:sld xmlns:a="http://schemas.openxmlformats.org/drawingml/2006/main" xmlns:p="http://schemas.openxmlformats.org/presentationml/2006/main" xmlns:r="http://schemas.openxmlformats.org/officeDocument/2006/relationships">
+<p:sld xmlns:a="http://schemas.openxmlformats.org/drawingml/2006/main" xmlns:r="http://schemas.openxmlformats.org/officeDocument/2006/relationships" xmlns:p="http://schemas.openxmlformats.org/presentationml/2006/main">
   <p:cSld>
     <p:spTree>
       <p:nvGrpSpPr>
@@ -10636,7 +10517,14 @@
         <p:cNvGrpSpPr/>
         <p:nvPr/>
       </p:nvGrpSpPr>
-      <p:grpSpPr/>
+      <p:grpSpPr>
+        <a:xfrm>
+          <a:off x="0" y="0"/>
+          <a:ext cx="0" cy="0"/>
+          <a:chOff x="0" y="0"/>
+          <a:chExt cx="0" cy="0"/>
+        </a:xfrm>
+      </p:grpSpPr>
       <p:sp>
         <p:nvSpPr>
           <p:cNvPr id="2" name="Rectangle 1"/>
@@ -10677,6 +10565,7 @@
           <a:lstStyle/>
           <a:p>
             <a:pPr algn="ctr"/>
+            <a:endParaRPr/>
           </a:p>
         </p:txBody>
       </p:sp>
@@ -10697,7 +10586,7 @@
           <a:noFill/>
         </p:spPr>
         <p:txBody>
-          <a:bodyPr wrap="square" anchor="t" lIns="0" rIns="0" tIns="0" bIns="0">
+          <a:bodyPr wrap="square" lIns="0" tIns="0" rIns="0" bIns="0" anchor="t">
             <a:spAutoFit/>
           </a:bodyPr>
           <a:lstStyle/>
@@ -10736,7 +10625,7 @@
           <a:noFill/>
         </p:spPr>
         <p:txBody>
-          <a:bodyPr wrap="square" anchor="t" lIns="0" rIns="0" tIns="0" bIns="0">
+          <a:bodyPr wrap="square" lIns="0" tIns="0" rIns="0" bIns="0" anchor="t">
             <a:spAutoFit/>
           </a:bodyPr>
           <a:lstStyle/>
@@ -10775,7 +10664,7 @@
           <a:noFill/>
         </p:spPr>
         <p:txBody>
-          <a:bodyPr wrap="square" anchor="t" lIns="0" rIns="0" tIns="0" bIns="0">
+          <a:bodyPr wrap="square" lIns="0" tIns="0" rIns="0" bIns="0" anchor="t">
             <a:spAutoFit/>
           </a:bodyPr>
           <a:lstStyle/>
@@ -10837,6 +10726,7 @@
           <a:lstStyle/>
           <a:p>
             <a:pPr algn="ctr"/>
+            <a:endParaRPr/>
           </a:p>
         </p:txBody>
       </p:sp>
@@ -10857,7 +10747,7 @@
           <a:noFill/>
         </p:spPr>
         <p:txBody>
-          <a:bodyPr wrap="square" anchor="t" lIns="0" rIns="0" tIns="0" bIns="0">
+          <a:bodyPr wrap="square" lIns="0" tIns="0" rIns="0" bIns="0" anchor="t">
             <a:spAutoFit/>
           </a:bodyPr>
           <a:lstStyle/>
@@ -10896,7 +10786,7 @@
           <a:noFill/>
         </p:spPr>
         <p:txBody>
-          <a:bodyPr wrap="square" anchor="t" lIns="0" rIns="0" tIns="0" bIns="0">
+          <a:bodyPr wrap="square" lIns="0" tIns="0" rIns="0" bIns="0" anchor="t">
             <a:spAutoFit/>
           </a:bodyPr>
           <a:lstStyle/>
@@ -10958,6 +10848,7 @@
           <a:lstStyle/>
           <a:p>
             <a:pPr algn="ctr"/>
+            <a:endParaRPr/>
           </a:p>
         </p:txBody>
       </p:sp>
@@ -10978,7 +10869,7 @@
           <a:noFill/>
         </p:spPr>
         <p:txBody>
-          <a:bodyPr wrap="square" anchor="t" lIns="0" rIns="0" tIns="0" bIns="0">
+          <a:bodyPr wrap="square" lIns="0" tIns="0" rIns="0" bIns="0" anchor="t">
             <a:spAutoFit/>
           </a:bodyPr>
           <a:lstStyle/>
@@ -11017,7 +10908,7 @@
           <a:noFill/>
         </p:spPr>
         <p:txBody>
-          <a:bodyPr wrap="square" anchor="t" lIns="0" rIns="0" tIns="0" bIns="0">
+          <a:bodyPr wrap="square" lIns="0" tIns="0" rIns="0" bIns="0" anchor="t">
             <a:spAutoFit/>
           </a:bodyPr>
           <a:lstStyle/>
@@ -11079,6 +10970,7 @@
           <a:lstStyle/>
           <a:p>
             <a:pPr algn="ctr"/>
+            <a:endParaRPr/>
           </a:p>
         </p:txBody>
       </p:sp>
@@ -11099,7 +10991,7 @@
           <a:noFill/>
         </p:spPr>
         <p:txBody>
-          <a:bodyPr wrap="square" anchor="t" lIns="0" rIns="0" tIns="0" bIns="0">
+          <a:bodyPr wrap="square" lIns="0" tIns="0" rIns="0" bIns="0" anchor="t">
             <a:spAutoFit/>
           </a:bodyPr>
           <a:lstStyle/>
@@ -11138,7 +11030,7 @@
           <a:noFill/>
         </p:spPr>
         <p:txBody>
-          <a:bodyPr wrap="square" anchor="t" lIns="0" rIns="0" tIns="0" bIns="0">
+          <a:bodyPr wrap="square" lIns="0" tIns="0" rIns="0" bIns="0" anchor="t">
             <a:spAutoFit/>
           </a:bodyPr>
           <a:lstStyle/>
@@ -11200,6 +11092,7 @@
           <a:lstStyle/>
           <a:p>
             <a:pPr algn="ctr"/>
+            <a:endParaRPr/>
           </a:p>
         </p:txBody>
       </p:sp>
@@ -11220,7 +11113,7 @@
           <a:noFill/>
         </p:spPr>
         <p:txBody>
-          <a:bodyPr wrap="square" anchor="t" lIns="0" rIns="0" tIns="0" bIns="0">
+          <a:bodyPr wrap="square" lIns="0" tIns="0" rIns="0" bIns="0" anchor="t">
             <a:spAutoFit/>
           </a:bodyPr>
           <a:lstStyle/>
@@ -11251,7 +11144,7 @@
 </file>
 
 <file path=ppt/slides/slide19.xml><?xml version="1.0" encoding="utf-8"?>
-<p:sld xmlns:a="http://schemas.openxmlformats.org/drawingml/2006/main" xmlns:p="http://schemas.openxmlformats.org/presentationml/2006/main" xmlns:r="http://schemas.openxmlformats.org/officeDocument/2006/relationships">
+<p:sld xmlns:a="http://schemas.openxmlformats.org/drawingml/2006/main" xmlns:r="http://schemas.openxmlformats.org/officeDocument/2006/relationships" xmlns:p="http://schemas.openxmlformats.org/presentationml/2006/main">
   <p:cSld>
     <p:spTree>
       <p:nvGrpSpPr>
@@ -11259,7 +11152,14 @@
         <p:cNvGrpSpPr/>
         <p:nvPr/>
       </p:nvGrpSpPr>
-      <p:grpSpPr/>
+      <p:grpSpPr>
+        <a:xfrm>
+          <a:off x="0" y="0"/>
+          <a:ext cx="0" cy="0"/>
+          <a:chOff x="0" y="0"/>
+          <a:chExt cx="0" cy="0"/>
+        </a:xfrm>
+      </p:grpSpPr>
       <p:sp>
         <p:nvSpPr>
           <p:cNvPr id="2" name="Rectangle 1"/>
@@ -11300,6 +11200,7 @@
           <a:lstStyle/>
           <a:p>
             <a:pPr algn="ctr"/>
+            <a:endParaRPr/>
           </a:p>
         </p:txBody>
       </p:sp>
@@ -11320,7 +11221,7 @@
           <a:noFill/>
         </p:spPr>
         <p:txBody>
-          <a:bodyPr wrap="square" anchor="t" lIns="0" rIns="0" tIns="0" bIns="0">
+          <a:bodyPr wrap="square" lIns="0" tIns="0" rIns="0" bIns="0" anchor="t">
             <a:spAutoFit/>
           </a:bodyPr>
           <a:lstStyle/>
@@ -11382,6 +11283,7 @@
           <a:lstStyle/>
           <a:p>
             <a:pPr algn="ctr"/>
+            <a:endParaRPr/>
           </a:p>
         </p:txBody>
       </p:sp>
@@ -11402,7 +11304,7 @@
           <a:noFill/>
         </p:spPr>
         <p:txBody>
-          <a:bodyPr wrap="square" anchor="t" lIns="0" rIns="0" tIns="0" bIns="0">
+          <a:bodyPr wrap="square" lIns="0" tIns="0" rIns="0" bIns="0" anchor="t">
             <a:spAutoFit/>
           </a:bodyPr>
           <a:lstStyle/>
@@ -11466,6 +11368,7 @@
           <a:lstStyle/>
           <a:p>
             <a:pPr algn="ctr"/>
+            <a:endParaRPr/>
           </a:p>
         </p:txBody>
       </p:sp>
@@ -11486,7 +11389,7 @@
           <a:noFill/>
         </p:spPr>
         <p:txBody>
-          <a:bodyPr wrap="square" anchor="t" lIns="0" rIns="0" tIns="0" bIns="0">
+          <a:bodyPr wrap="square" lIns="0" tIns="0" rIns="0" bIns="0" anchor="t">
             <a:spAutoFit/>
           </a:bodyPr>
           <a:lstStyle/>
@@ -11598,6 +11501,7 @@
           <a:lstStyle/>
           <a:p>
             <a:pPr algn="ctr"/>
+            <a:endParaRPr/>
           </a:p>
         </p:txBody>
       </p:sp>
@@ -11618,7 +11522,7 @@
           <a:noFill/>
         </p:spPr>
         <p:txBody>
-          <a:bodyPr wrap="square" anchor="t" lIns="0" rIns="0" tIns="0" bIns="0">
+          <a:bodyPr wrap="square" lIns="0" tIns="0" rIns="0" bIns="0" anchor="t">
             <a:spAutoFit/>
           </a:bodyPr>
           <a:lstStyle/>
@@ -11744,6 +11648,7 @@
           <a:lstStyle/>
           <a:p>
             <a:pPr algn="ctr"/>
+            <a:endParaRPr/>
           </a:p>
         </p:txBody>
       </p:sp>
@@ -11764,7 +11669,7 @@
           <a:noFill/>
         </p:spPr>
         <p:txBody>
-          <a:bodyPr wrap="square" anchor="t" lIns="0" rIns="0" tIns="0" bIns="0">
+          <a:bodyPr wrap="square" lIns="0" tIns="0" rIns="0" bIns="0" anchor="t">
             <a:spAutoFit/>
           </a:bodyPr>
           <a:lstStyle/>
@@ -11803,7 +11708,7 @@
           <a:noFill/>
         </p:spPr>
         <p:txBody>
-          <a:bodyPr wrap="square" anchor="t" lIns="0" rIns="0" tIns="0" bIns="0">
+          <a:bodyPr wrap="square" lIns="0" tIns="0" rIns="0" bIns="0" anchor="t">
             <a:spAutoFit/>
           </a:bodyPr>
           <a:lstStyle/>
@@ -11865,6 +11770,7 @@
           <a:lstStyle/>
           <a:p>
             <a:pPr algn="ctr"/>
+            <a:endParaRPr/>
           </a:p>
         </p:txBody>
       </p:sp>
@@ -11885,7 +11791,7 @@
           <a:noFill/>
         </p:spPr>
         <p:txBody>
-          <a:bodyPr wrap="square" anchor="t" lIns="0" rIns="0" tIns="0" bIns="0">
+          <a:bodyPr wrap="square" lIns="0" tIns="0" rIns="0" bIns="0" anchor="t">
             <a:spAutoFit/>
           </a:bodyPr>
           <a:lstStyle/>
@@ -11924,7 +11830,7 @@
           <a:noFill/>
         </p:spPr>
         <p:txBody>
-          <a:bodyPr wrap="square" anchor="t" lIns="0" rIns="0" tIns="0" bIns="0">
+          <a:bodyPr wrap="square" lIns="0" tIns="0" rIns="0" bIns="0" anchor="t">
             <a:spAutoFit/>
           </a:bodyPr>
           <a:lstStyle/>
@@ -11963,7 +11869,7 @@
           <a:noFill/>
         </p:spPr>
         <p:txBody>
-          <a:bodyPr wrap="square" anchor="t" lIns="0" rIns="0" tIns="0" bIns="0">
+          <a:bodyPr wrap="square" lIns="0" tIns="0" rIns="0" bIns="0" anchor="t">
             <a:spAutoFit/>
           </a:bodyPr>
           <a:lstStyle/>
@@ -11994,7 +11900,7 @@
 </file>
 
 <file path=ppt/slides/slide2.xml><?xml version="1.0" encoding="utf-8"?>
-<p:sld xmlns:a="http://schemas.openxmlformats.org/drawingml/2006/main" xmlns:p="http://schemas.openxmlformats.org/presentationml/2006/main" xmlns:r="http://schemas.openxmlformats.org/officeDocument/2006/relationships">
+<p:sld xmlns:a="http://schemas.openxmlformats.org/drawingml/2006/main" xmlns:r="http://schemas.openxmlformats.org/officeDocument/2006/relationships" xmlns:p="http://schemas.openxmlformats.org/presentationml/2006/main">
   <p:cSld>
     <p:spTree>
       <p:nvGrpSpPr>
@@ -12002,7 +11908,14 @@
         <p:cNvGrpSpPr/>
         <p:nvPr/>
       </p:nvGrpSpPr>
-      <p:grpSpPr/>
+      <p:grpSpPr>
+        <a:xfrm>
+          <a:off x="0" y="0"/>
+          <a:ext cx="0" cy="0"/>
+          <a:chOff x="0" y="0"/>
+          <a:chExt cx="0" cy="0"/>
+        </a:xfrm>
+      </p:grpSpPr>
       <p:sp>
         <p:nvSpPr>
           <p:cNvPr id="2" name="Rectangle 1"/>
@@ -12043,6 +11956,7 @@
           <a:lstStyle/>
           <a:p>
             <a:pPr algn="ctr"/>
+            <a:endParaRPr/>
           </a:p>
         </p:txBody>
       </p:sp>
@@ -12063,7 +11977,7 @@
           <a:noFill/>
         </p:spPr>
         <p:txBody>
-          <a:bodyPr wrap="square" anchor="t" lIns="0" rIns="0" tIns="0" bIns="0">
+          <a:bodyPr wrap="square" lIns="0" tIns="0" rIns="0" bIns="0" anchor="t">
             <a:spAutoFit/>
           </a:bodyPr>
           <a:lstStyle/>
@@ -12125,6 +12039,7 @@
           <a:lstStyle/>
           <a:p>
             <a:pPr algn="ctr"/>
+            <a:endParaRPr/>
           </a:p>
         </p:txBody>
       </p:sp>
@@ -12145,7 +12060,7 @@
           <a:noFill/>
         </p:spPr>
         <p:txBody>
-          <a:bodyPr wrap="square" anchor="t" lIns="0" rIns="0" tIns="0" bIns="0">
+          <a:bodyPr wrap="square" lIns="0" tIns="0" rIns="0" bIns="0" anchor="t">
             <a:spAutoFit/>
           </a:bodyPr>
           <a:lstStyle/>
@@ -12184,7 +12099,7 @@
           <a:noFill/>
         </p:spPr>
         <p:txBody>
-          <a:bodyPr wrap="square" anchor="t" lIns="0" rIns="0" tIns="0" bIns="0">
+          <a:bodyPr wrap="square" lIns="0" tIns="0" rIns="0" bIns="0" anchor="t">
             <a:spAutoFit/>
           </a:bodyPr>
           <a:lstStyle/>
@@ -12248,6 +12163,7 @@
           <a:lstStyle/>
           <a:p>
             <a:pPr algn="ctr"/>
+            <a:endParaRPr/>
           </a:p>
         </p:txBody>
       </p:sp>
@@ -12291,6 +12207,7 @@
           <a:lstStyle/>
           <a:p>
             <a:pPr algn="ctr"/>
+            <a:endParaRPr/>
           </a:p>
         </p:txBody>
       </p:sp>
@@ -12311,7 +12228,7 @@
           <a:noFill/>
         </p:spPr>
         <p:txBody>
-          <a:bodyPr wrap="square" anchor="t" lIns="0" rIns="0" tIns="0" bIns="0">
+          <a:bodyPr wrap="square" lIns="0" tIns="0" rIns="0" bIns="0" anchor="t">
             <a:spAutoFit/>
           </a:bodyPr>
           <a:lstStyle/>
@@ -12350,7 +12267,7 @@
           <a:noFill/>
         </p:spPr>
         <p:txBody>
-          <a:bodyPr wrap="square" anchor="t" lIns="0" rIns="0" tIns="0" bIns="0">
+          <a:bodyPr wrap="square" lIns="0" tIns="0" rIns="0" bIns="0" anchor="t">
             <a:spAutoFit/>
           </a:bodyPr>
           <a:lstStyle/>
@@ -12389,7 +12306,7 @@
           <a:noFill/>
         </p:spPr>
         <p:txBody>
-          <a:bodyPr wrap="square" anchor="t" lIns="0" rIns="0" tIns="0" bIns="0">
+          <a:bodyPr wrap="square" lIns="0" tIns="0" rIns="0" bIns="0" anchor="t">
             <a:spAutoFit/>
           </a:bodyPr>
           <a:lstStyle/>
@@ -12428,7 +12345,7 @@
           <a:noFill/>
         </p:spPr>
         <p:txBody>
-          <a:bodyPr wrap="square" anchor="t" lIns="0" rIns="0" tIns="0" bIns="0">
+          <a:bodyPr wrap="square" lIns="0" tIns="0" rIns="0" bIns="0" anchor="t">
             <a:spAutoFit/>
           </a:bodyPr>
           <a:lstStyle/>
@@ -12492,6 +12409,7 @@
           <a:lstStyle/>
           <a:p>
             <a:pPr algn="ctr"/>
+            <a:endParaRPr/>
           </a:p>
         </p:txBody>
       </p:sp>
@@ -12535,6 +12453,7 @@
           <a:lstStyle/>
           <a:p>
             <a:pPr algn="ctr"/>
+            <a:endParaRPr/>
           </a:p>
         </p:txBody>
       </p:sp>
@@ -12555,7 +12474,7 @@
           <a:noFill/>
         </p:spPr>
         <p:txBody>
-          <a:bodyPr wrap="square" anchor="t" lIns="0" rIns="0" tIns="0" bIns="0">
+          <a:bodyPr wrap="square" lIns="0" tIns="0" rIns="0" bIns="0" anchor="t">
             <a:spAutoFit/>
           </a:bodyPr>
           <a:lstStyle/>
@@ -12594,7 +12513,7 @@
           <a:noFill/>
         </p:spPr>
         <p:txBody>
-          <a:bodyPr wrap="square" anchor="t" lIns="0" rIns="0" tIns="0" bIns="0">
+          <a:bodyPr wrap="square" lIns="0" tIns="0" rIns="0" bIns="0" anchor="t">
             <a:spAutoFit/>
           </a:bodyPr>
           <a:lstStyle/>
@@ -12633,7 +12552,7 @@
           <a:noFill/>
         </p:spPr>
         <p:txBody>
-          <a:bodyPr wrap="square" anchor="t" lIns="0" rIns="0" tIns="0" bIns="0">
+          <a:bodyPr wrap="square" lIns="0" tIns="0" rIns="0" bIns="0" anchor="t">
             <a:spAutoFit/>
           </a:bodyPr>
           <a:lstStyle/>
@@ -12672,7 +12591,7 @@
           <a:noFill/>
         </p:spPr>
         <p:txBody>
-          <a:bodyPr wrap="square" anchor="t" lIns="0" rIns="0" tIns="0" bIns="0">
+          <a:bodyPr wrap="square" lIns="0" tIns="0" rIns="0" bIns="0" anchor="t">
             <a:spAutoFit/>
           </a:bodyPr>
           <a:lstStyle/>
@@ -12736,6 +12655,7 @@
           <a:lstStyle/>
           <a:p>
             <a:pPr algn="ctr"/>
+            <a:endParaRPr/>
           </a:p>
         </p:txBody>
       </p:sp>
@@ -12779,6 +12699,7 @@
           <a:lstStyle/>
           <a:p>
             <a:pPr algn="ctr"/>
+            <a:endParaRPr/>
           </a:p>
         </p:txBody>
       </p:sp>
@@ -12799,7 +12720,7 @@
           <a:noFill/>
         </p:spPr>
         <p:txBody>
-          <a:bodyPr wrap="square" anchor="t" lIns="0" rIns="0" tIns="0" bIns="0">
+          <a:bodyPr wrap="square" lIns="0" tIns="0" rIns="0" bIns="0" anchor="t">
             <a:spAutoFit/>
           </a:bodyPr>
           <a:lstStyle/>
@@ -12838,7 +12759,7 @@
           <a:noFill/>
         </p:spPr>
         <p:txBody>
-          <a:bodyPr wrap="square" anchor="t" lIns="0" rIns="0" tIns="0" bIns="0">
+          <a:bodyPr wrap="square" lIns="0" tIns="0" rIns="0" bIns="0" anchor="t">
             <a:spAutoFit/>
           </a:bodyPr>
           <a:lstStyle/>
@@ -12877,7 +12798,7 @@
           <a:noFill/>
         </p:spPr>
         <p:txBody>
-          <a:bodyPr wrap="square" anchor="t" lIns="0" rIns="0" tIns="0" bIns="0">
+          <a:bodyPr wrap="square" lIns="0" tIns="0" rIns="0" bIns="0" anchor="t">
             <a:spAutoFit/>
           </a:bodyPr>
           <a:lstStyle/>
@@ -12916,7 +12837,7 @@
           <a:noFill/>
         </p:spPr>
         <p:txBody>
-          <a:bodyPr wrap="square" anchor="t" lIns="0" rIns="0" tIns="0" bIns="0">
+          <a:bodyPr wrap="square" lIns="0" tIns="0" rIns="0" bIns="0" anchor="t">
             <a:spAutoFit/>
           </a:bodyPr>
           <a:lstStyle/>
@@ -12978,6 +12899,7 @@
           <a:lstStyle/>
           <a:p>
             <a:pPr algn="ctr"/>
+            <a:endParaRPr/>
           </a:p>
         </p:txBody>
       </p:sp>
@@ -12998,7 +12920,7 @@
           <a:noFill/>
         </p:spPr>
         <p:txBody>
-          <a:bodyPr wrap="square" anchor="t" lIns="0" rIns="0" tIns="0" bIns="0">
+          <a:bodyPr wrap="square" lIns="0" tIns="0" rIns="0" bIns="0" anchor="t">
             <a:spAutoFit/>
           </a:bodyPr>
           <a:lstStyle/>
@@ -13060,6 +12982,7 @@
           <a:lstStyle/>
           <a:p>
             <a:pPr algn="ctr"/>
+            <a:endParaRPr/>
           </a:p>
         </p:txBody>
       </p:sp>
@@ -13080,7 +13003,7 @@
           <a:noFill/>
         </p:spPr>
         <p:txBody>
-          <a:bodyPr wrap="square" anchor="t" lIns="0" rIns="0" tIns="0" bIns="0">
+          <a:bodyPr wrap="square" lIns="0" tIns="0" rIns="0" bIns="0" anchor="t">
             <a:spAutoFit/>
           </a:bodyPr>
           <a:lstStyle/>
@@ -13142,6 +13065,7 @@
           <a:lstStyle/>
           <a:p>
             <a:pPr algn="ctr"/>
+            <a:endParaRPr/>
           </a:p>
         </p:txBody>
       </p:sp>
@@ -13162,7 +13086,7 @@
           <a:noFill/>
         </p:spPr>
         <p:txBody>
-          <a:bodyPr wrap="square" anchor="t" lIns="0" rIns="0" tIns="0" bIns="0">
+          <a:bodyPr wrap="square" lIns="0" tIns="0" rIns="0" bIns="0" anchor="t">
             <a:spAutoFit/>
           </a:bodyPr>
           <a:lstStyle/>
@@ -13193,7 +13117,7 @@
 </file>
 
 <file path=ppt/slides/slide20.xml><?xml version="1.0" encoding="utf-8"?>
-<p:sld xmlns:a="http://schemas.openxmlformats.org/drawingml/2006/main" xmlns:p="http://schemas.openxmlformats.org/presentationml/2006/main" xmlns:r="http://schemas.openxmlformats.org/officeDocument/2006/relationships">
+<p:sld xmlns:a="http://schemas.openxmlformats.org/drawingml/2006/main" xmlns:r="http://schemas.openxmlformats.org/officeDocument/2006/relationships" xmlns:p="http://schemas.openxmlformats.org/presentationml/2006/main">
   <p:cSld>
     <p:spTree>
       <p:nvGrpSpPr>
@@ -13201,7 +13125,14 @@
         <p:cNvGrpSpPr/>
         <p:nvPr/>
       </p:nvGrpSpPr>
-      <p:grpSpPr/>
+      <p:grpSpPr>
+        <a:xfrm>
+          <a:off x="0" y="0"/>
+          <a:ext cx="0" cy="0"/>
+          <a:chOff x="0" y="0"/>
+          <a:chExt cx="0" cy="0"/>
+        </a:xfrm>
+      </p:grpSpPr>
       <p:sp>
         <p:nvSpPr>
           <p:cNvPr id="2" name="Rectangle 1"/>
@@ -13242,6 +13173,7 @@
           <a:lstStyle/>
           <a:p>
             <a:pPr algn="ctr"/>
+            <a:endParaRPr/>
           </a:p>
         </p:txBody>
       </p:sp>
@@ -13262,7 +13194,7 @@
           <a:noFill/>
         </p:spPr>
         <p:txBody>
-          <a:bodyPr wrap="square" anchor="t" lIns="0" rIns="0" tIns="0" bIns="0">
+          <a:bodyPr wrap="square" lIns="0" tIns="0" rIns="0" bIns="0" anchor="t">
             <a:spAutoFit/>
           </a:bodyPr>
           <a:lstStyle/>
@@ -13324,6 +13256,7 @@
           <a:lstStyle/>
           <a:p>
             <a:pPr algn="ctr"/>
+            <a:endParaRPr/>
           </a:p>
         </p:txBody>
       </p:sp>
@@ -13344,7 +13277,7 @@
           <a:noFill/>
         </p:spPr>
         <p:txBody>
-          <a:bodyPr wrap="square" anchor="t" lIns="0" rIns="0" tIns="0" bIns="0">
+          <a:bodyPr wrap="square" lIns="0" tIns="0" rIns="0" bIns="0" anchor="t">
             <a:spAutoFit/>
           </a:bodyPr>
           <a:lstStyle/>
@@ -13406,6 +13339,7 @@
           <a:lstStyle/>
           <a:p>
             <a:pPr algn="ctr"/>
+            <a:endParaRPr/>
           </a:p>
         </p:txBody>
       </p:sp>
@@ -13426,7 +13360,7 @@
           <a:noFill/>
         </p:spPr>
         <p:txBody>
-          <a:bodyPr wrap="square" anchor="t" lIns="0" rIns="0" tIns="0" bIns="0">
+          <a:bodyPr wrap="square" lIns="0" tIns="0" rIns="0" bIns="0" anchor="t">
             <a:spAutoFit/>
           </a:bodyPr>
           <a:lstStyle/>
@@ -13465,7 +13399,7 @@
           <a:noFill/>
         </p:spPr>
         <p:txBody>
-          <a:bodyPr wrap="square" anchor="t" lIns="0" rIns="0" tIns="0" bIns="0">
+          <a:bodyPr wrap="square" lIns="0" tIns="0" rIns="0" bIns="0" anchor="t">
             <a:spAutoFit/>
           </a:bodyPr>
           <a:lstStyle/>
@@ -13529,6 +13463,7 @@
           <a:lstStyle/>
           <a:p>
             <a:pPr algn="ctr"/>
+            <a:endParaRPr/>
           </a:p>
         </p:txBody>
       </p:sp>
@@ -13549,7 +13484,7 @@
           <a:noFill/>
         </p:spPr>
         <p:txBody>
-          <a:bodyPr wrap="square" anchor="t" lIns="0" rIns="0" tIns="0" bIns="0">
+          <a:bodyPr wrap="square" lIns="0" tIns="0" rIns="0" bIns="0" anchor="t">
             <a:spAutoFit/>
           </a:bodyPr>
           <a:lstStyle/>
@@ -13588,7 +13523,7 @@
           <a:noFill/>
         </p:spPr>
         <p:txBody>
-          <a:bodyPr wrap="square" anchor="t" lIns="0" rIns="0" tIns="0" bIns="0">
+          <a:bodyPr wrap="square" lIns="0" tIns="0" rIns="0" bIns="0" anchor="t">
             <a:spAutoFit/>
           </a:bodyPr>
           <a:lstStyle/>
@@ -13650,6 +13585,7 @@
           <a:lstStyle/>
           <a:p>
             <a:pPr algn="ctr"/>
+            <a:endParaRPr/>
           </a:p>
         </p:txBody>
       </p:sp>
@@ -13670,7 +13606,7 @@
           <a:noFill/>
         </p:spPr>
         <p:txBody>
-          <a:bodyPr wrap="square" anchor="t" lIns="0" rIns="0" tIns="0" bIns="0">
+          <a:bodyPr wrap="square" lIns="0" tIns="0" rIns="0" bIns="0" anchor="t">
             <a:spAutoFit/>
           </a:bodyPr>
           <a:lstStyle/>
@@ -13732,6 +13668,7 @@
           <a:lstStyle/>
           <a:p>
             <a:pPr algn="ctr"/>
+            <a:endParaRPr/>
           </a:p>
         </p:txBody>
       </p:sp>
@@ -13752,7 +13689,7 @@
           <a:noFill/>
         </p:spPr>
         <p:txBody>
-          <a:bodyPr wrap="square" anchor="t" lIns="0" rIns="0" tIns="0" bIns="0">
+          <a:bodyPr wrap="square" lIns="0" tIns="0" rIns="0" bIns="0" anchor="t">
             <a:spAutoFit/>
           </a:bodyPr>
           <a:lstStyle/>
@@ -13782,7 +13719,7 @@
         </p:nvSpPr>
         <p:spPr>
           <a:xfrm>
-            <a:off x="731520" y="3639312"/>
+            <a:off x="731520" y="3497580"/>
             <a:ext cx="7680960" cy="283463"/>
           </a:xfrm>
           <a:prstGeom prst="rect">
@@ -13791,7 +13728,7 @@
           <a:noFill/>
         </p:spPr>
         <p:txBody>
-          <a:bodyPr wrap="square" anchor="t" lIns="0" rIns="0" tIns="0" bIns="0">
+          <a:bodyPr wrap="square" lIns="0" tIns="0" rIns="0" bIns="0" anchor="t">
             <a:spAutoFit/>
           </a:bodyPr>
           <a:lstStyle/>
@@ -13802,7 +13739,7 @@
               </a:lnSpc>
             </a:pPr>
             <a:r>
-              <a:rPr sz="1350" b="0">
+              <a:rPr sz="1350" b="0" dirty="0">
                 <a:solidFill>
                   <a:srgbClr val="000000"/>
                 </a:solidFill>
@@ -13818,7 +13755,7 @@
               </a:lnSpc>
             </a:pPr>
             <a:r>
-              <a:rPr sz="1350" b="0">
+              <a:rPr sz="1350" b="0" dirty="0">
                 <a:solidFill>
                   <a:srgbClr val="000000"/>
                 </a:solidFill>
@@ -13837,7 +13774,7 @@
         </p:nvSpPr>
         <p:spPr>
           <a:xfrm>
-            <a:off x="566928" y="4251960"/>
+            <a:off x="566928" y="4257040"/>
             <a:ext cx="8010144" cy="320040"/>
           </a:xfrm>
           <a:prstGeom prst="rect">
@@ -13846,7 +13783,7 @@
           <a:noFill/>
         </p:spPr>
         <p:txBody>
-          <a:bodyPr wrap="square" anchor="t" lIns="0" rIns="0" tIns="0" bIns="0">
+          <a:bodyPr wrap="square" lIns="0" tIns="0" rIns="0" bIns="0" anchor="t">
             <a:spAutoFit/>
           </a:bodyPr>
           <a:lstStyle/>
@@ -13877,7 +13814,7 @@
 </file>
 
 <file path=ppt/slides/slide21.xml><?xml version="1.0" encoding="utf-8"?>
-<p:sld xmlns:a="http://schemas.openxmlformats.org/drawingml/2006/main" xmlns:p="http://schemas.openxmlformats.org/presentationml/2006/main" xmlns:r="http://schemas.openxmlformats.org/officeDocument/2006/relationships">
+<p:sld xmlns:a="http://schemas.openxmlformats.org/drawingml/2006/main" xmlns:r="http://schemas.openxmlformats.org/officeDocument/2006/relationships" xmlns:p="http://schemas.openxmlformats.org/presentationml/2006/main">
   <p:cSld>
     <p:spTree>
       <p:nvGrpSpPr>
@@ -13885,7 +13822,14 @@
         <p:cNvGrpSpPr/>
         <p:nvPr/>
       </p:nvGrpSpPr>
-      <p:grpSpPr/>
+      <p:grpSpPr>
+        <a:xfrm>
+          <a:off x="0" y="0"/>
+          <a:ext cx="0" cy="0"/>
+          <a:chOff x="0" y="0"/>
+          <a:chExt cx="0" cy="0"/>
+        </a:xfrm>
+      </p:grpSpPr>
       <p:sp>
         <p:nvSpPr>
           <p:cNvPr id="2" name="Rectangle 1"/>
@@ -13926,6 +13870,7 @@
           <a:lstStyle/>
           <a:p>
             <a:pPr algn="ctr"/>
+            <a:endParaRPr/>
           </a:p>
         </p:txBody>
       </p:sp>
@@ -13946,7 +13891,7 @@
           <a:noFill/>
         </p:spPr>
         <p:txBody>
-          <a:bodyPr wrap="square" anchor="t" lIns="0" rIns="0" tIns="0" bIns="0">
+          <a:bodyPr wrap="square" lIns="0" tIns="0" rIns="0" bIns="0" anchor="t">
             <a:spAutoFit/>
           </a:bodyPr>
           <a:lstStyle/>
@@ -14008,6 +13953,7 @@
           <a:lstStyle/>
           <a:p>
             <a:pPr algn="ctr"/>
+            <a:endParaRPr/>
           </a:p>
         </p:txBody>
       </p:sp>
@@ -14028,7 +13974,7 @@
           <a:noFill/>
         </p:spPr>
         <p:txBody>
-          <a:bodyPr wrap="square" anchor="t" lIns="0" rIns="0" tIns="0" bIns="0">
+          <a:bodyPr wrap="square" lIns="0" tIns="0" rIns="0" bIns="0" anchor="t">
             <a:spAutoFit/>
           </a:bodyPr>
           <a:lstStyle/>
@@ -14067,7 +14013,7 @@
           <a:noFill/>
         </p:spPr>
         <p:txBody>
-          <a:bodyPr wrap="square" anchor="t" lIns="0" rIns="0" tIns="0" bIns="0">
+          <a:bodyPr wrap="square" lIns="0" tIns="0" rIns="0" bIns="0" anchor="t">
             <a:spAutoFit/>
           </a:bodyPr>
           <a:lstStyle/>
@@ -14106,7 +14052,7 @@
           <a:noFill/>
         </p:spPr>
         <p:txBody>
-          <a:bodyPr wrap="square" anchor="t" lIns="0" rIns="0" tIns="0" bIns="0">
+          <a:bodyPr wrap="square" lIns="0" tIns="0" rIns="0" bIns="0" anchor="t">
             <a:spAutoFit/>
           </a:bodyPr>
           <a:lstStyle/>
@@ -14168,6 +14114,7 @@
           <a:lstStyle/>
           <a:p>
             <a:pPr algn="ctr"/>
+            <a:endParaRPr/>
           </a:p>
         </p:txBody>
       </p:sp>
@@ -14188,7 +14135,7 @@
           <a:noFill/>
         </p:spPr>
         <p:txBody>
-          <a:bodyPr wrap="square" anchor="t" lIns="0" rIns="0" tIns="0" bIns="0">
+          <a:bodyPr wrap="square" lIns="0" tIns="0" rIns="0" bIns="0" anchor="t">
             <a:spAutoFit/>
           </a:bodyPr>
           <a:lstStyle/>
@@ -14250,6 +14197,7 @@
           <a:lstStyle/>
           <a:p>
             <a:pPr algn="ctr"/>
+            <a:endParaRPr/>
           </a:p>
         </p:txBody>
       </p:sp>
@@ -14270,7 +14218,7 @@
           <a:noFill/>
         </p:spPr>
         <p:txBody>
-          <a:bodyPr wrap="square" anchor="t" lIns="0" rIns="0" tIns="0" bIns="0">
+          <a:bodyPr wrap="square" lIns="0" tIns="0" rIns="0" bIns="0" anchor="t">
             <a:spAutoFit/>
           </a:bodyPr>
           <a:lstStyle/>
@@ -14332,6 +14280,7 @@
           <a:lstStyle/>
           <a:p>
             <a:pPr algn="ctr"/>
+            <a:endParaRPr/>
           </a:p>
         </p:txBody>
       </p:sp>
@@ -14352,7 +14301,7 @@
           <a:noFill/>
         </p:spPr>
         <p:txBody>
-          <a:bodyPr wrap="square" anchor="t" lIns="0" rIns="0" tIns="0" bIns="0">
+          <a:bodyPr wrap="square" lIns="0" tIns="0" rIns="0" bIns="0" anchor="t">
             <a:spAutoFit/>
           </a:bodyPr>
           <a:lstStyle/>
@@ -14414,6 +14363,7 @@
           <a:lstStyle/>
           <a:p>
             <a:pPr algn="ctr"/>
+            <a:endParaRPr/>
           </a:p>
         </p:txBody>
       </p:sp>
@@ -14434,7 +14384,7 @@
           <a:noFill/>
         </p:spPr>
         <p:txBody>
-          <a:bodyPr wrap="square" anchor="t" lIns="0" rIns="0" tIns="0" bIns="0">
+          <a:bodyPr wrap="square" lIns="0" tIns="0" rIns="0" bIns="0" anchor="t">
             <a:spAutoFit/>
           </a:bodyPr>
           <a:lstStyle/>
@@ -14473,7 +14423,7 @@
           <a:noFill/>
         </p:spPr>
         <p:txBody>
-          <a:bodyPr wrap="square" anchor="t" lIns="0" rIns="0" tIns="0" bIns="0">
+          <a:bodyPr wrap="square" lIns="0" tIns="0" rIns="0" bIns="0" anchor="t">
             <a:spAutoFit/>
           </a:bodyPr>
           <a:lstStyle/>
@@ -14537,6 +14487,7 @@
           <a:lstStyle/>
           <a:p>
             <a:pPr algn="ctr"/>
+            <a:endParaRPr/>
           </a:p>
         </p:txBody>
       </p:sp>
@@ -14557,7 +14508,7 @@
           <a:noFill/>
         </p:spPr>
         <p:txBody>
-          <a:bodyPr wrap="square" anchor="t" lIns="0" rIns="0" tIns="0" bIns="0">
+          <a:bodyPr wrap="square" lIns="0" tIns="0" rIns="0" bIns="0" anchor="t">
             <a:spAutoFit/>
           </a:bodyPr>
           <a:lstStyle/>
@@ -14588,7 +14539,7 @@
         <p:spPr>
           <a:xfrm>
             <a:off x="566928" y="4206240"/>
-            <a:ext cx="54864" cy="777240"/>
+            <a:ext cx="54864" cy="470916"/>
           </a:xfrm>
           <a:prstGeom prst="rect">
             <a:avLst/>
@@ -14619,6 +14570,7 @@
           <a:lstStyle/>
           <a:p>
             <a:pPr algn="ctr"/>
+            <a:endParaRPr/>
           </a:p>
         </p:txBody>
       </p:sp>
@@ -14630,7 +14582,7 @@
         </p:nvSpPr>
         <p:spPr>
           <a:xfrm>
-            <a:off x="731520" y="4315968"/>
+            <a:off x="704089" y="4530851"/>
             <a:ext cx="100584" cy="100584"/>
           </a:xfrm>
           <a:prstGeom prst="ellipse">
@@ -14662,6 +14614,7 @@
           <a:lstStyle/>
           <a:p>
             <a:pPr algn="ctr"/>
+            <a:endParaRPr/>
           </a:p>
         </p:txBody>
       </p:sp>
@@ -14673,7 +14626,7 @@
         </p:nvSpPr>
         <p:spPr>
           <a:xfrm>
-            <a:off x="932688" y="4261103"/>
+            <a:off x="722376" y="4210048"/>
             <a:ext cx="7507223" cy="320040"/>
           </a:xfrm>
           <a:prstGeom prst="rect">
@@ -14682,7 +14635,7 @@
           <a:noFill/>
         </p:spPr>
         <p:txBody>
-          <a:bodyPr wrap="square" anchor="t" lIns="0" rIns="0" tIns="0" bIns="0">
+          <a:bodyPr wrap="square" lIns="0" tIns="0" rIns="0" bIns="0" anchor="t">
             <a:spAutoFit/>
           </a:bodyPr>
           <a:lstStyle/>
@@ -14693,7 +14646,7 @@
               </a:lnSpc>
             </a:pPr>
             <a:r>
-              <a:rPr sz="2000" b="1">
+              <a:rPr sz="2000" b="1" dirty="0">
                 <a:solidFill>
                   <a:srgbClr val="000000"/>
                 </a:solidFill>
@@ -14712,7 +14665,7 @@
         </p:nvSpPr>
         <p:spPr>
           <a:xfrm>
-            <a:off x="932688" y="4608576"/>
+            <a:off x="905257" y="4465065"/>
             <a:ext cx="7507223" cy="320040"/>
           </a:xfrm>
           <a:prstGeom prst="rect">
@@ -14721,7 +14674,7 @@
           <a:noFill/>
         </p:spPr>
         <p:txBody>
-          <a:bodyPr wrap="square" anchor="t" lIns="0" rIns="0" tIns="0" bIns="0">
+          <a:bodyPr wrap="square" lIns="0" tIns="0" rIns="0" bIns="0" anchor="t">
             <a:spAutoFit/>
           </a:bodyPr>
           <a:lstStyle/>
@@ -14732,7 +14685,7 @@
               </a:lnSpc>
             </a:pPr>
             <a:r>
-              <a:rPr sz="1300" b="0">
+              <a:rPr sz="1300" b="0" dirty="0">
                 <a:solidFill>
                   <a:srgbClr val="000000"/>
                 </a:solidFill>
@@ -14751,7 +14704,7 @@
         </p:nvSpPr>
         <p:spPr>
           <a:xfrm>
-            <a:off x="5029200" y="1170432"/>
+            <a:off x="4873751" y="1559052"/>
             <a:ext cx="3566160" cy="457200"/>
           </a:xfrm>
           <a:prstGeom prst="rect">
@@ -14760,7 +14713,7 @@
           <a:noFill/>
         </p:spPr>
         <p:txBody>
-          <a:bodyPr wrap="square" anchor="t" lIns="0" rIns="0" tIns="0" bIns="0">
+          <a:bodyPr wrap="square" lIns="0" tIns="0" rIns="0" bIns="0" anchor="t">
             <a:spAutoFit/>
           </a:bodyPr>
           <a:lstStyle/>
@@ -14771,7 +14724,7 @@
               </a:lnSpc>
             </a:pPr>
             <a:r>
-              <a:rPr sz="1000" b="0">
+              <a:rPr sz="1000" b="0" dirty="0">
                 <a:solidFill>
                   <a:srgbClr val="000000"/>
                 </a:solidFill>
@@ -14791,7 +14744,7 @@
 </file>
 
 <file path=ppt/slides/slide22.xml><?xml version="1.0" encoding="utf-8"?>
-<p:sld xmlns:a="http://schemas.openxmlformats.org/drawingml/2006/main" xmlns:p="http://schemas.openxmlformats.org/presentationml/2006/main" xmlns:r="http://schemas.openxmlformats.org/officeDocument/2006/relationships">
+<p:sld xmlns:a="http://schemas.openxmlformats.org/drawingml/2006/main" xmlns:r="http://schemas.openxmlformats.org/officeDocument/2006/relationships" xmlns:p="http://schemas.openxmlformats.org/presentationml/2006/main">
   <p:cSld>
     <p:spTree>
       <p:nvGrpSpPr>
@@ -14799,7 +14752,14 @@
         <p:cNvGrpSpPr/>
         <p:nvPr/>
       </p:nvGrpSpPr>
-      <p:grpSpPr/>
+      <p:grpSpPr>
+        <a:xfrm>
+          <a:off x="0" y="0"/>
+          <a:ext cx="0" cy="0"/>
+          <a:chOff x="0" y="0"/>
+          <a:chExt cx="0" cy="0"/>
+        </a:xfrm>
+      </p:grpSpPr>
       <p:sp>
         <p:nvSpPr>
           <p:cNvPr id="2" name="Rectangle 1"/>
@@ -14840,6 +14800,7 @@
           <a:lstStyle/>
           <a:p>
             <a:pPr algn="ctr"/>
+            <a:endParaRPr/>
           </a:p>
         </p:txBody>
       </p:sp>
@@ -14860,7 +14821,7 @@
           <a:noFill/>
         </p:spPr>
         <p:txBody>
-          <a:bodyPr wrap="square" anchor="t" lIns="0" rIns="0" tIns="0" bIns="0">
+          <a:bodyPr wrap="square" lIns="0" tIns="0" rIns="0" bIns="0" anchor="t">
             <a:spAutoFit/>
           </a:bodyPr>
           <a:lstStyle/>
@@ -14922,6 +14883,7 @@
           <a:lstStyle/>
           <a:p>
             <a:pPr algn="ctr"/>
+            <a:endParaRPr/>
           </a:p>
         </p:txBody>
       </p:sp>
@@ -14942,7 +14904,7 @@
           <a:noFill/>
         </p:spPr>
         <p:txBody>
-          <a:bodyPr wrap="square" anchor="t" lIns="0" rIns="0" tIns="0" bIns="0">
+          <a:bodyPr wrap="square" lIns="0" tIns="0" rIns="0" bIns="0" anchor="t">
             <a:spAutoFit/>
           </a:bodyPr>
           <a:lstStyle/>
@@ -15004,6 +14966,7 @@
           <a:lstStyle/>
           <a:p>
             <a:pPr algn="ctr"/>
+            <a:endParaRPr/>
           </a:p>
         </p:txBody>
       </p:sp>
@@ -15024,7 +14987,7 @@
           <a:noFill/>
         </p:spPr>
         <p:txBody>
-          <a:bodyPr wrap="square" anchor="t" lIns="0" rIns="0" tIns="0" bIns="0">
+          <a:bodyPr wrap="square" lIns="0" tIns="0" rIns="0" bIns="0" anchor="t">
             <a:spAutoFit/>
           </a:bodyPr>
           <a:lstStyle/>
@@ -15063,7 +15026,7 @@
           <a:noFill/>
         </p:spPr>
         <p:txBody>
-          <a:bodyPr wrap="square" anchor="t" lIns="0" rIns="0" tIns="0" bIns="0">
+          <a:bodyPr wrap="square" lIns="0" tIns="0" rIns="0" bIns="0" anchor="t">
             <a:spAutoFit/>
           </a:bodyPr>
           <a:lstStyle/>
@@ -15102,7 +15065,7 @@
           <a:noFill/>
         </p:spPr>
         <p:txBody>
-          <a:bodyPr wrap="square" anchor="t" lIns="0" rIns="0" tIns="0" bIns="0">
+          <a:bodyPr wrap="square" lIns="0" tIns="0" rIns="0" bIns="0" anchor="t">
             <a:spAutoFit/>
           </a:bodyPr>
           <a:lstStyle/>
@@ -15164,6 +15127,7 @@
           <a:lstStyle/>
           <a:p>
             <a:pPr algn="ctr"/>
+            <a:endParaRPr/>
           </a:p>
         </p:txBody>
       </p:sp>
@@ -15184,7 +15148,7 @@
           <a:noFill/>
         </p:spPr>
         <p:txBody>
-          <a:bodyPr wrap="square" anchor="t" lIns="0" rIns="0" tIns="0" bIns="0">
+          <a:bodyPr wrap="square" lIns="0" tIns="0" rIns="0" bIns="0" anchor="t">
             <a:spAutoFit/>
           </a:bodyPr>
           <a:lstStyle/>
@@ -15223,7 +15187,7 @@
           <a:noFill/>
         </p:spPr>
         <p:txBody>
-          <a:bodyPr wrap="square" anchor="t" lIns="0" rIns="0" tIns="0" bIns="0">
+          <a:bodyPr wrap="square" lIns="0" tIns="0" rIns="0" bIns="0" anchor="t">
             <a:spAutoFit/>
           </a:bodyPr>
           <a:lstStyle/>
@@ -15262,7 +15226,7 @@
           <a:noFill/>
         </p:spPr>
         <p:txBody>
-          <a:bodyPr wrap="square" anchor="t" lIns="0" rIns="0" tIns="0" bIns="0">
+          <a:bodyPr wrap="square" lIns="0" tIns="0" rIns="0" bIns="0" anchor="t">
             <a:spAutoFit/>
           </a:bodyPr>
           <a:lstStyle/>
@@ -15324,6 +15288,7 @@
           <a:lstStyle/>
           <a:p>
             <a:pPr algn="ctr"/>
+            <a:endParaRPr/>
           </a:p>
         </p:txBody>
       </p:sp>
@@ -15344,7 +15309,7 @@
           <a:noFill/>
         </p:spPr>
         <p:txBody>
-          <a:bodyPr wrap="square" anchor="t" lIns="0" rIns="0" tIns="0" bIns="0">
+          <a:bodyPr wrap="square" lIns="0" tIns="0" rIns="0" bIns="0" anchor="t">
             <a:spAutoFit/>
           </a:bodyPr>
           <a:lstStyle/>
@@ -15383,7 +15348,7 @@
           <a:noFill/>
         </p:spPr>
         <p:txBody>
-          <a:bodyPr wrap="square" anchor="t" lIns="0" rIns="0" tIns="0" bIns="0">
+          <a:bodyPr wrap="square" lIns="0" tIns="0" rIns="0" bIns="0" anchor="t">
             <a:spAutoFit/>
           </a:bodyPr>
           <a:lstStyle/>
@@ -15422,7 +15387,7 @@
           <a:noFill/>
         </p:spPr>
         <p:txBody>
-          <a:bodyPr wrap="square" anchor="t" lIns="0" rIns="0" tIns="0" bIns="0">
+          <a:bodyPr wrap="square" lIns="0" tIns="0" rIns="0" bIns="0" anchor="t">
             <a:spAutoFit/>
           </a:bodyPr>
           <a:lstStyle/>
@@ -15461,7 +15426,7 @@
           <a:noFill/>
         </p:spPr>
         <p:txBody>
-          <a:bodyPr wrap="square" anchor="t" lIns="0" rIns="0" tIns="0" bIns="0">
+          <a:bodyPr wrap="square" lIns="0" tIns="0" rIns="0" bIns="0" anchor="t">
             <a:spAutoFit/>
           </a:bodyPr>
           <a:lstStyle/>
@@ -15492,7 +15457,7 @@
         <p:spPr>
           <a:xfrm>
             <a:off x="566928" y="3611880"/>
-            <a:ext cx="8010144" cy="1005840"/>
+            <a:ext cx="8010144" cy="813816"/>
           </a:xfrm>
           <a:prstGeom prst="rect">
             <a:avLst/>
@@ -15523,6 +15488,7 @@
           <a:lstStyle/>
           <a:p>
             <a:pPr algn="ctr"/>
+            <a:endParaRPr/>
           </a:p>
         </p:txBody>
       </p:sp>
@@ -15543,7 +15509,7 @@
           <a:noFill/>
         </p:spPr>
         <p:txBody>
-          <a:bodyPr wrap="square" anchor="t" lIns="0" rIns="0" tIns="0" bIns="0">
+          <a:bodyPr wrap="square" lIns="0" tIns="0" rIns="0" bIns="0" anchor="t">
             <a:spAutoFit/>
           </a:bodyPr>
           <a:lstStyle/>
@@ -15589,16 +15555,16 @@
         </p:nvSpPr>
         <p:spPr>
           <a:xfrm>
-            <a:off x="566928" y="4663440"/>
-            <a:ext cx="8010144" cy="256032"/>
-          </a:xfrm>
-          <a:prstGeom prst="rect">
-            <a:avLst/>
-          </a:prstGeom>
-          <a:noFill/>
-        </p:spPr>
-        <p:txBody>
-          <a:bodyPr wrap="square" anchor="t" lIns="0" rIns="0" tIns="0" bIns="0">
+            <a:off x="-88392" y="4510024"/>
+            <a:ext cx="8010144" cy="161583"/>
+          </a:xfrm>
+          <a:prstGeom prst="rect">
+            <a:avLst/>
+          </a:prstGeom>
+          <a:noFill/>
+        </p:spPr>
+        <p:txBody>
+          <a:bodyPr wrap="square" lIns="0" tIns="0" rIns="0" bIns="0" anchor="t">
             <a:spAutoFit/>
           </a:bodyPr>
           <a:lstStyle/>
@@ -15609,13 +15575,31 @@
               </a:lnSpc>
             </a:pPr>
             <a:r>
-              <a:rPr sz="1050" b="0">
-                <a:solidFill>
-                  <a:srgbClr val="000000"/>
-                </a:solidFill>
-                <a:latin typeface="Source Han Sans SC"/>
-              </a:rPr>
-              <a:t>Bring your topic. After class: online docs get links, handwritten gets photographed — you'll need it at the start of Lesson 3.</a:t>
+              <a:rPr sz="1050" b="0" dirty="0">
+                <a:solidFill>
+                  <a:srgbClr val="000000"/>
+                </a:solidFill>
+                <a:latin typeface="Source Han Sans SC"/>
+              </a:rPr>
+              <a:t>Bring your topic. After class: online docs get links, </a:t>
+            </a:r>
+            <a:r>
+              <a:rPr lang="en-US" sz="1050" b="0" dirty="0">
+                <a:solidFill>
+                  <a:srgbClr val="000000"/>
+                </a:solidFill>
+                <a:latin typeface="Source Han Sans SC"/>
+              </a:rPr>
+              <a:t>anything </a:t>
+            </a:r>
+            <a:r>
+              <a:rPr sz="1050" b="0" dirty="0">
+                <a:solidFill>
+                  <a:srgbClr val="000000"/>
+                </a:solidFill>
+                <a:latin typeface="Source Han Sans SC"/>
+              </a:rPr>
+              <a:t>handwritten gets photographed — you'll need it at the start of Lesson 3.</a:t>
             </a:r>
           </a:p>
         </p:txBody>
@@ -15629,7 +15613,7 @@
 </file>
 
 <file path=ppt/slides/slide3.xml><?xml version="1.0" encoding="utf-8"?>
-<p:sld xmlns:a="http://schemas.openxmlformats.org/drawingml/2006/main" xmlns:p="http://schemas.openxmlformats.org/presentationml/2006/main" xmlns:r="http://schemas.openxmlformats.org/officeDocument/2006/relationships">
+<p:sld xmlns:a="http://schemas.openxmlformats.org/drawingml/2006/main" xmlns:r="http://schemas.openxmlformats.org/officeDocument/2006/relationships" xmlns:p="http://schemas.openxmlformats.org/presentationml/2006/main">
   <p:cSld>
     <p:spTree>
       <p:nvGrpSpPr>
@@ -15637,7 +15621,14 @@
         <p:cNvGrpSpPr/>
         <p:nvPr/>
       </p:nvGrpSpPr>
-      <p:grpSpPr/>
+      <p:grpSpPr>
+        <a:xfrm>
+          <a:off x="0" y="0"/>
+          <a:ext cx="0" cy="0"/>
+          <a:chOff x="0" y="0"/>
+          <a:chExt cx="0" cy="0"/>
+        </a:xfrm>
+      </p:grpSpPr>
       <p:sp>
         <p:nvSpPr>
           <p:cNvPr id="2" name="Rectangle 1"/>
@@ -15678,6 +15669,7 @@
           <a:lstStyle/>
           <a:p>
             <a:pPr algn="ctr"/>
+            <a:endParaRPr/>
           </a:p>
         </p:txBody>
       </p:sp>
@@ -15698,7 +15690,7 @@
           <a:noFill/>
         </p:spPr>
         <p:txBody>
-          <a:bodyPr wrap="square" anchor="t" lIns="0" rIns="0" tIns="0" bIns="0">
+          <a:bodyPr wrap="square" lIns="0" tIns="0" rIns="0" bIns="0" anchor="t">
             <a:spAutoFit/>
           </a:bodyPr>
           <a:lstStyle/>
@@ -15760,6 +15752,7 @@
           <a:lstStyle/>
           <a:p>
             <a:pPr algn="ctr"/>
+            <a:endParaRPr/>
           </a:p>
         </p:txBody>
       </p:sp>
@@ -15780,7 +15773,7 @@
           <a:noFill/>
         </p:spPr>
         <p:txBody>
-          <a:bodyPr wrap="square" anchor="t" lIns="0" rIns="0" tIns="0" bIns="0">
+          <a:bodyPr wrap="square" lIns="0" tIns="0" rIns="0" bIns="0" anchor="t">
             <a:spAutoFit/>
           </a:bodyPr>
           <a:lstStyle/>
@@ -15819,7 +15812,7 @@
           <a:noFill/>
         </p:spPr>
         <p:txBody>
-          <a:bodyPr wrap="square" anchor="t" lIns="0" rIns="0" tIns="0" bIns="0">
+          <a:bodyPr wrap="square" lIns="0" tIns="0" rIns="0" bIns="0" anchor="t">
             <a:spAutoFit/>
           </a:bodyPr>
           <a:lstStyle/>
@@ -15883,6 +15876,7 @@
           <a:lstStyle/>
           <a:p>
             <a:pPr algn="ctr"/>
+            <a:endParaRPr/>
           </a:p>
         </p:txBody>
       </p:sp>
@@ -15926,6 +15920,7 @@
           <a:lstStyle/>
           <a:p>
             <a:pPr algn="ctr"/>
+            <a:endParaRPr/>
           </a:p>
         </p:txBody>
       </p:sp>
@@ -15946,7 +15941,7 @@
           <a:noFill/>
         </p:spPr>
         <p:txBody>
-          <a:bodyPr wrap="square" anchor="t" lIns="0" rIns="0" tIns="0" bIns="0">
+          <a:bodyPr wrap="square" lIns="0" tIns="0" rIns="0" bIns="0" anchor="t">
             <a:spAutoFit/>
           </a:bodyPr>
           <a:lstStyle/>
@@ -15985,7 +15980,7 @@
           <a:noFill/>
         </p:spPr>
         <p:txBody>
-          <a:bodyPr wrap="square" anchor="t" lIns="0" rIns="0" tIns="0" bIns="0">
+          <a:bodyPr wrap="square" lIns="0" tIns="0" rIns="0" bIns="0" anchor="t">
             <a:spAutoFit/>
           </a:bodyPr>
           <a:lstStyle/>
@@ -16049,6 +16044,7 @@
           <a:lstStyle/>
           <a:p>
             <a:pPr algn="ctr"/>
+            <a:endParaRPr/>
           </a:p>
         </p:txBody>
       </p:sp>
@@ -16092,6 +16088,7 @@
           <a:lstStyle/>
           <a:p>
             <a:pPr algn="ctr"/>
+            <a:endParaRPr/>
           </a:p>
         </p:txBody>
       </p:sp>
@@ -16103,7 +16100,7 @@
         </p:nvSpPr>
         <p:spPr>
           <a:xfrm>
-            <a:off x="1755648" y="2231136"/>
+            <a:off x="1792224" y="2254990"/>
             <a:ext cx="457200" cy="237744"/>
           </a:xfrm>
           <a:prstGeom prst="rect">
@@ -16112,7 +16109,7 @@
           <a:noFill/>
         </p:spPr>
         <p:txBody>
-          <a:bodyPr wrap="square" anchor="t" lIns="0" rIns="0" tIns="0" bIns="0">
+          <a:bodyPr wrap="square" lIns="0" tIns="0" rIns="0" bIns="0" anchor="t">
             <a:spAutoFit/>
           </a:bodyPr>
           <a:lstStyle/>
@@ -16123,7 +16120,7 @@
               </a:lnSpc>
             </a:pPr>
             <a:r>
-              <a:rPr sz="850" b="0">
+              <a:rPr sz="850" b="0" dirty="0">
                 <a:solidFill>
                   <a:srgbClr val="000000"/>
                 </a:solidFill>
@@ -16151,7 +16148,7 @@
           <a:noFill/>
         </p:spPr>
         <p:txBody>
-          <a:bodyPr wrap="square" anchor="t" lIns="0" rIns="0" tIns="0" bIns="0">
+          <a:bodyPr wrap="square" lIns="0" tIns="0" rIns="0" bIns="0" anchor="t">
             <a:spAutoFit/>
           </a:bodyPr>
           <a:lstStyle/>
@@ -16181,27 +16178,29 @@
         </p:nvSpPr>
         <p:spPr>
           <a:xfrm>
-            <a:off x="713232" y="3346704"/>
-            <a:ext cx="2304288" cy="658368"/>
-          </a:xfrm>
-          <a:prstGeom prst="rect">
-            <a:avLst/>
-          </a:prstGeom>
-          <a:noFill/>
-        </p:spPr>
-        <p:txBody>
-          <a:bodyPr wrap="square" anchor="t" lIns="0" rIns="0" tIns="0" bIns="0">
-            <a:spAutoFit/>
-          </a:bodyPr>
-          <a:lstStyle/>
-          <a:p>
-            <a:pPr algn="l">
+            <a:off x="694944" y="3154680"/>
+            <a:ext cx="2304288" cy="851452"/>
+          </a:xfrm>
+          <a:prstGeom prst="rect">
+            <a:avLst/>
+          </a:prstGeom>
+          <a:noFill/>
+        </p:spPr>
+        <p:txBody>
+          <a:bodyPr wrap="square" lIns="0" tIns="0" rIns="0" bIns="0" anchor="t">
+            <a:spAutoFit/>
+          </a:bodyPr>
+          <a:lstStyle/>
+          <a:p>
+            <a:pPr marL="171450" indent="-171450" algn="l">
               <a:lnSpc>
                 <a:spcPct val="118000"/>
               </a:lnSpc>
-            </a:pPr>
-            <a:r>
-              <a:rPr sz="950" b="0">
+              <a:buFont typeface="Arial" panose="020B0604020202020204" pitchFamily="34" charset="0"/>
+              <a:buChar char="•"/>
+            </a:pPr>
+            <a:r>
+              <a:rPr sz="950" b="0" dirty="0">
                 <a:solidFill>
                   <a:srgbClr val="000000"/>
                 </a:solidFill>
@@ -16211,13 +16210,15 @@
             </a:r>
           </a:p>
           <a:p>
-            <a:pPr algn="l">
+            <a:pPr marL="171450" indent="-171450" algn="l">
               <a:lnSpc>
                 <a:spcPct val="118000"/>
               </a:lnSpc>
-            </a:pPr>
-            <a:r>
-              <a:rPr sz="950" b="0">
+              <a:buFont typeface="Arial" panose="020B0604020202020204" pitchFamily="34" charset="0"/>
+              <a:buChar char="•"/>
+            </a:pPr>
+            <a:r>
+              <a:rPr sz="950" b="0" dirty="0">
                 <a:solidFill>
                   <a:srgbClr val="000000"/>
                 </a:solidFill>
@@ -16227,13 +16228,15 @@
             </a:r>
           </a:p>
           <a:p>
-            <a:pPr algn="l">
+            <a:pPr marL="171450" indent="-171450" algn="l">
               <a:lnSpc>
                 <a:spcPct val="118000"/>
               </a:lnSpc>
-            </a:pPr>
-            <a:r>
-              <a:rPr sz="950" b="0">
+              <a:buFont typeface="Arial" panose="020B0604020202020204" pitchFamily="34" charset="0"/>
+              <a:buChar char="•"/>
+            </a:pPr>
+            <a:r>
+              <a:rPr sz="950" b="0" dirty="0">
                 <a:solidFill>
                   <a:srgbClr val="000000"/>
                 </a:solidFill>
@@ -16243,13 +16246,15 @@
             </a:r>
           </a:p>
           <a:p>
-            <a:pPr algn="l">
+            <a:pPr marL="171450" indent="-171450" algn="l">
               <a:lnSpc>
                 <a:spcPct val="118000"/>
               </a:lnSpc>
-            </a:pPr>
-            <a:r>
-              <a:rPr sz="950" b="0">
+              <a:buFont typeface="Arial" panose="020B0604020202020204" pitchFamily="34" charset="0"/>
+              <a:buChar char="•"/>
+            </a:pPr>
+            <a:r>
+              <a:rPr sz="950" b="0" dirty="0">
                 <a:solidFill>
                   <a:srgbClr val="000000"/>
                 </a:solidFill>
@@ -16259,13 +16264,15 @@
             </a:r>
           </a:p>
           <a:p>
-            <a:pPr algn="l">
+            <a:pPr marL="171450" indent="-171450" algn="l">
               <a:lnSpc>
                 <a:spcPct val="118000"/>
               </a:lnSpc>
-            </a:pPr>
-            <a:r>
-              <a:rPr sz="950" b="0">
+              <a:buFont typeface="Arial" panose="020B0604020202020204" pitchFamily="34" charset="0"/>
+              <a:buChar char="•"/>
+            </a:pPr>
+            <a:r>
+              <a:rPr sz="950" b="0" dirty="0">
                 <a:solidFill>
                   <a:srgbClr val="000000"/>
                 </a:solidFill>
@@ -16318,6 +16325,7 @@
           <a:lstStyle/>
           <a:p>
             <a:pPr algn="ctr"/>
+            <a:endParaRPr/>
           </a:p>
         </p:txBody>
       </p:sp>
@@ -16361,6 +16369,7 @@
           <a:lstStyle/>
           <a:p>
             <a:pPr algn="ctr"/>
+            <a:endParaRPr/>
           </a:p>
         </p:txBody>
       </p:sp>
@@ -16381,7 +16390,7 @@
           <a:noFill/>
         </p:spPr>
         <p:txBody>
-          <a:bodyPr wrap="square" anchor="t" lIns="0" rIns="0" tIns="0" bIns="0">
+          <a:bodyPr wrap="square" lIns="0" tIns="0" rIns="0" bIns="0" anchor="t">
             <a:spAutoFit/>
           </a:bodyPr>
           <a:lstStyle/>
@@ -16420,7 +16429,7 @@
           <a:noFill/>
         </p:spPr>
         <p:txBody>
-          <a:bodyPr wrap="square" anchor="t" lIns="0" rIns="0" tIns="0" bIns="0">
+          <a:bodyPr wrap="square" lIns="0" tIns="0" rIns="0" bIns="0" anchor="t">
             <a:spAutoFit/>
           </a:bodyPr>
           <a:lstStyle/>
@@ -16484,6 +16493,7 @@
           <a:lstStyle/>
           <a:p>
             <a:pPr algn="ctr"/>
+            <a:endParaRPr/>
           </a:p>
         </p:txBody>
       </p:sp>
@@ -16529,6 +16539,7 @@
           <a:lstStyle/>
           <a:p>
             <a:pPr algn="ctr"/>
+            <a:endParaRPr/>
           </a:p>
         </p:txBody>
       </p:sp>
@@ -16572,6 +16583,7 @@
           <a:lstStyle/>
           <a:p>
             <a:pPr algn="ctr"/>
+            <a:endParaRPr/>
           </a:p>
         </p:txBody>
       </p:sp>
@@ -16583,7 +16595,7 @@
         </p:nvSpPr>
         <p:spPr>
           <a:xfrm>
-            <a:off x="3749039" y="2606039"/>
+            <a:off x="3758183" y="2267712"/>
             <a:ext cx="603504" cy="182880"/>
           </a:xfrm>
           <a:prstGeom prst="rect">
@@ -16592,7 +16604,7 @@
           <a:noFill/>
         </p:spPr>
         <p:txBody>
-          <a:bodyPr wrap="square" anchor="t" lIns="0" rIns="0" tIns="0" bIns="0">
+          <a:bodyPr wrap="square" lIns="0" tIns="0" rIns="0" bIns="0" anchor="t">
             <a:spAutoFit/>
           </a:bodyPr>
           <a:lstStyle/>
@@ -16603,7 +16615,7 @@
               </a:lnSpc>
             </a:pPr>
             <a:r>
-              <a:rPr sz="850" b="0">
+              <a:rPr sz="850" b="0" dirty="0">
                 <a:solidFill>
                   <a:srgbClr val="000000"/>
                 </a:solidFill>
@@ -16622,7 +16634,7 @@
         </p:nvSpPr>
         <p:spPr>
           <a:xfrm>
-            <a:off x="4791456" y="2496312"/>
+            <a:off x="4754880" y="2235200"/>
             <a:ext cx="640080" cy="182880"/>
           </a:xfrm>
           <a:prstGeom prst="rect">
@@ -16631,7 +16643,7 @@
           <a:noFill/>
         </p:spPr>
         <p:txBody>
-          <a:bodyPr wrap="square" anchor="t" lIns="0" rIns="0" tIns="0" bIns="0">
+          <a:bodyPr wrap="square" lIns="0" tIns="0" rIns="0" bIns="0" anchor="t">
             <a:spAutoFit/>
           </a:bodyPr>
           <a:lstStyle/>
@@ -16642,7 +16654,7 @@
               </a:lnSpc>
             </a:pPr>
             <a:r>
-              <a:rPr sz="850" b="0">
+              <a:rPr sz="850" b="0" dirty="0">
                 <a:solidFill>
                   <a:srgbClr val="000000"/>
                 </a:solidFill>
@@ -16670,7 +16682,7 @@
           <a:noFill/>
         </p:spPr>
         <p:txBody>
-          <a:bodyPr wrap="square" anchor="t" lIns="0" rIns="0" tIns="0" bIns="0">
+          <a:bodyPr wrap="square" lIns="0" tIns="0" rIns="0" bIns="0" anchor="t">
             <a:spAutoFit/>
           </a:bodyPr>
           <a:lstStyle/>
@@ -16700,98 +16712,95 @@
         </p:nvSpPr>
         <p:spPr>
           <a:xfrm>
-            <a:off x="3419856" y="3346704"/>
-            <a:ext cx="2304288" cy="658368"/>
-          </a:xfrm>
-          <a:prstGeom prst="rect">
-            <a:avLst/>
-          </a:prstGeom>
-          <a:noFill/>
-        </p:spPr>
-        <p:txBody>
-          <a:bodyPr wrap="square" anchor="t" lIns="0" rIns="0" tIns="0" bIns="0">
+            <a:off x="3422904" y="3108960"/>
+            <a:ext cx="2304288" cy="730969"/>
+          </a:xfrm>
+          <a:prstGeom prst="rect">
+            <a:avLst/>
+          </a:prstGeom>
+          <a:noFill/>
+        </p:spPr>
+        <p:txBody>
+          <a:bodyPr wrap="square" lIns="0" tIns="0" rIns="0" bIns="0" anchor="t">
+            <a:spAutoFit/>
+          </a:bodyPr>
+          <a:lstStyle/>
+          <a:p>
+            <a:pPr marL="171450" indent="-171450" algn="l">
+              <a:buFont typeface="Arial" panose="020B0604020202020204" pitchFamily="34" charset="0"/>
+              <a:buChar char="•"/>
+            </a:pPr>
+            <a:r>
+              <a:rPr sz="950" b="0" dirty="0">
+                <a:solidFill>
+                  <a:srgbClr val="000000"/>
+                </a:solidFill>
+                <a:latin typeface="Source Han Sans SC"/>
+              </a:rPr>
+              <a:t>game controller (buttons / knob / shake drive the screen game)</a:t>
+            </a:r>
+          </a:p>
+          <a:p>
+            <a:pPr marL="171450" indent="-171450" algn="l">
+              <a:buFont typeface="Arial" panose="020B0604020202020204" pitchFamily="34" charset="0"/>
+              <a:buChar char="•"/>
+            </a:pPr>
+            <a:r>
+              <a:rPr sz="950" b="0" dirty="0">
+                <a:solidFill>
+                  <a:srgbClr val="000000"/>
+                </a:solidFill>
+                <a:latin typeface="Source Han Sans SC"/>
+              </a:rPr>
+              <a:t>presentation clicker (one press turns the slide)</a:t>
+            </a:r>
+          </a:p>
+          <a:p>
+            <a:pPr marL="171450" indent="-171450" algn="l">
+              <a:buFont typeface="Arial" panose="020B0604020202020204" pitchFamily="34" charset="0"/>
+              <a:buChar char="•"/>
+            </a:pPr>
+            <a:r>
+              <a:rPr sz="950" b="0" dirty="0">
+                <a:solidFill>
+                  <a:srgbClr val="000000"/>
+                </a:solidFill>
+                <a:latin typeface="Source Han Sans SC"/>
+              </a:rPr>
+              <a:t>shake-to-vote</a:t>
+            </a:r>
+          </a:p>
+        </p:txBody>
+      </p:sp>
+      <p:sp>
+        <p:nvSpPr>
+          <p:cNvPr id="27" name="TextBox 26"/>
+          <p:cNvSpPr txBox="1"/>
+          <p:nvPr/>
+        </p:nvSpPr>
+        <p:spPr>
+          <a:xfrm>
+            <a:off x="3419856" y="3849624"/>
+            <a:ext cx="2304288" cy="256032"/>
+          </a:xfrm>
+          <a:prstGeom prst="rect">
+            <a:avLst/>
+          </a:prstGeom>
+          <a:noFill/>
+        </p:spPr>
+        <p:txBody>
+          <a:bodyPr wrap="square" lIns="0" tIns="0" rIns="0" bIns="0" anchor="t">
             <a:spAutoFit/>
           </a:bodyPr>
           <a:lstStyle/>
           <a:p>
             <a:pPr algn="l">
               <a:lnSpc>
-                <a:spcPct val="118000"/>
-              </a:lnSpc>
-            </a:pPr>
-            <a:r>
-              <a:rPr sz="950" b="0">
-                <a:solidFill>
-                  <a:srgbClr val="000000"/>
-                </a:solidFill>
-                <a:latin typeface="Source Han Sans SC"/>
-              </a:rPr>
-              <a:t>game controller (buttons / knob / shake drive the screen game)</a:t>
-            </a:r>
-          </a:p>
-          <a:p>
-            <a:pPr algn="l">
-              <a:lnSpc>
-                <a:spcPct val="118000"/>
-              </a:lnSpc>
-            </a:pPr>
-            <a:r>
-              <a:rPr sz="950" b="0">
-                <a:solidFill>
-                  <a:srgbClr val="000000"/>
-                </a:solidFill>
-                <a:latin typeface="Source Han Sans SC"/>
-              </a:rPr>
-              <a:t>presentation clicker (one press turns the slide)</a:t>
-            </a:r>
-          </a:p>
-          <a:p>
-            <a:pPr algn="l">
-              <a:lnSpc>
-                <a:spcPct val="118000"/>
-              </a:lnSpc>
-            </a:pPr>
-            <a:r>
-              <a:rPr sz="950" b="0">
-                <a:solidFill>
-                  <a:srgbClr val="000000"/>
-                </a:solidFill>
-                <a:latin typeface="Source Han Sans SC"/>
-              </a:rPr>
-              <a:t>shake-to-vote</a:t>
-            </a:r>
-          </a:p>
-        </p:txBody>
-      </p:sp>
-      <p:sp>
-        <p:nvSpPr>
-          <p:cNvPr id="27" name="TextBox 26"/>
-          <p:cNvSpPr txBox="1"/>
-          <p:nvPr/>
-        </p:nvSpPr>
-        <p:spPr>
-          <a:xfrm>
-            <a:off x="3419856" y="3767328"/>
-            <a:ext cx="2304288" cy="256032"/>
-          </a:xfrm>
-          <a:prstGeom prst="rect">
-            <a:avLst/>
-          </a:prstGeom>
-          <a:noFill/>
-        </p:spPr>
-        <p:txBody>
-          <a:bodyPr wrap="square" anchor="t" lIns="0" rIns="0" tIns="0" bIns="0">
-            <a:spAutoFit/>
-          </a:bodyPr>
-          <a:lstStyle/>
-          <a:p>
-            <a:pPr algn="l">
-              <a:lnSpc>
                 <a:spcPct val="100000"/>
               </a:lnSpc>
             </a:pPr>
             <a:r>
-              <a:rPr sz="850" b="0">
+              <a:rPr sz="850" b="0" dirty="0">
                 <a:solidFill>
                   <a:srgbClr val="000000"/>
                 </a:solidFill>
@@ -16844,6 +16853,7 @@
           <a:lstStyle/>
           <a:p>
             <a:pPr algn="ctr"/>
+            <a:endParaRPr/>
           </a:p>
         </p:txBody>
       </p:sp>
@@ -16887,6 +16897,7 @@
           <a:lstStyle/>
           <a:p>
             <a:pPr algn="ctr"/>
+            <a:endParaRPr/>
           </a:p>
         </p:txBody>
       </p:sp>
@@ -16907,7 +16918,7 @@
           <a:noFill/>
         </p:spPr>
         <p:txBody>
-          <a:bodyPr wrap="square" anchor="t" lIns="0" rIns="0" tIns="0" bIns="0">
+          <a:bodyPr wrap="square" lIns="0" tIns="0" rIns="0" bIns="0" anchor="t">
             <a:spAutoFit/>
           </a:bodyPr>
           <a:lstStyle/>
@@ -16946,7 +16957,7 @@
           <a:noFill/>
         </p:spPr>
         <p:txBody>
-          <a:bodyPr wrap="square" anchor="t" lIns="0" rIns="0" tIns="0" bIns="0">
+          <a:bodyPr wrap="square" lIns="0" tIns="0" rIns="0" bIns="0" anchor="t">
             <a:spAutoFit/>
           </a:bodyPr>
           <a:lstStyle/>
@@ -17010,6 +17021,7 @@
           <a:lstStyle/>
           <a:p>
             <a:pPr algn="ctr"/>
+            <a:endParaRPr/>
           </a:p>
         </p:txBody>
       </p:sp>
@@ -17053,6 +17065,7 @@
           <a:lstStyle/>
           <a:p>
             <a:pPr algn="ctr"/>
+            <a:endParaRPr/>
           </a:p>
         </p:txBody>
       </p:sp>
@@ -17073,7 +17086,7 @@
           <a:noFill/>
         </p:spPr>
         <p:txBody>
-          <a:bodyPr wrap="square" anchor="t" lIns="0" rIns="0" tIns="0" bIns="0">
+          <a:bodyPr wrap="square" lIns="0" tIns="0" rIns="0" bIns="0" anchor="t">
             <a:spAutoFit/>
           </a:bodyPr>
           <a:lstStyle/>
@@ -17112,7 +17125,7 @@
           <a:noFill/>
         </p:spPr>
         <p:txBody>
-          <a:bodyPr wrap="square" anchor="t" lIns="0" rIns="0" tIns="0" bIns="0">
+          <a:bodyPr wrap="square" lIns="0" tIns="0" rIns="0" bIns="0" anchor="t">
             <a:spAutoFit/>
           </a:bodyPr>
           <a:lstStyle/>
@@ -17123,7 +17136,7 @@
               </a:lnSpc>
             </a:pPr>
             <a:r>
-              <a:rPr sz="1100" b="0">
+              <a:rPr sz="1100" b="0" dirty="0">
                 <a:solidFill>
                   <a:srgbClr val="000000"/>
                 </a:solidFill>
@@ -17142,16 +17155,16 @@
         </p:nvSpPr>
         <p:spPr>
           <a:xfrm>
-            <a:off x="6126480" y="3767328"/>
-            <a:ext cx="2304288" cy="256032"/>
-          </a:xfrm>
-          <a:prstGeom prst="rect">
-            <a:avLst/>
-          </a:prstGeom>
-          <a:noFill/>
-        </p:spPr>
-        <p:txBody>
-          <a:bodyPr wrap="square" anchor="t" lIns="0" rIns="0" tIns="0" bIns="0">
+            <a:off x="6108192" y="3694176"/>
+            <a:ext cx="2340864" cy="130805"/>
+          </a:xfrm>
+          <a:prstGeom prst="rect">
+            <a:avLst/>
+          </a:prstGeom>
+          <a:noFill/>
+        </p:spPr>
+        <p:txBody>
+          <a:bodyPr wrap="square" lIns="0" tIns="0" rIns="0" bIns="0" anchor="t">
             <a:spAutoFit/>
           </a:bodyPr>
           <a:lstStyle/>
@@ -17162,7 +17175,7 @@
               </a:lnSpc>
             </a:pPr>
             <a:r>
-              <a:rPr sz="850" b="0">
+              <a:rPr sz="850" b="0" dirty="0">
                 <a:solidFill>
                   <a:srgbClr val="000000"/>
                 </a:solidFill>
@@ -17182,7 +17195,7 @@
         <p:spPr>
           <a:xfrm>
             <a:off x="566928" y="4224528"/>
-            <a:ext cx="54864" cy="475488"/>
+            <a:ext cx="54864" cy="362712"/>
           </a:xfrm>
           <a:prstGeom prst="rect">
             <a:avLst/>
@@ -17213,6 +17226,7 @@
           <a:lstStyle/>
           <a:p>
             <a:pPr algn="ctr"/>
+            <a:endParaRPr/>
           </a:p>
         </p:txBody>
       </p:sp>
@@ -17225,15 +17239,15 @@
         <p:spPr>
           <a:xfrm>
             <a:off x="768096" y="4242816"/>
-            <a:ext cx="7808975" cy="438912"/>
-          </a:xfrm>
-          <a:prstGeom prst="rect">
-            <a:avLst/>
-          </a:prstGeom>
-          <a:noFill/>
-        </p:spPr>
-        <p:txBody>
-          <a:bodyPr wrap="square" anchor="t" lIns="0" rIns="0" tIns="0" bIns="0">
+            <a:ext cx="7808975" cy="249877"/>
+          </a:xfrm>
+          <a:prstGeom prst="rect">
+            <a:avLst/>
+          </a:prstGeom>
+          <a:noFill/>
+        </p:spPr>
+        <p:txBody>
+          <a:bodyPr wrap="square" lIns="0" tIns="0" rIns="0" bIns="0" anchor="t">
             <a:spAutoFit/>
           </a:bodyPr>
           <a:lstStyle/>
@@ -17244,13 +17258,31 @@
               </a:lnSpc>
             </a:pPr>
             <a:r>
-              <a:rPr sz="1500" b="0">
-                <a:solidFill>
-                  <a:srgbClr val="000000"/>
-                </a:solidFill>
-                <a:latin typeface="Source Han Sans SC"/>
-              </a:rPr>
-              <a:t>What matters isn't how advanced it is — it's whose annoyance it solves.</a:t>
+              <a:rPr sz="1500" b="0" dirty="0">
+                <a:solidFill>
+                  <a:srgbClr val="000000"/>
+                </a:solidFill>
+                <a:latin typeface="Source Han Sans SC"/>
+              </a:rPr>
+              <a:t>What matters isn't how advanced it is — it's whose annoyance</a:t>
+            </a:r>
+            <a:r>
+              <a:rPr lang="en-US" sz="1500" b="0" dirty="0">
+                <a:solidFill>
+                  <a:srgbClr val="000000"/>
+                </a:solidFill>
+                <a:latin typeface="Source Han Sans SC"/>
+              </a:rPr>
+              <a:t>/ problems</a:t>
+            </a:r>
+            <a:r>
+              <a:rPr sz="1500" b="0" dirty="0">
+                <a:solidFill>
+                  <a:srgbClr val="000000"/>
+                </a:solidFill>
+                <a:latin typeface="Source Han Sans SC"/>
+              </a:rPr>
+              <a:t> it solves.</a:t>
             </a:r>
           </a:p>
         </p:txBody>
@@ -17264,7 +17296,7 @@
 </file>
 
 <file path=ppt/slides/slide4.xml><?xml version="1.0" encoding="utf-8"?>
-<p:sld xmlns:a="http://schemas.openxmlformats.org/drawingml/2006/main" xmlns:p="http://schemas.openxmlformats.org/presentationml/2006/main" xmlns:r="http://schemas.openxmlformats.org/officeDocument/2006/relationships">
+<p:sld xmlns:a="http://schemas.openxmlformats.org/drawingml/2006/main" xmlns:r="http://schemas.openxmlformats.org/officeDocument/2006/relationships" xmlns:p="http://schemas.openxmlformats.org/presentationml/2006/main">
   <p:cSld>
     <p:spTree>
       <p:nvGrpSpPr>
@@ -17272,7 +17304,14 @@
         <p:cNvGrpSpPr/>
         <p:nvPr/>
       </p:nvGrpSpPr>
-      <p:grpSpPr/>
+      <p:grpSpPr>
+        <a:xfrm>
+          <a:off x="0" y="0"/>
+          <a:ext cx="0" cy="0"/>
+          <a:chOff x="0" y="0"/>
+          <a:chExt cx="0" cy="0"/>
+        </a:xfrm>
+      </p:grpSpPr>
       <p:sp>
         <p:nvSpPr>
           <p:cNvPr id="2" name="Rectangle 1"/>
@@ -17313,6 +17352,7 @@
           <a:lstStyle/>
           <a:p>
             <a:pPr algn="ctr"/>
+            <a:endParaRPr/>
           </a:p>
         </p:txBody>
       </p:sp>
@@ -17333,7 +17373,7 @@
           <a:noFill/>
         </p:spPr>
         <p:txBody>
-          <a:bodyPr wrap="square" anchor="t" lIns="0" rIns="0" tIns="0" bIns="0">
+          <a:bodyPr wrap="square" lIns="0" tIns="0" rIns="0" bIns="0" anchor="t">
             <a:spAutoFit/>
           </a:bodyPr>
           <a:lstStyle/>
@@ -17395,6 +17435,7 @@
           <a:lstStyle/>
           <a:p>
             <a:pPr algn="ctr"/>
+            <a:endParaRPr/>
           </a:p>
         </p:txBody>
       </p:sp>
@@ -17415,7 +17456,7 @@
           <a:noFill/>
         </p:spPr>
         <p:txBody>
-          <a:bodyPr wrap="square" anchor="t" lIns="0" rIns="0" tIns="0" bIns="0">
+          <a:bodyPr wrap="square" lIns="0" tIns="0" rIns="0" bIns="0" anchor="t">
             <a:spAutoFit/>
           </a:bodyPr>
           <a:lstStyle/>
@@ -17454,7 +17495,7 @@
           <a:noFill/>
         </p:spPr>
         <p:txBody>
-          <a:bodyPr wrap="square" anchor="t" lIns="0" rIns="0" tIns="0" bIns="0">
+          <a:bodyPr wrap="square" lIns="0" tIns="0" rIns="0" bIns="0" anchor="t">
             <a:spAutoFit/>
           </a:bodyPr>
           <a:lstStyle/>
@@ -17493,7 +17534,7 @@
           <a:noFill/>
         </p:spPr>
         <p:txBody>
-          <a:bodyPr wrap="square" anchor="t" lIns="0" rIns="0" tIns="0" bIns="0">
+          <a:bodyPr wrap="square" lIns="0" tIns="0" rIns="0" bIns="0" anchor="t">
             <a:spAutoFit/>
           </a:bodyPr>
           <a:lstStyle/>
@@ -17532,7 +17573,7 @@
           <a:noFill/>
         </p:spPr>
         <p:txBody>
-          <a:bodyPr wrap="square" anchor="t" lIns="0" rIns="0" tIns="0" bIns="0">
+          <a:bodyPr wrap="square" lIns="0" tIns="0" rIns="0" bIns="0" anchor="t">
             <a:spAutoFit/>
           </a:bodyPr>
           <a:lstStyle/>
@@ -17571,7 +17612,7 @@
           <a:noFill/>
         </p:spPr>
         <p:txBody>
-          <a:bodyPr wrap="square" anchor="t" lIns="0" rIns="0" tIns="0" bIns="0">
+          <a:bodyPr wrap="square" lIns="0" tIns="0" rIns="0" bIns="0" anchor="t">
             <a:spAutoFit/>
           </a:bodyPr>
           <a:lstStyle/>
@@ -17633,6 +17674,7 @@
           <a:lstStyle/>
           <a:p>
             <a:pPr algn="ctr"/>
+            <a:endParaRPr/>
           </a:p>
         </p:txBody>
       </p:sp>
@@ -17653,7 +17695,7 @@
           <a:noFill/>
         </p:spPr>
         <p:txBody>
-          <a:bodyPr wrap="square" anchor="t" lIns="0" rIns="0" tIns="0" bIns="0">
+          <a:bodyPr wrap="square" lIns="0" tIns="0" rIns="0" bIns="0" anchor="t">
             <a:spAutoFit/>
           </a:bodyPr>
           <a:lstStyle/>
@@ -17692,7 +17734,7 @@
           <a:noFill/>
         </p:spPr>
         <p:txBody>
-          <a:bodyPr wrap="square" anchor="t" lIns="0" rIns="0" tIns="0" bIns="0">
+          <a:bodyPr wrap="square" lIns="0" tIns="0" rIns="0" bIns="0" anchor="t">
             <a:spAutoFit/>
           </a:bodyPr>
           <a:lstStyle/>
@@ -17747,7 +17789,7 @@
           <a:noFill/>
         </p:spPr>
         <p:txBody>
-          <a:bodyPr wrap="square" anchor="t" lIns="0" rIns="0" tIns="0" bIns="0">
+          <a:bodyPr wrap="square" lIns="0" tIns="0" rIns="0" bIns="0" anchor="t">
             <a:spAutoFit/>
           </a:bodyPr>
           <a:lstStyle/>
@@ -17778,7 +17820,7 @@
 </file>
 
 <file path=ppt/slides/slide5.xml><?xml version="1.0" encoding="utf-8"?>
-<p:sld xmlns:a="http://schemas.openxmlformats.org/drawingml/2006/main" xmlns:p="http://schemas.openxmlformats.org/presentationml/2006/main" xmlns:r="http://schemas.openxmlformats.org/officeDocument/2006/relationships">
+<p:sld xmlns:a="http://schemas.openxmlformats.org/drawingml/2006/main" xmlns:r="http://schemas.openxmlformats.org/officeDocument/2006/relationships" xmlns:p="http://schemas.openxmlformats.org/presentationml/2006/main">
   <p:cSld>
     <p:spTree>
       <p:nvGrpSpPr>
@@ -17786,7 +17828,14 @@
         <p:cNvGrpSpPr/>
         <p:nvPr/>
       </p:nvGrpSpPr>
-      <p:grpSpPr/>
+      <p:grpSpPr>
+        <a:xfrm>
+          <a:off x="0" y="0"/>
+          <a:ext cx="0" cy="0"/>
+          <a:chOff x="0" y="0"/>
+          <a:chExt cx="0" cy="0"/>
+        </a:xfrm>
+      </p:grpSpPr>
       <p:sp>
         <p:nvSpPr>
           <p:cNvPr id="2" name="Rectangle 1"/>
@@ -17827,6 +17876,7 @@
           <a:lstStyle/>
           <a:p>
             <a:pPr algn="ctr"/>
+            <a:endParaRPr/>
           </a:p>
         </p:txBody>
       </p:sp>
@@ -17847,7 +17897,7 @@
           <a:noFill/>
         </p:spPr>
         <p:txBody>
-          <a:bodyPr wrap="square" anchor="t" lIns="0" rIns="0" tIns="0" bIns="0">
+          <a:bodyPr wrap="square" lIns="0" tIns="0" rIns="0" bIns="0" anchor="t">
             <a:spAutoFit/>
           </a:bodyPr>
           <a:lstStyle/>
@@ -17909,6 +17959,7 @@
           <a:lstStyle/>
           <a:p>
             <a:pPr algn="ctr"/>
+            <a:endParaRPr/>
           </a:p>
         </p:txBody>
       </p:sp>
@@ -17929,7 +17980,7 @@
           <a:noFill/>
         </p:spPr>
         <p:txBody>
-          <a:bodyPr wrap="square" anchor="t" lIns="0" rIns="0" tIns="0" bIns="0">
+          <a:bodyPr wrap="square" lIns="0" tIns="0" rIns="0" bIns="0" anchor="t">
             <a:spAutoFit/>
           </a:bodyPr>
           <a:lstStyle/>
@@ -17968,7 +18019,7 @@
           <a:noFill/>
         </p:spPr>
         <p:txBody>
-          <a:bodyPr wrap="square" anchor="t" lIns="0" rIns="0" tIns="0" bIns="0">
+          <a:bodyPr wrap="square" lIns="0" tIns="0" rIns="0" bIns="0" anchor="t">
             <a:spAutoFit/>
           </a:bodyPr>
           <a:lstStyle/>
@@ -18007,7 +18058,7 @@
           <a:noFill/>
         </p:spPr>
         <p:txBody>
-          <a:bodyPr wrap="square" anchor="t" lIns="0" rIns="0" tIns="0" bIns="0">
+          <a:bodyPr wrap="square" lIns="0" tIns="0" rIns="0" bIns="0" anchor="t">
             <a:spAutoFit/>
           </a:bodyPr>
           <a:lstStyle/>
@@ -18071,6 +18122,7 @@
           <a:lstStyle/>
           <a:p>
             <a:pPr algn="ctr"/>
+            <a:endParaRPr/>
           </a:p>
         </p:txBody>
       </p:sp>
@@ -18091,7 +18143,7 @@
           <a:noFill/>
         </p:spPr>
         <p:txBody>
-          <a:bodyPr wrap="square" anchor="t" lIns="0" rIns="0" tIns="0" bIns="0">
+          <a:bodyPr wrap="square" lIns="0" tIns="0" rIns="0" bIns="0" anchor="t">
             <a:spAutoFit/>
           </a:bodyPr>
           <a:lstStyle/>
@@ -18178,7 +18230,7 @@
           <a:noFill/>
         </p:spPr>
         <p:txBody>
-          <a:bodyPr wrap="square" anchor="t" lIns="0" rIns="0" tIns="0" bIns="0">
+          <a:bodyPr wrap="square" lIns="0" tIns="0" rIns="0" bIns="0" anchor="t">
             <a:spAutoFit/>
           </a:bodyPr>
           <a:lstStyle/>
@@ -18242,6 +18294,7 @@
           <a:lstStyle/>
           <a:p>
             <a:pPr algn="ctr"/>
+            <a:endParaRPr/>
           </a:p>
         </p:txBody>
       </p:sp>
@@ -18262,7 +18315,7 @@
           <a:noFill/>
         </p:spPr>
         <p:txBody>
-          <a:bodyPr wrap="square" anchor="t" lIns="0" rIns="0" tIns="0" bIns="0">
+          <a:bodyPr wrap="square" lIns="0" tIns="0" rIns="0" bIns="0" anchor="t">
             <a:spAutoFit/>
           </a:bodyPr>
           <a:lstStyle/>
@@ -18356,6 +18409,7 @@
           <a:lstStyle/>
           <a:p>
             <a:pPr algn="ctr"/>
+            <a:endParaRPr/>
           </a:p>
         </p:txBody>
       </p:sp>
@@ -18376,7 +18430,7 @@
           <a:noFill/>
         </p:spPr>
         <p:txBody>
-          <a:bodyPr wrap="square" anchor="t" lIns="0" rIns="0" tIns="0" bIns="0">
+          <a:bodyPr wrap="square" lIns="0" tIns="0" rIns="0" bIns="0" anchor="t">
             <a:spAutoFit/>
           </a:bodyPr>
           <a:lstStyle/>
@@ -18423,7 +18477,7 @@
 </file>
 
 <file path=ppt/slides/slide6.xml><?xml version="1.0" encoding="utf-8"?>
-<p:sld xmlns:a="http://schemas.openxmlformats.org/drawingml/2006/main" xmlns:p="http://schemas.openxmlformats.org/presentationml/2006/main" xmlns:r="http://schemas.openxmlformats.org/officeDocument/2006/relationships">
+<p:sld xmlns:a="http://schemas.openxmlformats.org/drawingml/2006/main" xmlns:r="http://schemas.openxmlformats.org/officeDocument/2006/relationships" xmlns:p="http://schemas.openxmlformats.org/presentationml/2006/main">
   <p:cSld>
     <p:spTree>
       <p:nvGrpSpPr>
@@ -18431,7 +18485,14 @@
         <p:cNvGrpSpPr/>
         <p:nvPr/>
       </p:nvGrpSpPr>
-      <p:grpSpPr/>
+      <p:grpSpPr>
+        <a:xfrm>
+          <a:off x="0" y="0"/>
+          <a:ext cx="0" cy="0"/>
+          <a:chOff x="0" y="0"/>
+          <a:chExt cx="0" cy="0"/>
+        </a:xfrm>
+      </p:grpSpPr>
       <p:sp>
         <p:nvSpPr>
           <p:cNvPr id="2" name="Rectangle 1"/>
@@ -18472,6 +18533,7 @@
           <a:lstStyle/>
           <a:p>
             <a:pPr algn="ctr"/>
+            <a:endParaRPr/>
           </a:p>
         </p:txBody>
       </p:sp>
@@ -18492,7 +18554,7 @@
           <a:noFill/>
         </p:spPr>
         <p:txBody>
-          <a:bodyPr wrap="square" anchor="t" lIns="0" rIns="0" tIns="0" bIns="0">
+          <a:bodyPr wrap="square" lIns="0" tIns="0" rIns="0" bIns="0" anchor="t">
             <a:spAutoFit/>
           </a:bodyPr>
           <a:lstStyle/>
@@ -18554,6 +18616,7 @@
           <a:lstStyle/>
           <a:p>
             <a:pPr algn="ctr"/>
+            <a:endParaRPr/>
           </a:p>
         </p:txBody>
       </p:sp>
@@ -18574,7 +18637,7 @@
           <a:noFill/>
         </p:spPr>
         <p:txBody>
-          <a:bodyPr wrap="square" anchor="t" lIns="0" rIns="0" tIns="0" bIns="0">
+          <a:bodyPr wrap="square" lIns="0" tIns="0" rIns="0" bIns="0" anchor="t">
             <a:spAutoFit/>
           </a:bodyPr>
           <a:lstStyle/>
@@ -18638,6 +18701,7 @@
           <a:lstStyle/>
           <a:p>
             <a:pPr algn="ctr"/>
+            <a:endParaRPr/>
           </a:p>
         </p:txBody>
       </p:sp>
@@ -18658,7 +18722,7 @@
           <a:noFill/>
         </p:spPr>
         <p:txBody>
-          <a:bodyPr wrap="square" anchor="t" lIns="0" rIns="0" tIns="0" bIns="0">
+          <a:bodyPr wrap="square" lIns="0" tIns="0" rIns="0" bIns="0" anchor="t">
             <a:spAutoFit/>
           </a:bodyPr>
           <a:lstStyle/>
@@ -18786,6 +18850,7 @@
           <a:lstStyle/>
           <a:p>
             <a:pPr algn="ctr"/>
+            <a:endParaRPr/>
           </a:p>
         </p:txBody>
       </p:sp>
@@ -18806,7 +18871,7 @@
           <a:noFill/>
         </p:spPr>
         <p:txBody>
-          <a:bodyPr wrap="square" anchor="t" lIns="0" rIns="0" tIns="0" bIns="0">
+          <a:bodyPr wrap="square" lIns="0" tIns="0" rIns="0" bIns="0" anchor="t">
             <a:spAutoFit/>
           </a:bodyPr>
           <a:lstStyle/>
@@ -18932,6 +18997,7 @@
           <a:lstStyle/>
           <a:p>
             <a:pPr algn="ctr"/>
+            <a:endParaRPr/>
           </a:p>
         </p:txBody>
       </p:sp>
@@ -18952,7 +19018,7 @@
           <a:noFill/>
         </p:spPr>
         <p:txBody>
-          <a:bodyPr wrap="square" anchor="t" lIns="0" rIns="0" tIns="0" bIns="0">
+          <a:bodyPr wrap="square" lIns="0" tIns="0" rIns="0" bIns="0" anchor="t">
             <a:spAutoFit/>
           </a:bodyPr>
           <a:lstStyle/>
@@ -18991,7 +19057,7 @@
           <a:noFill/>
         </p:spPr>
         <p:txBody>
-          <a:bodyPr wrap="square" anchor="t" lIns="0" rIns="0" tIns="0" bIns="0">
+          <a:bodyPr wrap="square" lIns="0" tIns="0" rIns="0" bIns="0" anchor="t">
             <a:spAutoFit/>
           </a:bodyPr>
           <a:lstStyle/>
@@ -19053,6 +19119,7 @@
           <a:lstStyle/>
           <a:p>
             <a:pPr algn="ctr"/>
+            <a:endParaRPr/>
           </a:p>
         </p:txBody>
       </p:sp>
@@ -19073,7 +19140,7 @@
           <a:noFill/>
         </p:spPr>
         <p:txBody>
-          <a:bodyPr wrap="square" anchor="t" lIns="0" rIns="0" tIns="0" bIns="0">
+          <a:bodyPr wrap="square" lIns="0" tIns="0" rIns="0" bIns="0" anchor="t">
             <a:spAutoFit/>
           </a:bodyPr>
           <a:lstStyle/>
@@ -19104,7 +19171,7 @@
 </file>
 
 <file path=ppt/slides/slide7.xml><?xml version="1.0" encoding="utf-8"?>
-<p:sld xmlns:a="http://schemas.openxmlformats.org/drawingml/2006/main" xmlns:p="http://schemas.openxmlformats.org/presentationml/2006/main" xmlns:r="http://schemas.openxmlformats.org/officeDocument/2006/relationships">
+<p:sld xmlns:a="http://schemas.openxmlformats.org/drawingml/2006/main" xmlns:r="http://schemas.openxmlformats.org/officeDocument/2006/relationships" xmlns:p="http://schemas.openxmlformats.org/presentationml/2006/main">
   <p:cSld>
     <p:spTree>
       <p:nvGrpSpPr>
@@ -19112,7 +19179,14 @@
         <p:cNvGrpSpPr/>
         <p:nvPr/>
       </p:nvGrpSpPr>
-      <p:grpSpPr/>
+      <p:grpSpPr>
+        <a:xfrm>
+          <a:off x="0" y="0"/>
+          <a:ext cx="0" cy="0"/>
+          <a:chOff x="0" y="0"/>
+          <a:chExt cx="0" cy="0"/>
+        </a:xfrm>
+      </p:grpSpPr>
       <p:sp>
         <p:nvSpPr>
           <p:cNvPr id="2" name="Rectangle 1"/>
@@ -19153,6 +19227,7 @@
           <a:lstStyle/>
           <a:p>
             <a:pPr algn="ctr"/>
+            <a:endParaRPr/>
           </a:p>
         </p:txBody>
       </p:sp>
@@ -19173,7 +19248,7 @@
           <a:noFill/>
         </p:spPr>
         <p:txBody>
-          <a:bodyPr wrap="square" anchor="t" lIns="0" rIns="0" tIns="0" bIns="0">
+          <a:bodyPr wrap="square" lIns="0" tIns="0" rIns="0" bIns="0" anchor="t">
             <a:spAutoFit/>
           </a:bodyPr>
           <a:lstStyle/>
@@ -19235,6 +19310,7 @@
           <a:lstStyle/>
           <a:p>
             <a:pPr algn="ctr"/>
+            <a:endParaRPr/>
           </a:p>
         </p:txBody>
       </p:sp>
@@ -19255,7 +19331,7 @@
           <a:noFill/>
         </p:spPr>
         <p:txBody>
-          <a:bodyPr wrap="square" anchor="t" lIns="0" rIns="0" tIns="0" bIns="0">
+          <a:bodyPr wrap="square" lIns="0" tIns="0" rIns="0" bIns="0" anchor="t">
             <a:spAutoFit/>
           </a:bodyPr>
           <a:lstStyle/>
@@ -19294,7 +19370,7 @@
           <a:noFill/>
         </p:spPr>
         <p:txBody>
-          <a:bodyPr wrap="square" anchor="t" lIns="0" rIns="0" tIns="0" bIns="0">
+          <a:bodyPr wrap="square" lIns="0" tIns="0" rIns="0" bIns="0" anchor="t">
             <a:spAutoFit/>
           </a:bodyPr>
           <a:lstStyle/>
@@ -19358,6 +19434,7 @@
           <a:lstStyle/>
           <a:p>
             <a:pPr algn="ctr"/>
+            <a:endParaRPr/>
           </a:p>
         </p:txBody>
       </p:sp>
@@ -19378,7 +19455,7 @@
           <a:noFill/>
         </p:spPr>
         <p:txBody>
-          <a:bodyPr wrap="square" anchor="t" lIns="0" rIns="0" tIns="0" bIns="0">
+          <a:bodyPr wrap="square" lIns="0" tIns="0" rIns="0" bIns="0" anchor="t">
             <a:spAutoFit/>
           </a:bodyPr>
           <a:lstStyle/>
@@ -19513,7 +19590,7 @@
           <a:noFill/>
         </p:spPr>
         <p:txBody>
-          <a:bodyPr wrap="square" anchor="t" lIns="0" rIns="0" tIns="0" bIns="0">
+          <a:bodyPr wrap="square" lIns="0" tIns="0" rIns="0" bIns="0" anchor="t">
             <a:spAutoFit/>
           </a:bodyPr>
           <a:lstStyle/>
@@ -19575,6 +19652,7 @@
           <a:lstStyle/>
           <a:p>
             <a:pPr algn="ctr"/>
+            <a:endParaRPr/>
           </a:p>
         </p:txBody>
       </p:sp>
@@ -19595,7 +19673,7 @@
           <a:noFill/>
         </p:spPr>
         <p:txBody>
-          <a:bodyPr wrap="square" anchor="t" lIns="0" rIns="0" tIns="0" bIns="0">
+          <a:bodyPr wrap="square" lIns="0" tIns="0" rIns="0" bIns="0" anchor="t">
             <a:spAutoFit/>
           </a:bodyPr>
           <a:lstStyle/>
@@ -19634,7 +19712,7 @@
           <a:noFill/>
         </p:spPr>
         <p:txBody>
-          <a:bodyPr wrap="square" anchor="t" lIns="0" rIns="0" tIns="0" bIns="0">
+          <a:bodyPr wrap="square" lIns="0" tIns="0" rIns="0" bIns="0" anchor="t">
             <a:spAutoFit/>
           </a:bodyPr>
           <a:lstStyle/>
@@ -19696,6 +19774,7 @@
           <a:lstStyle/>
           <a:p>
             <a:pPr algn="ctr"/>
+            <a:endParaRPr/>
           </a:p>
         </p:txBody>
       </p:sp>
@@ -19716,7 +19795,7 @@
           <a:noFill/>
         </p:spPr>
         <p:txBody>
-          <a:bodyPr wrap="square" anchor="t" lIns="0" rIns="0" tIns="0" bIns="0">
+          <a:bodyPr wrap="square" lIns="0" tIns="0" rIns="0" bIns="0" anchor="t">
             <a:spAutoFit/>
           </a:bodyPr>
           <a:lstStyle/>
@@ -19755,7 +19834,7 @@
           <a:noFill/>
         </p:spPr>
         <p:txBody>
-          <a:bodyPr wrap="square" anchor="t" lIns="0" rIns="0" tIns="0" bIns="0">
+          <a:bodyPr wrap="square" lIns="0" tIns="0" rIns="0" bIns="0" anchor="t">
             <a:spAutoFit/>
           </a:bodyPr>
           <a:lstStyle/>
@@ -19817,6 +19896,7 @@
           <a:lstStyle/>
           <a:p>
             <a:pPr algn="ctr"/>
+            <a:endParaRPr/>
           </a:p>
         </p:txBody>
       </p:sp>
@@ -19837,7 +19917,7 @@
           <a:noFill/>
         </p:spPr>
         <p:txBody>
-          <a:bodyPr wrap="square" anchor="t" lIns="0" rIns="0" tIns="0" bIns="0">
+          <a:bodyPr wrap="square" lIns="0" tIns="0" rIns="0" bIns="0" anchor="t">
             <a:spAutoFit/>
           </a:bodyPr>
           <a:lstStyle/>
@@ -19876,7 +19956,7 @@
           <a:noFill/>
         </p:spPr>
         <p:txBody>
-          <a:bodyPr wrap="square" anchor="t" lIns="0" rIns="0" tIns="0" bIns="0">
+          <a:bodyPr wrap="square" lIns="0" tIns="0" rIns="0" bIns="0" anchor="t">
             <a:spAutoFit/>
           </a:bodyPr>
           <a:lstStyle/>
@@ -19938,6 +20018,7 @@
           <a:lstStyle/>
           <a:p>
             <a:pPr algn="ctr"/>
+            <a:endParaRPr/>
           </a:p>
         </p:txBody>
       </p:sp>
@@ -19958,7 +20039,7 @@
           <a:noFill/>
         </p:spPr>
         <p:txBody>
-          <a:bodyPr wrap="square" anchor="t" lIns="0" rIns="0" tIns="0" bIns="0">
+          <a:bodyPr wrap="square" lIns="0" tIns="0" rIns="0" bIns="0" anchor="t">
             <a:spAutoFit/>
           </a:bodyPr>
           <a:lstStyle/>
@@ -19997,7 +20078,7 @@
           <a:noFill/>
         </p:spPr>
         <p:txBody>
-          <a:bodyPr wrap="square" anchor="t" lIns="0" rIns="0" tIns="0" bIns="0">
+          <a:bodyPr wrap="square" lIns="0" tIns="0" rIns="0" bIns="0" anchor="t">
             <a:spAutoFit/>
           </a:bodyPr>
           <a:lstStyle/>
@@ -20028,7 +20109,7 @@
 </file>
 
 <file path=ppt/slides/slide8.xml><?xml version="1.0" encoding="utf-8"?>
-<p:sld xmlns:a="http://schemas.openxmlformats.org/drawingml/2006/main" xmlns:p="http://schemas.openxmlformats.org/presentationml/2006/main" xmlns:r="http://schemas.openxmlformats.org/officeDocument/2006/relationships">
+<p:sld xmlns:a="http://schemas.openxmlformats.org/drawingml/2006/main" xmlns:r="http://schemas.openxmlformats.org/officeDocument/2006/relationships" xmlns:p="http://schemas.openxmlformats.org/presentationml/2006/main">
   <p:cSld>
     <p:spTree>
       <p:nvGrpSpPr>
@@ -20036,7 +20117,14 @@
         <p:cNvGrpSpPr/>
         <p:nvPr/>
       </p:nvGrpSpPr>
-      <p:grpSpPr/>
+      <p:grpSpPr>
+        <a:xfrm>
+          <a:off x="0" y="0"/>
+          <a:ext cx="0" cy="0"/>
+          <a:chOff x="0" y="0"/>
+          <a:chExt cx="0" cy="0"/>
+        </a:xfrm>
+      </p:grpSpPr>
       <p:sp>
         <p:nvSpPr>
           <p:cNvPr id="2" name="Rectangle 1"/>
@@ -20077,6 +20165,7 @@
           <a:lstStyle/>
           <a:p>
             <a:pPr algn="ctr"/>
+            <a:endParaRPr/>
           </a:p>
         </p:txBody>
       </p:sp>
@@ -20097,7 +20186,7 @@
           <a:noFill/>
         </p:spPr>
         <p:txBody>
-          <a:bodyPr wrap="square" anchor="t" lIns="0" rIns="0" tIns="0" bIns="0">
+          <a:bodyPr wrap="square" lIns="0" tIns="0" rIns="0" bIns="0" anchor="t">
             <a:spAutoFit/>
           </a:bodyPr>
           <a:lstStyle/>
@@ -20159,6 +20248,7 @@
           <a:lstStyle/>
           <a:p>
             <a:pPr algn="ctr"/>
+            <a:endParaRPr/>
           </a:p>
         </p:txBody>
       </p:sp>
@@ -20179,7 +20269,7 @@
           <a:noFill/>
         </p:spPr>
         <p:txBody>
-          <a:bodyPr wrap="square" anchor="t" lIns="0" rIns="0" tIns="0" bIns="0">
+          <a:bodyPr wrap="square" lIns="0" tIns="0" rIns="0" bIns="0" anchor="t">
             <a:spAutoFit/>
           </a:bodyPr>
           <a:lstStyle/>
@@ -20241,6 +20331,7 @@
           <a:lstStyle/>
           <a:p>
             <a:pPr algn="ctr"/>
+            <a:endParaRPr/>
           </a:p>
         </p:txBody>
       </p:sp>
@@ -20261,7 +20352,7 @@
           <a:noFill/>
         </p:spPr>
         <p:txBody>
-          <a:bodyPr wrap="square" anchor="t" lIns="0" rIns="0" tIns="0" bIns="0">
+          <a:bodyPr wrap="square" lIns="0" tIns="0" rIns="0" bIns="0" anchor="t">
             <a:spAutoFit/>
           </a:bodyPr>
           <a:lstStyle/>
@@ -20300,7 +20391,7 @@
           <a:noFill/>
         </p:spPr>
         <p:txBody>
-          <a:bodyPr wrap="square" anchor="t" lIns="0" rIns="0" tIns="0" bIns="0">
+          <a:bodyPr wrap="square" lIns="0" tIns="0" rIns="0" bIns="0" anchor="t">
             <a:spAutoFit/>
           </a:bodyPr>
           <a:lstStyle/>
@@ -20364,6 +20455,7 @@
           <a:lstStyle/>
           <a:p>
             <a:pPr algn="ctr"/>
+            <a:endParaRPr/>
           </a:p>
         </p:txBody>
       </p:sp>
@@ -20384,7 +20476,7 @@
           <a:noFill/>
         </p:spPr>
         <p:txBody>
-          <a:bodyPr wrap="square" anchor="t" lIns="0" rIns="0" tIns="0" bIns="0">
+          <a:bodyPr wrap="square" lIns="0" tIns="0" rIns="0" bIns="0" anchor="t">
             <a:spAutoFit/>
           </a:bodyPr>
           <a:lstStyle/>
@@ -20423,7 +20515,7 @@
           <a:noFill/>
         </p:spPr>
         <p:txBody>
-          <a:bodyPr wrap="square" anchor="t" lIns="0" rIns="0" tIns="0" bIns="0">
+          <a:bodyPr wrap="square" lIns="0" tIns="0" rIns="0" bIns="0" anchor="t">
             <a:spAutoFit/>
           </a:bodyPr>
           <a:lstStyle/>
@@ -20462,7 +20554,7 @@
           <a:noFill/>
         </p:spPr>
         <p:txBody>
-          <a:bodyPr wrap="square" anchor="t" lIns="0" rIns="0" tIns="0" bIns="0">
+          <a:bodyPr wrap="square" lIns="0" tIns="0" rIns="0" bIns="0" anchor="t">
             <a:spAutoFit/>
           </a:bodyPr>
           <a:lstStyle/>
@@ -20501,7 +20593,7 @@
           <a:noFill/>
         </p:spPr>
         <p:txBody>
-          <a:bodyPr wrap="square" anchor="t" lIns="0" rIns="0" tIns="0" bIns="0">
+          <a:bodyPr wrap="square" lIns="0" tIns="0" rIns="0" bIns="0" anchor="t">
             <a:spAutoFit/>
           </a:bodyPr>
           <a:lstStyle/>
@@ -20565,6 +20657,7 @@
           <a:lstStyle/>
           <a:p>
             <a:pPr algn="ctr"/>
+            <a:endParaRPr/>
           </a:p>
         </p:txBody>
       </p:sp>
@@ -20585,7 +20678,7 @@
           <a:noFill/>
         </p:spPr>
         <p:txBody>
-          <a:bodyPr wrap="square" anchor="t" lIns="0" rIns="0" tIns="0" bIns="0">
+          <a:bodyPr wrap="square" lIns="0" tIns="0" rIns="0" bIns="0" anchor="t">
             <a:spAutoFit/>
           </a:bodyPr>
           <a:lstStyle/>
@@ -20624,7 +20717,7 @@
           <a:noFill/>
         </p:spPr>
         <p:txBody>
-          <a:bodyPr wrap="square" anchor="t" lIns="0" rIns="0" tIns="0" bIns="0">
+          <a:bodyPr wrap="square" lIns="0" tIns="0" rIns="0" bIns="0" anchor="t">
             <a:spAutoFit/>
           </a:bodyPr>
           <a:lstStyle/>
@@ -20663,7 +20756,7 @@
           <a:noFill/>
         </p:spPr>
         <p:txBody>
-          <a:bodyPr wrap="square" anchor="t" lIns="0" rIns="0" tIns="0" bIns="0">
+          <a:bodyPr wrap="square" lIns="0" tIns="0" rIns="0" bIns="0" anchor="t">
             <a:spAutoFit/>
           </a:bodyPr>
           <a:lstStyle/>
@@ -20702,7 +20795,7 @@
           <a:noFill/>
         </p:spPr>
         <p:txBody>
-          <a:bodyPr wrap="square" anchor="t" lIns="0" rIns="0" tIns="0" bIns="0">
+          <a:bodyPr wrap="square" lIns="0" tIns="0" rIns="0" bIns="0" anchor="t">
             <a:spAutoFit/>
           </a:bodyPr>
           <a:lstStyle/>
@@ -20749,7 +20842,7 @@
 </file>
 
 <file path=ppt/slides/slide9.xml><?xml version="1.0" encoding="utf-8"?>
-<p:sld xmlns:a="http://schemas.openxmlformats.org/drawingml/2006/main" xmlns:p="http://schemas.openxmlformats.org/presentationml/2006/main" xmlns:r="http://schemas.openxmlformats.org/officeDocument/2006/relationships">
+<p:sld xmlns:a="http://schemas.openxmlformats.org/drawingml/2006/main" xmlns:r="http://schemas.openxmlformats.org/officeDocument/2006/relationships" xmlns:p="http://schemas.openxmlformats.org/presentationml/2006/main">
   <p:cSld>
     <p:spTree>
       <p:nvGrpSpPr>
@@ -20757,7 +20850,14 @@
         <p:cNvGrpSpPr/>
         <p:nvPr/>
       </p:nvGrpSpPr>
-      <p:grpSpPr/>
+      <p:grpSpPr>
+        <a:xfrm>
+          <a:off x="0" y="0"/>
+          <a:ext cx="0" cy="0"/>
+          <a:chOff x="0" y="0"/>
+          <a:chExt cx="0" cy="0"/>
+        </a:xfrm>
+      </p:grpSpPr>
       <p:sp>
         <p:nvSpPr>
           <p:cNvPr id="2" name="Rectangle 1"/>
@@ -20798,6 +20898,7 @@
           <a:lstStyle/>
           <a:p>
             <a:pPr algn="ctr"/>
+            <a:endParaRPr/>
           </a:p>
         </p:txBody>
       </p:sp>
@@ -20818,7 +20919,7 @@
           <a:noFill/>
         </p:spPr>
         <p:txBody>
-          <a:bodyPr wrap="square" anchor="t" lIns="0" rIns="0" tIns="0" bIns="0">
+          <a:bodyPr wrap="square" lIns="0" tIns="0" rIns="0" bIns="0" anchor="t">
             <a:spAutoFit/>
           </a:bodyPr>
           <a:lstStyle/>
@@ -20880,6 +20981,7 @@
           <a:lstStyle/>
           <a:p>
             <a:pPr algn="ctr"/>
+            <a:endParaRPr/>
           </a:p>
         </p:txBody>
       </p:sp>
@@ -20900,7 +21002,7 @@
           <a:noFill/>
         </p:spPr>
         <p:txBody>
-          <a:bodyPr wrap="square" anchor="t" lIns="0" rIns="0" tIns="0" bIns="0">
+          <a:bodyPr wrap="square" lIns="0" tIns="0" rIns="0" bIns="0" anchor="t">
             <a:spAutoFit/>
           </a:bodyPr>
           <a:lstStyle/>
@@ -20964,6 +21066,7 @@
           <a:lstStyle/>
           <a:p>
             <a:pPr algn="ctr"/>
+            <a:endParaRPr/>
           </a:p>
         </p:txBody>
       </p:sp>
@@ -20984,7 +21087,7 @@
           <a:noFill/>
         </p:spPr>
         <p:txBody>
-          <a:bodyPr wrap="square" anchor="t" lIns="0" rIns="0" tIns="0" bIns="0">
+          <a:bodyPr wrap="square" lIns="0" tIns="0" rIns="0" bIns="0" anchor="t">
             <a:spAutoFit/>
           </a:bodyPr>
           <a:lstStyle/>
@@ -21023,7 +21126,7 @@
           <a:noFill/>
         </p:spPr>
         <p:txBody>
-          <a:bodyPr wrap="square" anchor="t" lIns="0" rIns="0" tIns="0" bIns="0">
+          <a:bodyPr wrap="square" lIns="0" tIns="0" rIns="0" bIns="0" anchor="t">
             <a:spAutoFit/>
           </a:bodyPr>
           <a:lstStyle/>
@@ -21087,6 +21190,7 @@
           <a:lstStyle/>
           <a:p>
             <a:pPr algn="ctr"/>
+            <a:endParaRPr/>
           </a:p>
         </p:txBody>
       </p:sp>
@@ -21107,7 +21211,7 @@
           <a:noFill/>
         </p:spPr>
         <p:txBody>
-          <a:bodyPr wrap="square" anchor="t" lIns="0" rIns="0" tIns="0" bIns="0">
+          <a:bodyPr wrap="square" lIns="0" tIns="0" rIns="0" bIns="0" anchor="t">
             <a:spAutoFit/>
           </a:bodyPr>
           <a:lstStyle/>
@@ -21169,6 +21273,7 @@
           <a:lstStyle/>
           <a:p>
             <a:pPr algn="ctr"/>
+            <a:endParaRPr/>
           </a:p>
         </p:txBody>
       </p:sp>
@@ -21189,7 +21294,7 @@
           <a:noFill/>
         </p:spPr>
         <p:txBody>
-          <a:bodyPr wrap="square" anchor="t" lIns="0" rIns="0" tIns="0" bIns="0">
+          <a:bodyPr wrap="square" lIns="0" tIns="0" rIns="0" bIns="0" anchor="t">
             <a:spAutoFit/>
           </a:bodyPr>
           <a:lstStyle/>
@@ -21228,7 +21333,7 @@
           <a:noFill/>
         </p:spPr>
         <p:txBody>
-          <a:bodyPr wrap="square" anchor="t" lIns="0" rIns="0" tIns="0" bIns="0">
+          <a:bodyPr wrap="square" lIns="0" tIns="0" rIns="0" bIns="0" anchor="t">
             <a:spAutoFit/>
           </a:bodyPr>
           <a:lstStyle/>
@@ -21290,6 +21395,7 @@
           <a:lstStyle/>
           <a:p>
             <a:pPr algn="ctr"/>
+            <a:endParaRPr/>
           </a:p>
         </p:txBody>
       </p:sp>
@@ -21310,7 +21416,7 @@
           <a:noFill/>
         </p:spPr>
         <p:txBody>
-          <a:bodyPr wrap="square" anchor="t" lIns="0" rIns="0" tIns="0" bIns="0">
+          <a:bodyPr wrap="square" lIns="0" tIns="0" rIns="0" bIns="0" anchor="t">
             <a:spAutoFit/>
           </a:bodyPr>
           <a:lstStyle/>
@@ -21349,7 +21455,7 @@
           <a:noFill/>
         </p:spPr>
         <p:txBody>
-          <a:bodyPr wrap="square" anchor="t" lIns="0" rIns="0" tIns="0" bIns="0">
+          <a:bodyPr wrap="square" lIns="0" tIns="0" rIns="0" bIns="0" anchor="t">
             <a:spAutoFit/>
           </a:bodyPr>
           <a:lstStyle/>
@@ -21411,6 +21517,7 @@
           <a:lstStyle/>
           <a:p>
             <a:pPr algn="ctr"/>
+            <a:endParaRPr/>
           </a:p>
         </p:txBody>
       </p:sp>
@@ -21431,7 +21538,7 @@
           <a:noFill/>
         </p:spPr>
         <p:txBody>
-          <a:bodyPr wrap="square" anchor="t" lIns="0" rIns="0" tIns="0" bIns="0">
+          <a:bodyPr wrap="square" lIns="0" tIns="0" rIns="0" bIns="0" anchor="t">
             <a:spAutoFit/>
           </a:bodyPr>
           <a:lstStyle/>
@@ -21470,7 +21577,7 @@
           <a:noFill/>
         </p:spPr>
         <p:txBody>
-          <a:bodyPr wrap="square" anchor="t" lIns="0" rIns="0" tIns="0" bIns="0">
+          <a:bodyPr wrap="square" lIns="0" tIns="0" rIns="0" bIns="0" anchor="t">
             <a:spAutoFit/>
           </a:bodyPr>
           <a:lstStyle/>
@@ -21831,44 +21938,44 @@
         <a:sysClr val="window" lastClr="FFFFFF"/>
       </a:lt1>
       <a:dk2>
-        <a:srgbClr val="1F497D"/>
+        <a:srgbClr val="0E2841"/>
       </a:dk2>
       <a:lt2>
-        <a:srgbClr val="EEECE1"/>
+        <a:srgbClr val="E8E8E8"/>
       </a:lt2>
       <a:accent1>
-        <a:srgbClr val="4F81BD"/>
+        <a:srgbClr val="156082"/>
       </a:accent1>
       <a:accent2>
-        <a:srgbClr val="C0504D"/>
+        <a:srgbClr val="E97132"/>
       </a:accent2>
       <a:accent3>
-        <a:srgbClr val="9BBB59"/>
+        <a:srgbClr val="196B24"/>
       </a:accent3>
       <a:accent4>
-        <a:srgbClr val="8064A2"/>
+        <a:srgbClr val="0F9ED5"/>
       </a:accent4>
       <a:accent5>
-        <a:srgbClr val="4BACC6"/>
+        <a:srgbClr val="A02B93"/>
       </a:accent5>
       <a:accent6>
-        <a:srgbClr val="F79646"/>
+        <a:srgbClr val="4EA72E"/>
       </a:accent6>
       <a:hlink>
-        <a:srgbClr val="0000FF"/>
+        <a:srgbClr val="467886"/>
       </a:hlink>
       <a:folHlink>
-        <a:srgbClr val="800080"/>
+        <a:srgbClr val="96607D"/>
       </a:folHlink>
     </a:clrScheme>
     <a:fontScheme name="Office">
       <a:majorFont>
-        <a:latin typeface="Calibri"/>
+        <a:latin typeface="Aptos Display" panose="02110004020202020204"/>
         <a:ea typeface=""/>
         <a:cs typeface=""/>
-        <a:font script="Jpan" typeface="ＭＳ Ｐゴシック"/>
+        <a:font script="Jpan" typeface="游ゴシック Light"/>
         <a:font script="Hang" typeface="맑은 고딕"/>
-        <a:font script="Hans" typeface="宋体"/>
+        <a:font script="Hans" typeface="等线 Light"/>
         <a:font script="Hant" typeface="新細明體"/>
         <a:font script="Arab" typeface="Times New Roman"/>
         <a:font script="Hebr" typeface="Times New Roman"/>
@@ -21896,14 +22003,31 @@
         <a:font script="Viet" typeface="Times New Roman"/>
         <a:font script="Uigh" typeface="Microsoft Uighur"/>
         <a:font script="Geor" typeface="Sylfaen"/>
+        <a:font script="Armn" typeface="Arial"/>
+        <a:font script="Bugi" typeface="Leelawadee UI"/>
+        <a:font script="Bopo" typeface="Microsoft JhengHei"/>
+        <a:font script="Java" typeface="Javanese Text"/>
+        <a:font script="Lisu" typeface="Segoe UI"/>
+        <a:font script="Mymr" typeface="Myanmar Text"/>
+        <a:font script="Nkoo" typeface="Ebrima"/>
+        <a:font script="Olck" typeface="Nirmala UI"/>
+        <a:font script="Osma" typeface="Ebrima"/>
+        <a:font script="Phag" typeface="Phagspa"/>
+        <a:font script="Syrn" typeface="Estrangelo Edessa"/>
+        <a:font script="Syrj" typeface="Estrangelo Edessa"/>
+        <a:font script="Syre" typeface="Estrangelo Edessa"/>
+        <a:font script="Sora" typeface="Nirmala UI"/>
+        <a:font script="Tale" typeface="Microsoft Tai Le"/>
+        <a:font script="Talu" typeface="Microsoft New Tai Lue"/>
+        <a:font script="Tfng" typeface="Ebrima"/>
       </a:majorFont>
       <a:minorFont>
-        <a:latin typeface="Calibri"/>
+        <a:latin typeface="Aptos" panose="02110004020202020204"/>
         <a:ea typeface=""/>
         <a:cs typeface=""/>
-        <a:font script="Jpan" typeface="ＭＳ Ｐゴシック"/>
+        <a:font script="Jpan" typeface="游ゴシック"/>
         <a:font script="Hang" typeface="맑은 고딕"/>
-        <a:font script="Hans" typeface="宋体"/>
+        <a:font script="Hans" typeface="等线"/>
         <a:font script="Hant" typeface="新細明體"/>
         <a:font script="Arab" typeface="Arial"/>
         <a:font script="Hebr" typeface="Arial"/>
@@ -21931,6 +22055,23 @@
         <a:font script="Viet" typeface="Arial"/>
         <a:font script="Uigh" typeface="Microsoft Uighur"/>
         <a:font script="Geor" typeface="Sylfaen"/>
+        <a:font script="Armn" typeface="Arial"/>
+        <a:font script="Bugi" typeface="Leelawadee UI"/>
+        <a:font script="Bopo" typeface="Microsoft JhengHei"/>
+        <a:font script="Java" typeface="Javanese Text"/>
+        <a:font script="Lisu" typeface="Segoe UI"/>
+        <a:font script="Mymr" typeface="Myanmar Text"/>
+        <a:font script="Nkoo" typeface="Ebrima"/>
+        <a:font script="Olck" typeface="Nirmala UI"/>
+        <a:font script="Osma" typeface="Ebrima"/>
+        <a:font script="Phag" typeface="Phagspa"/>
+        <a:font script="Syrn" typeface="Estrangelo Edessa"/>
+        <a:font script="Syrj" typeface="Estrangelo Edessa"/>
+        <a:font script="Syre" typeface="Estrangelo Edessa"/>
+        <a:font script="Sora" typeface="Nirmala UI"/>
+        <a:font script="Tale" typeface="Microsoft Tai Le"/>
+        <a:font script="Talu" typeface="Microsoft New Tai Lue"/>
+        <a:font script="Tfng" typeface="Ebrima"/>
       </a:minorFont>
     </a:fontScheme>
     <a:fmtScheme name="Office">
@@ -21942,180 +22083,136 @@
           <a:gsLst>
             <a:gs pos="0">
               <a:schemeClr val="phClr">
-                <a:tint val="50000"/>
-                <a:satMod val="300000"/>
+                <a:lumMod val="110000"/>
+                <a:satMod val="105000"/>
+                <a:tint val="67000"/>
               </a:schemeClr>
             </a:gs>
-            <a:gs pos="35000">
+            <a:gs pos="50000">
               <a:schemeClr val="phClr">
-                <a:tint val="37000"/>
-                <a:satMod val="300000"/>
+                <a:lumMod val="105000"/>
+                <a:satMod val="103000"/>
+                <a:tint val="73000"/>
               </a:schemeClr>
             </a:gs>
             <a:gs pos="100000">
               <a:schemeClr val="phClr">
-                <a:tint val="15000"/>
-                <a:satMod val="350000"/>
+                <a:lumMod val="105000"/>
+                <a:satMod val="109000"/>
+                <a:tint val="81000"/>
               </a:schemeClr>
             </a:gs>
           </a:gsLst>
-          <a:lin ang="16200000" scaled="1"/>
+          <a:lin ang="5400000" scaled="0"/>
         </a:gradFill>
         <a:gradFill rotWithShape="1">
           <a:gsLst>
             <a:gs pos="0">
               <a:schemeClr val="phClr">
-                <a:tint val="100000"/>
+                <a:satMod val="103000"/>
+                <a:lumMod val="102000"/>
+                <a:tint val="94000"/>
+              </a:schemeClr>
+            </a:gs>
+            <a:gs pos="50000">
+              <a:schemeClr val="phClr">
+                <a:satMod val="110000"/>
+                <a:lumMod val="100000"/>
                 <a:shade val="100000"/>
-                <a:satMod val="130000"/>
               </a:schemeClr>
             </a:gs>
             <a:gs pos="100000">
               <a:schemeClr val="phClr">
-                <a:tint val="50000"/>
-                <a:shade val="100000"/>
-                <a:satMod val="350000"/>
+                <a:lumMod val="99000"/>
+                <a:satMod val="120000"/>
+                <a:shade val="78000"/>
               </a:schemeClr>
             </a:gs>
           </a:gsLst>
-          <a:lin ang="16200000" scaled="0"/>
+          <a:lin ang="5400000" scaled="0"/>
         </a:gradFill>
       </a:fillStyleLst>
       <a:lnStyleLst>
-        <a:ln w="9525" cap="flat" cmpd="sng" algn="ctr">
+        <a:ln w="12700" cap="flat" cmpd="sng" algn="ctr">
           <a:solidFill>
-            <a:schemeClr val="phClr">
-              <a:shade val="95000"/>
-              <a:satMod val="105000"/>
-            </a:schemeClr>
+            <a:schemeClr val="phClr"/>
           </a:solidFill>
           <a:prstDash val="solid"/>
+          <a:miter lim="800000"/>
+        </a:ln>
+        <a:ln w="19050" cap="flat" cmpd="sng" algn="ctr">
+          <a:solidFill>
+            <a:schemeClr val="phClr"/>
+          </a:solidFill>
+          <a:prstDash val="solid"/>
+          <a:miter lim="800000"/>
         </a:ln>
         <a:ln w="25400" cap="flat" cmpd="sng" algn="ctr">
           <a:solidFill>
             <a:schemeClr val="phClr"/>
           </a:solidFill>
           <a:prstDash val="solid"/>
-        </a:ln>
-        <a:ln w="38100" cap="flat" cmpd="sng" algn="ctr">
-          <a:solidFill>
-            <a:schemeClr val="phClr"/>
-          </a:solidFill>
-          <a:prstDash val="solid"/>
+          <a:miter lim="800000"/>
         </a:ln>
       </a:lnStyleLst>
       <a:effectStyleLst>
         <a:effectStyle>
+          <a:effectLst/>
+        </a:effectStyle>
+        <a:effectStyle>
+          <a:effectLst/>
+        </a:effectStyle>
+        <a:effectStyle>
           <a:effectLst>
-            <a:outerShdw blurRad="40000" dist="20000" dir="5400000" rotWithShape="0">
+            <a:outerShdw blurRad="57150" dist="19050" dir="5400000" algn="ctr" rotWithShape="0">
               <a:srgbClr val="000000">
-                <a:alpha val="38000"/>
+                <a:alpha val="63000"/>
               </a:srgbClr>
             </a:outerShdw>
           </a:effectLst>
-        </a:effectStyle>
-        <a:effectStyle>
-          <a:effectLst>
-            <a:outerShdw blurRad="40000" dist="23000" dir="5400000" rotWithShape="0">
-              <a:srgbClr val="000000">
-                <a:alpha val="35000"/>
-              </a:srgbClr>
-            </a:outerShdw>
-          </a:effectLst>
-        </a:effectStyle>
-        <a:effectStyle>
-          <a:effectLst>
-            <a:outerShdw blurRad="40000" dist="23000" dir="5400000" rotWithShape="0">
-              <a:srgbClr val="000000">
-                <a:alpha val="35000"/>
-              </a:srgbClr>
-            </a:outerShdw>
-          </a:effectLst>
-          <a:scene3d>
-            <a:camera prst="orthographicFront">
-              <a:rot lat="0" lon="0" rev="0"/>
-            </a:camera>
-            <a:lightRig rig="threePt" dir="t">
-              <a:rot lat="0" lon="0" rev="1200000"/>
-            </a:lightRig>
-          </a:scene3d>
-          <a:sp3d>
-            <a:bevelT w="63500" h="25400"/>
-          </a:sp3d>
         </a:effectStyle>
       </a:effectStyleLst>
       <a:bgFillStyleLst>
         <a:solidFill>
           <a:schemeClr val="phClr"/>
         </a:solidFill>
+        <a:solidFill>
+          <a:schemeClr val="phClr">
+            <a:tint val="95000"/>
+            <a:satMod val="170000"/>
+          </a:schemeClr>
+        </a:solidFill>
         <a:gradFill rotWithShape="1">
           <a:gsLst>
             <a:gs pos="0">
               <a:schemeClr val="phClr">
-                <a:tint val="40000"/>
-                <a:satMod val="350000"/>
+                <a:tint val="93000"/>
+                <a:satMod val="150000"/>
+                <a:shade val="98000"/>
+                <a:lumMod val="102000"/>
               </a:schemeClr>
             </a:gs>
-            <a:gs pos="40000">
+            <a:gs pos="50000">
               <a:schemeClr val="phClr">
-                <a:tint val="45000"/>
-                <a:shade val="99000"/>
-                <a:satMod val="350000"/>
+                <a:tint val="98000"/>
+                <a:satMod val="130000"/>
+                <a:shade val="90000"/>
+                <a:lumMod val="103000"/>
               </a:schemeClr>
             </a:gs>
             <a:gs pos="100000">
               <a:schemeClr val="phClr">
-                <a:shade val="20000"/>
-                <a:satMod val="255000"/>
+                <a:shade val="63000"/>
+                <a:satMod val="120000"/>
               </a:schemeClr>
             </a:gs>
           </a:gsLst>
-          <a:path path="circle">
-            <a:fillToRect l="50000" t="-80000" r="50000" b="180000"/>
-          </a:path>
-        </a:gradFill>
-        <a:gradFill rotWithShape="1">
-          <a:gsLst>
-            <a:gs pos="0">
-              <a:schemeClr val="phClr">
-                <a:tint val="80000"/>
-                <a:satMod val="300000"/>
-              </a:schemeClr>
-            </a:gs>
-            <a:gs pos="100000">
-              <a:schemeClr val="phClr">
-                <a:shade val="30000"/>
-                <a:satMod val="200000"/>
-              </a:schemeClr>
-            </a:gs>
-          </a:gsLst>
-          <a:path path="circle">
-            <a:fillToRect l="50000" t="50000" r="50000" b="50000"/>
-          </a:path>
+          <a:lin ang="5400000" scaled="0"/>
         </a:gradFill>
       </a:bgFillStyleLst>
     </a:fmtScheme>
   </a:themeElements>
   <a:objectDefaults>
-    <a:spDef>
-      <a:spPr/>
-      <a:bodyPr/>
-      <a:lstStyle/>
-      <a:style>
-        <a:lnRef idx="1">
-          <a:schemeClr val="accent1"/>
-        </a:lnRef>
-        <a:fillRef idx="3">
-          <a:schemeClr val="accent1"/>
-        </a:fillRef>
-        <a:effectRef idx="2">
-          <a:schemeClr val="accent1"/>
-        </a:effectRef>
-        <a:fontRef idx="minor">
-          <a:schemeClr val="lt1"/>
-        </a:fontRef>
-      </a:style>
-    </a:spDef>
     <a:lnDef>
       <a:spPr/>
       <a:bodyPr/>
@@ -22137,5 +22234,10 @@
     </a:lnDef>
   </a:objectDefaults>
   <a:extraClrSchemeLst/>
+  <a:extLst>
+    <a:ext uri="{05A4C25C-085E-4340-85A3-A5531E510DB2}">
+      <thm15:themeFamily xmlns:thm15="http://schemas.microsoft.com/office/thememl/2012/main" name="Office Theme" id="{2E142A2C-CD16-42D6-873A-C26D2A0506FA}" vid="{1BDDFF52-6CD6-40A5-AB3C-68EB2F1E4D0A}"/>
+    </a:ext>
+  </a:extLst>
 </a:theme>
 </file>